--- a/Docs/AURA_SENTINEL_SIH26105.pptx
+++ b/Docs/AURA_SENTINEL_SIH26105.pptx
@@ -3227,6 +3227,66 @@
               </a:defRPr>
             </a:pPr>
             <a:r>
+              <a:t>• Team Name &amp; ID: </a:t>
+            </a:r>
+            <a:r>
+              <a:rPr b="0">
+                <a:solidFill>
+                  <a:srgbClr val="F1F5F9"/>
+                </a:solidFill>
+              </a:rPr>
+              <a:t>ByteForce_1 (Official SIH Team ID: 180219)</a:t>
+            </a:r>
+          </a:p>
+          <a:p>
+            <a:pPr>
+              <a:defRPr sz="1200" b="1">
+                <a:solidFill>
+                  <a:srgbClr val="FBBF24"/>
+                </a:solidFill>
+              </a:defRPr>
+            </a:pPr>
+            <a:r>
+              <a:t>• College / Institute: </a:t>
+            </a:r>
+            <a:r>
+              <a:rPr b="0">
+                <a:solidFill>
+                  <a:srgbClr val="F1F5F9"/>
+                </a:solidFill>
+              </a:rPr>
+              <a:t>Skyline Institute of Engineering and Technology, Greater Noida</a:t>
+            </a:r>
+          </a:p>
+          <a:p>
+            <a:pPr>
+              <a:defRPr sz="1200" b="1">
+                <a:solidFill>
+                  <a:srgbClr val="FBBF24"/>
+                </a:solidFill>
+              </a:defRPr>
+            </a:pPr>
+            <a:r>
+              <a:t>• Team Leader &amp; Members: </a:t>
+            </a:r>
+            <a:r>
+              <a:rPr b="0">
+                <a:solidFill>
+                  <a:srgbClr val="F1F5F9"/>
+                </a:solidFill>
+              </a:rPr>
+              <a:t>Aryan Baghel (Lead), Kirti, Hitesh Chauhan, Avinav Jha, Sharim Khan, Aman Sekh</a:t>
+            </a:r>
+          </a:p>
+          <a:p>
+            <a:pPr>
+              <a:defRPr sz="1200" b="1">
+                <a:solidFill>
+                  <a:srgbClr val="FBBF24"/>
+                </a:solidFill>
+              </a:defRPr>
+            </a:pPr>
+            <a:r>
               <a:t>• Problem Statement ID: </a:t>
             </a:r>
             <a:r>
@@ -3235,7 +3295,7 @@
                   <a:srgbClr val="F1F5F9"/>
                 </a:solidFill>
               </a:rPr>
-              <a:t>SIH26105</a:t>
+              <a:t>SIH26105 (AICTE Cyber Security Cell)</a:t>
             </a:r>
           </a:p>
           <a:p>
@@ -3247,7 +3307,7 @@
               </a:defRPr>
             </a:pPr>
             <a:r>
-              <a:t>• Theme: </a:t>
+              <a:t>• Theme &amp; Category: </a:t>
             </a:r>
             <a:r>
               <a:rPr b="0">
@@ -3255,47 +3315,7 @@
                   <a:srgbClr val="F1F5F9"/>
                 </a:solidFill>
               </a:rPr>
-              <a:t>Blockchain &amp; Cybersecurity</a:t>
-            </a:r>
-          </a:p>
-          <a:p>
-            <a:pPr>
-              <a:defRPr sz="1200" b="1">
-                <a:solidFill>
-                  <a:srgbClr val="FBBF24"/>
-                </a:solidFill>
-              </a:defRPr>
-            </a:pPr>
-            <a:r>
-              <a:t>• Target Organization: </a:t>
-            </a:r>
-            <a:r>
-              <a:rPr b="0">
-                <a:solidFill>
-                  <a:srgbClr val="F1F5F9"/>
-                </a:solidFill>
-              </a:rPr>
-              <a:t>All India Council for Technical Education (AICTE - Cyber Security Cell)</a:t>
-            </a:r>
-          </a:p>
-          <a:p>
-            <a:pPr>
-              <a:defRPr sz="1200" b="1">
-                <a:solidFill>
-                  <a:srgbClr val="FBBF24"/>
-                </a:solidFill>
-              </a:defRPr>
-            </a:pPr>
-            <a:r>
-              <a:t>• Category &amp; Domain: </a:t>
-            </a:r>
-            <a:r>
-              <a:rPr b="0">
-                <a:solidFill>
-                  <a:srgbClr val="F1F5F9"/>
-                </a:solidFill>
-              </a:rPr>
-              <a:t>Enterprise &amp; Higher Education Cyber Defense (Software)</a:t>
+              <a:t>Blockchain &amp; Cybersecurity (Software - Enterprise Defense)</a:t>
             </a:r>
           </a:p>
           <a:p>

--- a/Docs/AURA_SENTINEL_SIH26105.pptx
+++ b/Docs/AURA_SENTINEL_SIH26105.pptx
@@ -4601,7 +4601,7 @@
               </a:defRPr>
             </a:pPr>
             <a:r>
-              <a:t>EAL (₹) = TEF × Vulnerability Factor × Loss Magnitude (₹)</a:t>
+              <a:t>EAL (₹) = TEF × Vulnerability Factor × Loss Magnitude (₹) | Value at Risk (VaR 95%)</a:t>
             </a:r>
             <a:br/>
             <a:r>
@@ -4617,7 +4617,7 @@
               </a:defRPr>
             </a:pPr>
             <a:r>
-              <a:t>Replaces unquantified CVE severity scores with definitive INR liability figures understood by institutional finance heads.</a:t>
+              <a:t>Replaces unquantified CVE scores with definitive INR liability &amp; Value at Risk (VaR) figures understood by CFOs/Directors.</a:t>
             </a:r>
           </a:p>
         </p:txBody>
@@ -4690,7 +4690,7 @@
             </a:r>
             <a:br/>
             <a:r>
-              <a:t>Constraint: Σ(Solution Costs) ≤ Total Budget (₹)</a:t>
+              <a:t>Budget Constraint: Σ(Costs) ≤ Institutional Budget (e.g. ₹1 Crore)</a:t>
             </a:r>
           </a:p>
           <a:p>
@@ -4702,7 +4702,7 @@
               </a:defRPr>
             </a:pPr>
             <a:r>
-              <a:t>Dynamic programming formulation yields the Pareto-optimal defense deployment for any given institutional budget.</a:t>
+              <a:t>Dynamic programming Pareto frontier reveals diminishing returns &amp; optimal spend zones for board-level decisions.</a:t>
             </a:r>
           </a:p>
         </p:txBody>
@@ -5489,7 +5489,7 @@
               </a:defRPr>
             </a:pPr>
             <a:r>
-              <a:t>📜 CERT-In Cyber Security Directions (April 2022):</a:t>
+              <a:t>📜 RBI &amp; SEBI Cyber Resilience Frameworks:</a:t>
             </a:r>
             <a:br/>
             <a:r>
@@ -5501,7 +5501,7 @@
                   <a:srgbClr val="94A3B8"/>
                 </a:solidFill>
               </a:rPr>
-              <a:t>Mandates strict preservation of cyber incident logs for 180 days. AURA's blockchain ledger guarantees immutable, un-erasable compliance.</a:t>
+              <a:t>Native regulatory control mapping, risk threshold alerting, and board-level risk posture reporting.</a:t>
             </a:r>
           </a:p>
           <a:p>
@@ -5516,7 +5516,7 @@
               </a:defRPr>
             </a:pPr>
             <a:r>
-              <a:t>📜 Digital Personal Data Protection (DPDP) Act 2023:</a:t>
+              <a:t>📜 ISO/IEC 27001 &amp; NIST CSF 2.0 &amp; CIS Controls:</a:t>
             </a:r>
             <a:br/>
             <a:r>
@@ -5528,7 +5528,7 @@
                   <a:srgbClr val="94A3B8"/>
                 </a:solidFill>
               </a:rPr>
-              <a:t>Built-in sensitive scanner identifies unmasked Aadhaar, PAN numbers, and API credentials to avert massive regulatory fines.</a:t>
+              <a:t>Automated evidence aggregation across Identify, Protect, Detect, Respond, Recover functions.</a:t>
             </a:r>
           </a:p>
           <a:p>
@@ -5543,7 +5543,7 @@
               </a:defRPr>
             </a:pPr>
             <a:r>
-              <a:t>📜 NIST Cybersecurity Framework 2.0:</a:t>
+              <a:t>📜 CERT-In Directions (April 2022) &amp; DPDP Act 2023:</a:t>
             </a:r>
             <a:br/>
             <a:r>
@@ -5555,7 +5555,7 @@
                   <a:srgbClr val="94A3B8"/>
                 </a:solidFill>
               </a:rPr>
-              <a:t>Comprehensive mapping to all 5 core functions: Identify, Protect, Detect, Respond, Recover.</a:t>
+              <a:t>Mandatory 180-day unalterable incident log retention via SHA-256 Merkle blockchain + Indian PII protection.</a:t>
             </a:r>
           </a:p>
           <a:p>
@@ -5570,7 +5570,7 @@
               </a:defRPr>
             </a:pPr>
             <a:r>
-              <a:t>📜 MITRE ATT&amp;CK Matrix v15:</a:t>
+              <a:t>📜 MITRE ATT&amp;CK Matrix v15 &amp; What-If Simulations:</a:t>
             </a:r>
             <a:br/>
             <a:r>
@@ -5582,7 +5582,7 @@
                   <a:srgbClr val="94A3B8"/>
                 </a:solidFill>
               </a:rPr>
-              <a:t>Real-time wargame attack simulation across brute force, port scans, and reverse shell vulnerabilities.</a:t>
+              <a:t>Real-time threat actor TTP mappings &amp; scenario modeling (e.g. MFA deployment vs 30-day patch delay).</a:t>
             </a:r>
           </a:p>
         </p:txBody>

--- a/Docs/AURA_SENTINEL_SIH26105.pptx
+++ b/Docs/AURA_SENTINEL_SIH26105.pptx
@@ -11,6 +11,14 @@
     <p:sldId id="259" r:id="rId10"/>
     <p:sldId id="260" r:id="rId11"/>
     <p:sldId id="261" r:id="rId12"/>
+    <p:sldId id="262" r:id="rId13"/>
+    <p:sldId id="263" r:id="rId14"/>
+    <p:sldId id="264" r:id="rId15"/>
+    <p:sldId id="265" r:id="rId16"/>
+    <p:sldId id="266" r:id="rId17"/>
+    <p:sldId id="267" r:id="rId18"/>
+    <p:sldId id="268" r:id="rId19"/>
+    <p:sldId id="269" r:id="rId20"/>
   </p:sldIdLst>
   <p:sldSz cx="12191695" cy="6858000" type="screen4x3"/>
   <p:notesSz cx="6858000" cy="9144000"/>
@@ -3144,8 +3152,8 @@
         </p:nvSpPr>
         <p:spPr>
           <a:xfrm>
-            <a:off x="1097280" y="914400"/>
-            <a:ext cx="9966960" cy="5029200"/>
+            <a:off x="1097280" y="822960"/>
+            <a:ext cx="9966960" cy="5212080"/>
           </a:xfrm>
           <a:prstGeom prst="roundRect">
             <a:avLst/>
@@ -3174,10 +3182,366 @@
           </a:fontRef>
         </p:style>
         <p:txBody>
-          <a:bodyPr rtlCol="0" anchor="ctr" wrap="square" lIns="548640" rIns="548640" tIns="457200"/>
+          <a:bodyPr rtlCol="0" anchor="ctr" wrap="square" lIns="548640" rIns="548640" tIns="365760"/>
           <a:lstStyle/>
           <a:p>
             <a:pPr algn="ctr">
+              <a:defRPr sz="1300" b="1">
+                <a:solidFill>
+                  <a:srgbClr val="22D3EE"/>
+                </a:solidFill>
+              </a:defRPr>
+            </a:pPr>
+            <a:r>
+              <a:t>SMART INDIA HACKATHON 2026 — OFFICIAL NOMINATION</a:t>
+            </a:r>
+          </a:p>
+          <a:p>
+            <a:pPr>
+              <a:spcAft>
+                <a:spcPts val="600"/>
+              </a:spcAft>
+              <a:defRPr sz="3800" b="1">
+                <a:solidFill>
+                  <a:srgbClr val="F1F5F9"/>
+                </a:solidFill>
+              </a:defRPr>
+            </a:pPr>
+            <a:r>
+              <a:t>AURA SENTINEL</a:t>
+            </a:r>
+          </a:p>
+          <a:p>
+            <a:pPr>
+              <a:spcAft>
+                <a:spcPts val="1400"/>
+              </a:spcAft>
+              <a:defRPr sz="1600" b="1">
+                <a:solidFill>
+                  <a:srgbClr val="34D399"/>
+                </a:solidFill>
+              </a:defRPr>
+            </a:pPr>
+            <a:r>
+              <a:t>AI-Powered Continuous Cyber Risk Quantification &amp; Investment Optimization Platform</a:t>
+            </a:r>
+          </a:p>
+          <a:p>
+            <a:pPr>
+              <a:spcAft>
+                <a:spcPts val="300"/>
+              </a:spcAft>
+              <a:defRPr sz="1100" b="1">
+                <a:solidFill>
+                  <a:srgbClr val="FBBF24"/>
+                </a:solidFill>
+              </a:defRPr>
+            </a:pPr>
+            <a:r>
+              <a:t>• Team Name &amp; ID: </a:t>
+            </a:r>
+            <a:r>
+              <a:rPr b="0">
+                <a:solidFill>
+                  <a:srgbClr val="F1F5F9"/>
+                </a:solidFill>
+              </a:rPr>
+              <a:t>ByteForce_1 (Official SIH Team ID: 180219)</a:t>
+            </a:r>
+          </a:p>
+          <a:p>
+            <a:pPr>
+              <a:spcAft>
+                <a:spcPts val="300"/>
+              </a:spcAft>
+              <a:defRPr sz="1100" b="1">
+                <a:solidFill>
+                  <a:srgbClr val="FBBF24"/>
+                </a:solidFill>
+              </a:defRPr>
+            </a:pPr>
+            <a:r>
+              <a:t>• College / Institute: </a:t>
+            </a:r>
+            <a:r>
+              <a:rPr b="0">
+                <a:solidFill>
+                  <a:srgbClr val="F1F5F9"/>
+                </a:solidFill>
+              </a:rPr>
+              <a:t>Skyline Institute of Engineering and Technology, Greater Noida</a:t>
+            </a:r>
+          </a:p>
+          <a:p>
+            <a:pPr>
+              <a:spcAft>
+                <a:spcPts val="300"/>
+              </a:spcAft>
+              <a:defRPr sz="1100" b="1">
+                <a:solidFill>
+                  <a:srgbClr val="FBBF24"/>
+                </a:solidFill>
+              </a:defRPr>
+            </a:pPr>
+            <a:r>
+              <a:t>• Team Members: </a:t>
+            </a:r>
+            <a:r>
+              <a:rPr b="0">
+                <a:solidFill>
+                  <a:srgbClr val="F1F5F9"/>
+                </a:solidFill>
+              </a:rPr>
+              <a:t>Aryan Baghel (Lead), Kirti, Hitesh Chauhan, Avinav Jha, Sharim Khan, Aman Sekh</a:t>
+            </a:r>
+          </a:p>
+          <a:p>
+            <a:pPr>
+              <a:spcAft>
+                <a:spcPts val="300"/>
+              </a:spcAft>
+              <a:defRPr sz="1100" b="1">
+                <a:solidFill>
+                  <a:srgbClr val="FBBF24"/>
+                </a:solidFill>
+              </a:defRPr>
+            </a:pPr>
+            <a:r>
+              <a:t>• Problem Statement ID: </a:t>
+            </a:r>
+            <a:r>
+              <a:rPr b="0">
+                <a:solidFill>
+                  <a:srgbClr val="F1F5F9"/>
+                </a:solidFill>
+              </a:rPr>
+              <a:t>SIH26105 | Ministry of Education Innovation Cell (MIC) &amp; AICTE Cyber Security Cell</a:t>
+            </a:r>
+          </a:p>
+          <a:p>
+            <a:pPr>
+              <a:spcAft>
+                <a:spcPts val="300"/>
+              </a:spcAft>
+              <a:defRPr sz="1100" b="1">
+                <a:solidFill>
+                  <a:srgbClr val="FBBF24"/>
+                </a:solidFill>
+              </a:defRPr>
+            </a:pPr>
+            <a:r>
+              <a:t>• Theme &amp; Category: </a:t>
+            </a:r>
+            <a:r>
+              <a:rPr b="0">
+                <a:solidFill>
+                  <a:srgbClr val="F1F5F9"/>
+                </a:solidFill>
+              </a:rPr>
+              <a:t>Blockchain &amp; Cybersecurity (Software Solution)</a:t>
+            </a:r>
+          </a:p>
+          <a:p>
+            <a:pPr>
+              <a:spcAft>
+                <a:spcPts val="300"/>
+              </a:spcAft>
+              <a:defRPr sz="1100" b="1">
+                <a:solidFill>
+                  <a:srgbClr val="FBBF24"/>
+                </a:solidFill>
+              </a:defRPr>
+            </a:pPr>
+            <a:r>
+              <a:t>• Core Mission: </a:t>
+            </a:r>
+            <a:r>
+              <a:rPr b="0">
+                <a:solidFill>
+                  <a:srgbClr val="F1F5F9"/>
+                </a:solidFill>
+              </a:rPr>
+              <a:t>Correlating technical security telemetry with business asset value to provide continuous financial exposure estimates and budget-constrained defense optimization.</a:t>
+            </a:r>
+          </a:p>
+        </p:txBody>
+      </p:sp>
+    </p:spTree>
+  </p:cSld>
+  <p:clrMapOvr>
+    <a:masterClrMapping/>
+  </p:clrMapOvr>
+</p:sld>
+</file>
+
+<file path=ppt/slides/slide10.xml><?xml version="1.0" encoding="utf-8"?>
+<p:sld xmlns:a="http://schemas.openxmlformats.org/drawingml/2006/main" xmlns:p="http://schemas.openxmlformats.org/presentationml/2006/main" xmlns:r="http://schemas.openxmlformats.org/officeDocument/2006/relationships">
+  <p:cSld>
+    <p:spTree>
+      <p:nvGrpSpPr>
+        <p:cNvPr id="1" name=""/>
+        <p:cNvGrpSpPr/>
+        <p:nvPr/>
+      </p:nvGrpSpPr>
+      <p:grpSpPr/>
+      <p:sp>
+        <p:nvSpPr>
+          <p:cNvPr id="2" name="Rectangle 1"/>
+          <p:cNvSpPr/>
+          <p:nvPr/>
+        </p:nvSpPr>
+        <p:spPr>
+          <a:xfrm>
+            <a:off x="0" y="0"/>
+            <a:ext cx="12191695" cy="6858000"/>
+          </a:xfrm>
+          <a:prstGeom prst="rect">
+            <a:avLst/>
+          </a:prstGeom>
+          <a:solidFill>
+            <a:srgbClr val="0B0F19"/>
+          </a:solidFill>
+          <a:ln>
+            <a:noFill/>
+          </a:ln>
+        </p:spPr>
+        <p:style>
+          <a:lnRef idx="1">
+            <a:schemeClr val="accent1"/>
+          </a:lnRef>
+          <a:fillRef idx="3">
+            <a:schemeClr val="accent1"/>
+          </a:fillRef>
+          <a:effectRef idx="2">
+            <a:schemeClr val="accent1"/>
+          </a:effectRef>
+          <a:fontRef idx="minor">
+            <a:schemeClr val="lt1"/>
+          </a:fontRef>
+        </p:style>
+        <p:txBody>
+          <a:bodyPr rtlCol="0" anchor="ctr"/>
+          <a:lstStyle/>
+          <a:p>
+            <a:pPr algn="ctr"/>
+          </a:p>
+        </p:txBody>
+      </p:sp>
+      <p:sp>
+        <p:nvSpPr>
+          <p:cNvPr id="3" name="TextBox 2"/>
+          <p:cNvSpPr txBox="1"/>
+          <p:nvPr/>
+        </p:nvSpPr>
+        <p:spPr>
+          <a:xfrm>
+            <a:off x="731520" y="320040"/>
+            <a:ext cx="10698480" cy="320040"/>
+          </a:xfrm>
+          <a:prstGeom prst="rect">
+            <a:avLst/>
+          </a:prstGeom>
+          <a:noFill/>
+        </p:spPr>
+        <p:txBody>
+          <a:bodyPr wrap="square">
+            <a:spAutoFit/>
+          </a:bodyPr>
+          <a:lstStyle/>
+          <a:p>
+            <a:pPr>
+              <a:defRPr sz="1000" b="1">
+                <a:solidFill>
+                  <a:srgbClr val="22D3EE"/>
+                </a:solidFill>
+              </a:defRPr>
+            </a:pPr>
+            <a:r>
+              <a:t>SMART INDIA HACKATHON 2026 | PS ID: SIH26105 | BYTEFORCE_1 (180219)</a:t>
+            </a:r>
+          </a:p>
+        </p:txBody>
+      </p:sp>
+      <p:sp>
+        <p:nvSpPr>
+          <p:cNvPr id="4" name="TextBox 3"/>
+          <p:cNvSpPr txBox="1"/>
+          <p:nvPr/>
+        </p:nvSpPr>
+        <p:spPr>
+          <a:xfrm>
+            <a:off x="731520" y="594360"/>
+            <a:ext cx="10698480" cy="640080"/>
+          </a:xfrm>
+          <a:prstGeom prst="rect">
+            <a:avLst/>
+          </a:prstGeom>
+          <a:noFill/>
+        </p:spPr>
+        <p:txBody>
+          <a:bodyPr wrap="square">
+            <a:spAutoFit/>
+          </a:bodyPr>
+          <a:lstStyle/>
+          <a:p>
+            <a:pPr>
+              <a:defRPr sz="2200" b="1">
+                <a:solidFill>
+                  <a:srgbClr val="F1F5F9"/>
+                </a:solidFill>
+              </a:defRPr>
+            </a:pPr>
+            <a:r>
+              <a:t>Slide 10 | Supporting Endpoint Capabilities: Physical Presence &amp; Interaction</a:t>
+            </a:r>
+          </a:p>
+        </p:txBody>
+      </p:sp>
+      <p:sp>
+        <p:nvSpPr>
+          <p:cNvPr id="5" name="Rounded Rectangle 4"/>
+          <p:cNvSpPr/>
+          <p:nvPr/>
+        </p:nvSpPr>
+        <p:spPr>
+          <a:xfrm>
+            <a:off x="731520" y="1371600"/>
+            <a:ext cx="5120640" cy="4937760"/>
+          </a:xfrm>
+          <a:prstGeom prst="roundRect">
+            <a:avLst/>
+          </a:prstGeom>
+          <a:solidFill>
+            <a:srgbClr val="131B2C"/>
+          </a:solidFill>
+          <a:ln>
+            <a:solidFill>
+              <a:srgbClr val="22D3EE"/>
+            </a:solidFill>
+          </a:ln>
+        </p:spPr>
+        <p:style>
+          <a:lnRef idx="1">
+            <a:schemeClr val="accent1"/>
+          </a:lnRef>
+          <a:fillRef idx="3">
+            <a:schemeClr val="accent1"/>
+          </a:fillRef>
+          <a:effectRef idx="2">
+            <a:schemeClr val="accent1"/>
+          </a:effectRef>
+          <a:fontRef idx="minor">
+            <a:schemeClr val="lt1"/>
+          </a:fontRef>
+        </p:style>
+        <p:txBody>
+          <a:bodyPr rtlCol="0" anchor="ctr" wrap="square" lIns="365760" tIns="365760"/>
+          <a:lstStyle/>
+          <a:p>
+            <a:pPr algn="ctr">
+              <a:spcAft>
+                <a:spcPts val="1000"/>
+              </a:spcAft>
               <a:defRPr sz="1400" b="1">
                 <a:solidFill>
                   <a:srgbClr val="22D3EE"/>
@@ -3185,7 +3549,7 @@
               </a:defRPr>
             </a:pPr>
             <a:r>
-              <a:t>SMART INDIA HACKATHON 2026</a:t>
+              <a:t>ZERO-TRUST PHYSICAL AUTO-LOCK</a:t>
             </a:r>
           </a:p>
           <a:p>
@@ -3193,61 +3557,2067 @@
               <a:spcAft>
                 <a:spcPts val="800"/>
               </a:spcAft>
-              <a:defRPr sz="4000" b="1">
-                <a:solidFill>
-                  <a:srgbClr val="F1F5F9"/>
-                </a:solidFill>
-              </a:defRPr>
-            </a:pPr>
-            <a:r>
-              <a:t>AURA SENTINEL</a:t>
-            </a:r>
-          </a:p>
-          <a:p>
-            <a:pPr>
-              <a:spcAft>
-                <a:spcPts val="1600"/>
-              </a:spcAft>
-              <a:defRPr sz="1800" b="1">
+              <a:defRPr sz="1100" b="1">
+                <a:solidFill>
+                  <a:srgbClr val="F1F5F9"/>
+                </a:solidFill>
+              </a:defRPr>
+            </a:pPr>
+            <a:r>
+              <a:t>• Problem Addressed: </a:t>
+            </a:r>
+            <a:r>
+              <a:rPr b="0">
+                <a:solidFill>
+                  <a:srgbClr val="94A3B8"/>
+                </a:solidFill>
+              </a:rPr>
+              <a:t>Physical workstation access remains a frequent insider threat vector if an operator walks away leaving a console unlocked.</a:t>
+            </a:r>
+          </a:p>
+          <a:p>
+            <a:pPr>
+              <a:spcAft>
+                <a:spcPts val="800"/>
+              </a:spcAft>
+              <a:defRPr sz="1100" b="1">
+                <a:solidFill>
+                  <a:srgbClr val="F1F5F9"/>
+                </a:solidFill>
+              </a:defRPr>
+            </a:pPr>
+            <a:r>
+              <a:t>• YOLOv8 Operator Tracking: </a:t>
+            </a:r>
+            <a:r>
+              <a:rPr b="0">
+                <a:solidFill>
+                  <a:srgbClr val="94A3B8"/>
+                </a:solidFill>
+              </a:rPr>
+              <a:t>Ultralytics YOLOv8-nano monitors operator presence in local webcam feed.</a:t>
+            </a:r>
+          </a:p>
+          <a:p>
+            <a:pPr>
+              <a:spcAft>
+                <a:spcPts val="800"/>
+              </a:spcAft>
+              <a:defRPr sz="1100" b="1">
+                <a:solidFill>
+                  <a:srgbClr val="F1F5F9"/>
+                </a:solidFill>
+              </a:defRPr>
+            </a:pPr>
+            <a:r>
+              <a:t>• Configurable Grace Period: </a:t>
+            </a:r>
+            <a:r>
+              <a:rPr b="0">
+                <a:solidFill>
+                  <a:srgbClr val="94A3B8"/>
+                </a:solidFill>
+              </a:rPr>
+              <a:t>If operator departs, a countdown banner alerts the user before executing OS-level LockWorkStation call.</a:t>
+            </a:r>
+          </a:p>
+          <a:p>
+            <a:pPr>
+              <a:spcAft>
+                <a:spcPts val="800"/>
+              </a:spcAft>
+              <a:defRPr sz="1100" b="1">
+                <a:solidFill>
+                  <a:srgbClr val="F1F5F9"/>
+                </a:solidFill>
+              </a:defRPr>
+            </a:pPr>
+            <a:r>
+              <a:t>• Supporting Role in SIH: </a:t>
+            </a:r>
+            <a:r>
+              <a:rPr b="0">
+                <a:solidFill>
+                  <a:srgbClr val="94A3B8"/>
+                </a:solidFill>
+              </a:rPr>
+              <a:t>Presented accurately as an endpoint hardening feature, secondary to the core financial risk quantification engine.</a:t>
+            </a:r>
+          </a:p>
+        </p:txBody>
+      </p:sp>
+      <p:sp>
+        <p:nvSpPr>
+          <p:cNvPr id="6" name="Rounded Rectangle 5"/>
+          <p:cNvSpPr/>
+          <p:nvPr/>
+        </p:nvSpPr>
+        <p:spPr>
+          <a:xfrm>
+            <a:off x="6217920" y="1371600"/>
+            <a:ext cx="5212080" cy="4937760"/>
+          </a:xfrm>
+          <a:prstGeom prst="roundRect">
+            <a:avLst/>
+          </a:prstGeom>
+          <a:solidFill>
+            <a:srgbClr val="131B2C"/>
+          </a:solidFill>
+          <a:ln>
+            <a:solidFill>
+              <a:srgbClr val="34D399"/>
+            </a:solidFill>
+          </a:ln>
+        </p:spPr>
+        <p:style>
+          <a:lnRef idx="1">
+            <a:schemeClr val="accent1"/>
+          </a:lnRef>
+          <a:fillRef idx="3">
+            <a:schemeClr val="accent1"/>
+          </a:fillRef>
+          <a:effectRef idx="2">
+            <a:schemeClr val="accent1"/>
+          </a:effectRef>
+          <a:fontRef idx="minor">
+            <a:schemeClr val="lt1"/>
+          </a:fontRef>
+        </p:style>
+        <p:txBody>
+          <a:bodyPr rtlCol="0" anchor="ctr" wrap="square" lIns="365760" tIns="365760"/>
+          <a:lstStyle/>
+          <a:p>
+            <a:pPr algn="ctr">
+              <a:spcAft>
+                <a:spcPts val="1000"/>
+              </a:spcAft>
+              <a:defRPr sz="1400" b="1">
                 <a:solidFill>
                   <a:srgbClr val="34D399"/>
                 </a:solidFill>
               </a:defRPr>
             </a:pPr>
             <a:r>
-              <a:t>AI-Powered Continuous Cyber Risk Quantification &amp; Investment Optimization Platform</a:t>
-            </a:r>
-          </a:p>
-          <a:p>
-            <a:pPr>
+              <a:t>TOUCHLESS NEURAL GESTURE CONTROL</a:t>
+            </a:r>
+          </a:p>
+          <a:p>
+            <a:pPr>
+              <a:spcAft>
+                <a:spcPts val="600"/>
+              </a:spcAft>
+              <a:defRPr sz="1000" b="1">
+                <a:solidFill>
+                  <a:srgbClr val="F1F5F9"/>
+                </a:solidFill>
+              </a:defRPr>
+            </a:pPr>
+            <a:r>
+              <a:t>✔ MediaPipe Hand Landmarks:</a:t>
+            </a:r>
+            <a:br/>
+            <a:r>
+              <a:rPr b="0">
+                <a:solidFill>
+                  <a:srgbClr val="94A3B8"/>
+                </a:solidFill>
+              </a:rPr>
+              <a:t>Tracks 21 3D hand coordinates locally using Google MediaPipe Hand Landmarker.</a:t>
+            </a:r>
+          </a:p>
+          <a:p>
+            <a:pPr>
+              <a:spcAft>
+                <a:spcPts val="600"/>
+              </a:spcAft>
+              <a:defRPr sz="1000" b="1">
+                <a:solidFill>
+                  <a:srgbClr val="F1F5F9"/>
+                </a:solidFill>
+              </a:defRPr>
+            </a:pPr>
+            <a:r>
+              <a:t>✔ Deterministic Vector Logic:</a:t>
+            </a:r>
+            <a:br/>
+            <a:r>
+              <a:rPr b="0">
+                <a:solidFill>
+                  <a:srgbClr val="94A3B8"/>
+                </a:solidFill>
+              </a:rPr>
+              <a:t>Crossed fingers (Index over Middle) detected via coordinate inversion vector (mcp_diff × tip_diff &lt; 0).</a:t>
+            </a:r>
+          </a:p>
+          <a:p>
+            <a:pPr>
+              <a:spcAft>
+                <a:spcPts val="600"/>
+              </a:spcAft>
+              <a:defRPr sz="1000" b="1">
+                <a:solidFill>
+                  <a:srgbClr val="F1F5F9"/>
+                </a:solidFill>
+              </a:defRPr>
+            </a:pPr>
+            <a:r>
+              <a:t>✔ Gesture Capabilities:</a:t>
+            </a:r>
+            <a:br/>
+            <a:r>
+              <a:rPr b="0">
+                <a:solidFill>
+                  <a:srgbClr val="94A3B8"/>
+                </a:solidFill>
+              </a:rPr>
+              <a:t>- ☝️ Index Point: New Folder hotkey
+- 🤞 Crossed Fingers: File delete action
+- 🤏 Pinch &amp; Slide: System volume control
+- ✌️ Peace Sign: Application window switch.</a:t>
+            </a:r>
+          </a:p>
+          <a:p>
+            <a:pPr>
+              <a:spcAft>
+                <a:spcPts val="600"/>
+              </a:spcAft>
+              <a:defRPr sz="1000" b="1">
+                <a:solidFill>
+                  <a:srgbClr val="F1F5F9"/>
+                </a:solidFill>
+              </a:defRPr>
+            </a:pPr>
+            <a:r>
+              <a:t>✔ Architecture Positioning:</a:t>
+            </a:r>
+            <a:br/>
+            <a:r>
+              <a:rPr b="0">
+                <a:solidFill>
+                  <a:srgbClr val="94A3B8"/>
+                </a:solidFill>
+              </a:rPr>
+              <a:t>Designed to run locally on CPU hardware without requiring external cloud GPU servers.</a:t>
+            </a:r>
+          </a:p>
+        </p:txBody>
+      </p:sp>
+    </p:spTree>
+  </p:cSld>
+  <p:clrMapOvr>
+    <a:masterClrMapping/>
+  </p:clrMapOvr>
+</p:sld>
+</file>
+
+<file path=ppt/slides/slide11.xml><?xml version="1.0" encoding="utf-8"?>
+<p:sld xmlns:a="http://schemas.openxmlformats.org/drawingml/2006/main" xmlns:p="http://schemas.openxmlformats.org/presentationml/2006/main" xmlns:r="http://schemas.openxmlformats.org/officeDocument/2006/relationships">
+  <p:cSld>
+    <p:spTree>
+      <p:nvGrpSpPr>
+        <p:cNvPr id="1" name=""/>
+        <p:cNvGrpSpPr/>
+        <p:nvPr/>
+      </p:nvGrpSpPr>
+      <p:grpSpPr/>
+      <p:sp>
+        <p:nvSpPr>
+          <p:cNvPr id="2" name="Rectangle 1"/>
+          <p:cNvSpPr/>
+          <p:nvPr/>
+        </p:nvSpPr>
+        <p:spPr>
+          <a:xfrm>
+            <a:off x="0" y="0"/>
+            <a:ext cx="12191695" cy="6858000"/>
+          </a:xfrm>
+          <a:prstGeom prst="rect">
+            <a:avLst/>
+          </a:prstGeom>
+          <a:solidFill>
+            <a:srgbClr val="0B0F19"/>
+          </a:solidFill>
+          <a:ln>
+            <a:noFill/>
+          </a:ln>
+        </p:spPr>
+        <p:style>
+          <a:lnRef idx="1">
+            <a:schemeClr val="accent1"/>
+          </a:lnRef>
+          <a:fillRef idx="3">
+            <a:schemeClr val="accent1"/>
+          </a:fillRef>
+          <a:effectRef idx="2">
+            <a:schemeClr val="accent1"/>
+          </a:effectRef>
+          <a:fontRef idx="minor">
+            <a:schemeClr val="lt1"/>
+          </a:fontRef>
+        </p:style>
+        <p:txBody>
+          <a:bodyPr rtlCol="0" anchor="ctr"/>
+          <a:lstStyle/>
+          <a:p>
+            <a:pPr algn="ctr"/>
+          </a:p>
+        </p:txBody>
+      </p:sp>
+      <p:sp>
+        <p:nvSpPr>
+          <p:cNvPr id="3" name="TextBox 2"/>
+          <p:cNvSpPr txBox="1"/>
+          <p:nvPr/>
+        </p:nvSpPr>
+        <p:spPr>
+          <a:xfrm>
+            <a:off x="731520" y="320040"/>
+            <a:ext cx="10698480" cy="320040"/>
+          </a:xfrm>
+          <a:prstGeom prst="rect">
+            <a:avLst/>
+          </a:prstGeom>
+          <a:noFill/>
+        </p:spPr>
+        <p:txBody>
+          <a:bodyPr wrap="square">
+            <a:spAutoFit/>
+          </a:bodyPr>
+          <a:lstStyle/>
+          <a:p>
+            <a:pPr>
+              <a:defRPr sz="1000" b="1">
+                <a:solidFill>
+                  <a:srgbClr val="22D3EE"/>
+                </a:solidFill>
+              </a:defRPr>
+            </a:pPr>
+            <a:r>
+              <a:t>SMART INDIA HACKATHON 2026 | PS ID: SIH26105 | BYTEFORCE_1 (180219)</a:t>
+            </a:r>
+          </a:p>
+        </p:txBody>
+      </p:sp>
+      <p:sp>
+        <p:nvSpPr>
+          <p:cNvPr id="4" name="TextBox 3"/>
+          <p:cNvSpPr txBox="1"/>
+          <p:nvPr/>
+        </p:nvSpPr>
+        <p:spPr>
+          <a:xfrm>
+            <a:off x="731520" y="594360"/>
+            <a:ext cx="10698480" cy="640080"/>
+          </a:xfrm>
+          <a:prstGeom prst="rect">
+            <a:avLst/>
+          </a:prstGeom>
+          <a:noFill/>
+        </p:spPr>
+        <p:txBody>
+          <a:bodyPr wrap="square">
+            <a:spAutoFit/>
+          </a:bodyPr>
+          <a:lstStyle/>
+          <a:p>
+            <a:pPr>
+              <a:defRPr sz="2200" b="1">
+                <a:solidFill>
+                  <a:srgbClr val="F1F5F9"/>
+                </a:solidFill>
+              </a:defRPr>
+            </a:pPr>
+            <a:r>
+              <a:t>Slide 11 | Regulatory Framework Alignment &amp; Control Mapping</a:t>
+            </a:r>
+          </a:p>
+        </p:txBody>
+      </p:sp>
+      <p:sp>
+        <p:nvSpPr>
+          <p:cNvPr id="5" name="Rounded Rectangle 4"/>
+          <p:cNvSpPr/>
+          <p:nvPr/>
+        </p:nvSpPr>
+        <p:spPr>
+          <a:xfrm>
+            <a:off x="731520" y="1371600"/>
+            <a:ext cx="5120640" cy="4937760"/>
+          </a:xfrm>
+          <a:prstGeom prst="roundRect">
+            <a:avLst/>
+          </a:prstGeom>
+          <a:solidFill>
+            <a:srgbClr val="131B2C"/>
+          </a:solidFill>
+          <a:ln>
+            <a:solidFill>
+              <a:srgbClr val="FBBF24"/>
+            </a:solidFill>
+          </a:ln>
+        </p:spPr>
+        <p:style>
+          <a:lnRef idx="1">
+            <a:schemeClr val="accent1"/>
+          </a:lnRef>
+          <a:fillRef idx="3">
+            <a:schemeClr val="accent1"/>
+          </a:fillRef>
+          <a:effectRef idx="2">
+            <a:schemeClr val="accent1"/>
+          </a:effectRef>
+          <a:fontRef idx="minor">
+            <a:schemeClr val="lt1"/>
+          </a:fontRef>
+        </p:style>
+        <p:txBody>
+          <a:bodyPr rtlCol="0" anchor="ctr" wrap="square" lIns="365760" tIns="365760"/>
+          <a:lstStyle/>
+          <a:p>
+            <a:pPr algn="ctr">
+              <a:spcAft>
+                <a:spcPts val="1000"/>
+              </a:spcAft>
+              <a:defRPr sz="1400" b="1">
+                <a:solidFill>
+                  <a:srgbClr val="FBBF24"/>
+                </a:solidFill>
+              </a:defRPr>
+            </a:pPr>
+            <a:r>
+              <a:t>INDIAN REGULATORY CONTEXT</a:t>
+            </a:r>
+          </a:p>
+          <a:p>
+            <a:pPr>
+              <a:spcAft>
+                <a:spcPts val="600"/>
+              </a:spcAft>
+              <a:defRPr sz="1000" b="1">
+                <a:solidFill>
+                  <a:srgbClr val="F1F5F9"/>
+                </a:solidFill>
+              </a:defRPr>
+            </a:pPr>
+            <a:r>
+              <a:t>📜 CERT-In Cyber Security Directions (April 2022):</a:t>
+            </a:r>
+            <a:br/>
+            <a:r>
+              <a:rPr b="0">
+                <a:solidFill>
+                  <a:srgbClr val="94A3B8"/>
+                </a:solidFill>
+              </a:rPr>
+              <a:t>Mandates 180-day preservation of cybersecurity incident logs. AURA's blockchain ledger provides cryptographic evidence of non-alteration.</a:t>
+            </a:r>
+          </a:p>
+          <a:p>
+            <a:pPr>
+              <a:spcAft>
+                <a:spcPts val="600"/>
+              </a:spcAft>
+              <a:defRPr sz="1000" b="1">
+                <a:solidFill>
+                  <a:srgbClr val="F1F5F9"/>
+                </a:solidFill>
+              </a:defRPr>
+            </a:pPr>
+            <a:r>
+              <a:t>📜 RBI Cyber Security Framework:</a:t>
+            </a:r>
+            <a:br/>
+            <a:r>
+              <a:rPr b="0">
+                <a:solidFill>
+                  <a:srgbClr val="94A3B8"/>
+                </a:solidFill>
+              </a:rPr>
+              <a:t>Supports risk threshold monitoring, sensitive port alerting, and cyber resilience disclosures for institutional banking environments.</a:t>
+            </a:r>
+          </a:p>
+          <a:p>
+            <a:pPr>
+              <a:spcAft>
+                <a:spcPts val="600"/>
+              </a:spcAft>
+              <a:defRPr sz="1000" b="1">
+                <a:solidFill>
+                  <a:srgbClr val="F1F5F9"/>
+                </a:solidFill>
+              </a:defRPr>
+            </a:pPr>
+            <a:r>
+              <a:t>📜 SEBI Cybersecurity Resilience Framework:</a:t>
+            </a:r>
+            <a:br/>
+            <a:r>
+              <a:rPr b="0">
+                <a:solidFill>
+                  <a:srgbClr val="94A3B8"/>
+                </a:solidFill>
+              </a:rPr>
+              <a:t>Addresses board-level risk metrics, technical asset inventory tracking, and systematic risk governance.</a:t>
+            </a:r>
+          </a:p>
+          <a:p>
+            <a:pPr>
+              <a:spcAft>
+                <a:spcPts val="600"/>
+              </a:spcAft>
+              <a:defRPr sz="1000" b="1">
+                <a:solidFill>
+                  <a:srgbClr val="F1F5F9"/>
+                </a:solidFill>
+              </a:defRPr>
+            </a:pPr>
+            <a:r>
+              <a:t>📜 DPDP Act 2023 Compliance Support:</a:t>
+            </a:r>
+            <a:br/>
+            <a:r>
+              <a:rPr b="0">
+                <a:solidFill>
+                  <a:srgbClr val="94A3B8"/>
+                </a:solidFill>
+              </a:rPr>
+              <a:t>Regex credential scanner flags unmasked Aadhaar, PAN numbers, and private keys in scanned directories.</a:t>
+            </a:r>
+          </a:p>
+        </p:txBody>
+      </p:sp>
+      <p:sp>
+        <p:nvSpPr>
+          <p:cNvPr id="6" name="Rounded Rectangle 5"/>
+          <p:cNvSpPr/>
+          <p:nvPr/>
+        </p:nvSpPr>
+        <p:spPr>
+          <a:xfrm>
+            <a:off x="6217920" y="1371600"/>
+            <a:ext cx="5212080" cy="4937760"/>
+          </a:xfrm>
+          <a:prstGeom prst="roundRect">
+            <a:avLst/>
+          </a:prstGeom>
+          <a:solidFill>
+            <a:srgbClr val="131B2C"/>
+          </a:solidFill>
+          <a:ln>
+            <a:solidFill>
+              <a:srgbClr val="22D3EE"/>
+            </a:solidFill>
+          </a:ln>
+        </p:spPr>
+        <p:style>
+          <a:lnRef idx="1">
+            <a:schemeClr val="accent1"/>
+          </a:lnRef>
+          <a:fillRef idx="3">
+            <a:schemeClr val="accent1"/>
+          </a:fillRef>
+          <a:effectRef idx="2">
+            <a:schemeClr val="accent1"/>
+          </a:effectRef>
+          <a:fontRef idx="minor">
+            <a:schemeClr val="lt1"/>
+          </a:fontRef>
+        </p:style>
+        <p:txBody>
+          <a:bodyPr rtlCol="0" anchor="ctr" wrap="square" lIns="365760" tIns="365760"/>
+          <a:lstStyle/>
+          <a:p>
+            <a:pPr algn="ctr">
+              <a:spcAft>
+                <a:spcPts val="1000"/>
+              </a:spcAft>
+              <a:defRPr sz="1400" b="1">
+                <a:solidFill>
+                  <a:srgbClr val="22D3EE"/>
+                </a:solidFill>
+              </a:defRPr>
+            </a:pPr>
+            <a:r>
+              <a:t>GLOBAL FRAMEWORK MAPPING</a:t>
+            </a:r>
+          </a:p>
+          <a:p>
+            <a:pPr>
+              <a:spcAft>
+                <a:spcPts val="600"/>
+              </a:spcAft>
+              <a:defRPr sz="1000" b="1">
+                <a:solidFill>
+                  <a:srgbClr val="F1F5F9"/>
+                </a:solidFill>
+              </a:defRPr>
+            </a:pPr>
+            <a:r>
+              <a:t>🌐 NIST Cybersecurity Framework 2.0:</a:t>
+            </a:r>
+            <a:br/>
+            <a:r>
+              <a:rPr b="0">
+                <a:solidFill>
+                  <a:srgbClr val="94A3B8"/>
+                </a:solidFill>
+              </a:rPr>
+              <a:t>Structured mapping across core functions:
+- Identify: Asset &amp; port inventory
+- Protect: Defense knapsack optimizer
+- Detect: Socket &amp; compute telemetry
+- Respond / Recover: Quarantine vault &amp; audit.</a:t>
+            </a:r>
+          </a:p>
+          <a:p>
+            <a:pPr>
+              <a:spcAft>
+                <a:spcPts val="600"/>
+              </a:spcAft>
+              <a:defRPr sz="1000" b="1">
+                <a:solidFill>
+                  <a:srgbClr val="F1F5F9"/>
+                </a:solidFill>
+              </a:defRPr>
+            </a:pPr>
+            <a:r>
+              <a:t>🌐 ISO/IEC 27001 (A.12 Operations Security):</a:t>
+            </a:r>
+            <a:br/>
+            <a:r>
+              <a:rPr b="0">
+                <a:solidFill>
+                  <a:srgbClr val="94A3B8"/>
+                </a:solidFill>
+              </a:rPr>
+              <a:t>Aligns with technical control logging and vulnerability management clauses.</a:t>
+            </a:r>
+          </a:p>
+          <a:p>
+            <a:pPr>
+              <a:spcAft>
+                <a:spcPts val="600"/>
+              </a:spcAft>
+              <a:defRPr sz="1000" b="1">
+                <a:solidFill>
+                  <a:srgbClr val="F1F5F9"/>
+                </a:solidFill>
+              </a:defRPr>
+            </a:pPr>
+            <a:r>
+              <a:t>🌐 CIS Controls v8:</a:t>
+            </a:r>
+            <a:br/>
+            <a:r>
+              <a:rPr b="0">
+                <a:solidFill>
+                  <a:srgbClr val="94A3B8"/>
+                </a:solidFill>
+              </a:rPr>
+              <a:t>Supports Control 1 (Enterprise Assets), Control 4 (Secure Configuration), and Control 8 (Audit Log Management).</a:t>
+            </a:r>
+          </a:p>
+          <a:p>
+            <a:pPr>
+              <a:spcAft>
+                <a:spcPts val="600"/>
+              </a:spcAft>
+              <a:defRPr sz="1000" b="1">
+                <a:solidFill>
+                  <a:srgbClr val="F1F5F9"/>
+                </a:solidFill>
+              </a:defRPr>
+            </a:pPr>
+            <a:r>
+              <a:t>🌐 Defensible Claim Note:</a:t>
+            </a:r>
+            <a:br/>
+            <a:r>
+              <a:rPr b="0">
+                <a:solidFill>
+                  <a:srgbClr val="94A3B8"/>
+                </a:solidFill>
+              </a:rPr>
+              <a:t>Framed accurately as 'control alignment and compliance-supporting capabilities', not official government certifications.</a:t>
+            </a:r>
+          </a:p>
+        </p:txBody>
+      </p:sp>
+    </p:spTree>
+  </p:cSld>
+  <p:clrMapOvr>
+    <a:masterClrMapping/>
+  </p:clrMapOvr>
+</p:sld>
+</file>
+
+<file path=ppt/slides/slide12.xml><?xml version="1.0" encoding="utf-8"?>
+<p:sld xmlns:a="http://schemas.openxmlformats.org/drawingml/2006/main" xmlns:p="http://schemas.openxmlformats.org/presentationml/2006/main" xmlns:r="http://schemas.openxmlformats.org/officeDocument/2006/relationships">
+  <p:cSld>
+    <p:spTree>
+      <p:nvGrpSpPr>
+        <p:cNvPr id="1" name=""/>
+        <p:cNvGrpSpPr/>
+        <p:nvPr/>
+      </p:nvGrpSpPr>
+      <p:grpSpPr/>
+      <p:sp>
+        <p:nvSpPr>
+          <p:cNvPr id="2" name="Rectangle 1"/>
+          <p:cNvSpPr/>
+          <p:nvPr/>
+        </p:nvSpPr>
+        <p:spPr>
+          <a:xfrm>
+            <a:off x="0" y="0"/>
+            <a:ext cx="12191695" cy="6858000"/>
+          </a:xfrm>
+          <a:prstGeom prst="rect">
+            <a:avLst/>
+          </a:prstGeom>
+          <a:solidFill>
+            <a:srgbClr val="0B0F19"/>
+          </a:solidFill>
+          <a:ln>
+            <a:noFill/>
+          </a:ln>
+        </p:spPr>
+        <p:style>
+          <a:lnRef idx="1">
+            <a:schemeClr val="accent1"/>
+          </a:lnRef>
+          <a:fillRef idx="3">
+            <a:schemeClr val="accent1"/>
+          </a:fillRef>
+          <a:effectRef idx="2">
+            <a:schemeClr val="accent1"/>
+          </a:effectRef>
+          <a:fontRef idx="minor">
+            <a:schemeClr val="lt1"/>
+          </a:fontRef>
+        </p:style>
+        <p:txBody>
+          <a:bodyPr rtlCol="0" anchor="ctr"/>
+          <a:lstStyle/>
+          <a:p>
+            <a:pPr algn="ctr"/>
+          </a:p>
+        </p:txBody>
+      </p:sp>
+      <p:sp>
+        <p:nvSpPr>
+          <p:cNvPr id="3" name="TextBox 2"/>
+          <p:cNvSpPr txBox="1"/>
+          <p:nvPr/>
+        </p:nvSpPr>
+        <p:spPr>
+          <a:xfrm>
+            <a:off x="731520" y="320040"/>
+            <a:ext cx="10698480" cy="320040"/>
+          </a:xfrm>
+          <a:prstGeom prst="rect">
+            <a:avLst/>
+          </a:prstGeom>
+          <a:noFill/>
+        </p:spPr>
+        <p:txBody>
+          <a:bodyPr wrap="square">
+            <a:spAutoFit/>
+          </a:bodyPr>
+          <a:lstStyle/>
+          <a:p>
+            <a:pPr>
+              <a:defRPr sz="1000" b="1">
+                <a:solidFill>
+                  <a:srgbClr val="22D3EE"/>
+                </a:solidFill>
+              </a:defRPr>
+            </a:pPr>
+            <a:r>
+              <a:t>SMART INDIA HACKATHON 2026 | PS ID: SIH26105 | BYTEFORCE_1 (180219)</a:t>
+            </a:r>
+          </a:p>
+        </p:txBody>
+      </p:sp>
+      <p:sp>
+        <p:nvSpPr>
+          <p:cNvPr id="4" name="TextBox 3"/>
+          <p:cNvSpPr txBox="1"/>
+          <p:nvPr/>
+        </p:nvSpPr>
+        <p:spPr>
+          <a:xfrm>
+            <a:off x="731520" y="594360"/>
+            <a:ext cx="10698480" cy="640080"/>
+          </a:xfrm>
+          <a:prstGeom prst="rect">
+            <a:avLst/>
+          </a:prstGeom>
+          <a:noFill/>
+        </p:spPr>
+        <p:txBody>
+          <a:bodyPr wrap="square">
+            <a:spAutoFit/>
+          </a:bodyPr>
+          <a:lstStyle/>
+          <a:p>
+            <a:pPr>
+              <a:defRPr sz="2200" b="1">
+                <a:solidFill>
+                  <a:srgbClr val="F1F5F9"/>
+                </a:solidFill>
+              </a:defRPr>
+            </a:pPr>
+            <a:r>
+              <a:t>Slide 12 | Proposed Architecture: Future Multi-Institution Deployment</a:t>
+            </a:r>
+          </a:p>
+        </p:txBody>
+      </p:sp>
+      <p:sp>
+        <p:nvSpPr>
+          <p:cNvPr id="5" name="Rectangle 4"/>
+          <p:cNvSpPr/>
+          <p:nvPr/>
+        </p:nvSpPr>
+        <p:spPr>
+          <a:xfrm>
+            <a:off x="731520" y="1280160"/>
+            <a:ext cx="10698480" cy="365760"/>
+          </a:xfrm>
+          <a:prstGeom prst="rect">
+            <a:avLst/>
+          </a:prstGeom>
+          <a:solidFill>
+            <a:srgbClr val="131B2C"/>
+          </a:solidFill>
+          <a:ln>
+            <a:solidFill>
+              <a:srgbClr val="FBBF24"/>
+            </a:solidFill>
+          </a:ln>
+        </p:spPr>
+        <p:style>
+          <a:lnRef idx="1">
+            <a:schemeClr val="accent1"/>
+          </a:lnRef>
+          <a:fillRef idx="3">
+            <a:schemeClr val="accent1"/>
+          </a:fillRef>
+          <a:effectRef idx="2">
+            <a:schemeClr val="accent1"/>
+          </a:effectRef>
+          <a:fontRef idx="minor">
+            <a:schemeClr val="lt1"/>
+          </a:fontRef>
+        </p:style>
+        <p:txBody>
+          <a:bodyPr rtlCol="0" anchor="ctr"/>
+          <a:lstStyle/>
+          <a:p>
+            <a:pPr algn="ctr">
+              <a:defRPr sz="1000" b="1">
+                <a:solidFill>
+                  <a:srgbClr val="FBBF24"/>
+                </a:solidFill>
+              </a:defRPr>
+            </a:pPr>
+            <a:r>
+              <a:t>PROPOSED ARCHITECTURE FOR FUTURE MULTI-INSTITUTION DEPLOYMENT (CONCEPTUAL SCALING)</a:t>
+            </a:r>
+          </a:p>
+        </p:txBody>
+      </p:sp>
+      <p:sp>
+        <p:nvSpPr>
+          <p:cNvPr id="6" name="Rounded Rectangle 5"/>
+          <p:cNvSpPr/>
+          <p:nvPr/>
+        </p:nvSpPr>
+        <p:spPr>
+          <a:xfrm>
+            <a:off x="731520" y="1828800"/>
+            <a:ext cx="3383280" cy="4480560"/>
+          </a:xfrm>
+          <a:prstGeom prst="roundRect">
+            <a:avLst/>
+          </a:prstGeom>
+          <a:solidFill>
+            <a:srgbClr val="131B2C"/>
+          </a:solidFill>
+          <a:ln w="19050">
+            <a:solidFill>
+              <a:srgbClr val="22D3EE"/>
+            </a:solidFill>
+          </a:ln>
+        </p:spPr>
+        <p:style>
+          <a:lnRef idx="1">
+            <a:schemeClr val="accent1"/>
+          </a:lnRef>
+          <a:fillRef idx="3">
+            <a:schemeClr val="accent1"/>
+          </a:fillRef>
+          <a:effectRef idx="2">
+            <a:schemeClr val="accent1"/>
+          </a:effectRef>
+          <a:fontRef idx="minor">
+            <a:schemeClr val="lt1"/>
+          </a:fontRef>
+        </p:style>
+        <p:txBody>
+          <a:bodyPr rtlCol="0" anchor="ctr" wrap="square" lIns="274320" tIns="274320"/>
+          <a:lstStyle/>
+          <a:p>
+            <a:pPr algn="ctr">
+              <a:spcAft>
+                <a:spcPts val="400"/>
+              </a:spcAft>
               <a:defRPr sz="1200" b="1">
                 <a:solidFill>
+                  <a:srgbClr val="22D3EE"/>
+                </a:solidFill>
+              </a:defRPr>
+            </a:pPr>
+            <a:r>
+              <a:t>NODE 01: CENTRAL GOVERNANCE NODE</a:t>
+            </a:r>
+          </a:p>
+          <a:p>
+            <a:pPr>
+              <a:spcAft>
+                <a:spcPts val="1000"/>
+              </a:spcAft>
+              <a:defRPr sz="900" i="1">
+                <a:solidFill>
+                  <a:srgbClr val="94A3B8"/>
+                </a:solidFill>
+              </a:defRPr>
+            </a:pPr>
+            <a:r>
+              <a:t>Proposed Central Authority (e.g. Consortium Master)</a:t>
+            </a:r>
+          </a:p>
+          <a:p>
+            <a:pPr>
+              <a:spcAft>
+                <a:spcPts val="600"/>
+              </a:spcAft>
+              <a:defRPr sz="1000">
+                <a:solidFill>
+                  <a:srgbClr val="F1F5F9"/>
+                </a:solidFill>
+              </a:defRPr>
+            </a:pPr>
+            <a:r>
+              <a:t>• Aggregates anonymized risk exposure indexes across institutions</a:t>
+            </a:r>
+          </a:p>
+          <a:p>
+            <a:pPr>
+              <a:spcAft>
+                <a:spcPts val="600"/>
+              </a:spcAft>
+              <a:defRPr sz="1000">
+                <a:solidFill>
+                  <a:srgbClr val="F1F5F9"/>
+                </a:solidFill>
+              </a:defRPr>
+            </a:pPr>
+            <a:r>
+              <a:t>• Sets baseline risk evaluation standards</a:t>
+            </a:r>
+          </a:p>
+          <a:p>
+            <a:pPr>
+              <a:spcAft>
+                <a:spcPts val="600"/>
+              </a:spcAft>
+              <a:defRPr sz="1000">
+                <a:solidFill>
+                  <a:srgbClr val="F1F5F9"/>
+                </a:solidFill>
+              </a:defRPr>
+            </a:pPr>
+            <a:r>
+              <a:t>• Distributes global threat intelligence advisories</a:t>
+            </a:r>
+          </a:p>
+          <a:p>
+            <a:pPr>
+              <a:spcAft>
+                <a:spcPts val="600"/>
+              </a:spcAft>
+              <a:defRPr sz="1000">
+                <a:solidFill>
+                  <a:srgbClr val="F1F5F9"/>
+                </a:solidFill>
+              </a:defRPr>
+            </a:pPr>
+            <a:r>
+              <a:t>• Acts as primary consensus coordinator</a:t>
+            </a:r>
+          </a:p>
+        </p:txBody>
+      </p:sp>
+      <p:sp>
+        <p:nvSpPr>
+          <p:cNvPr id="7" name="Rounded Rectangle 6"/>
+          <p:cNvSpPr/>
+          <p:nvPr/>
+        </p:nvSpPr>
+        <p:spPr>
+          <a:xfrm>
+            <a:off x="4389120" y="1828800"/>
+            <a:ext cx="3383280" cy="4480560"/>
+          </a:xfrm>
+          <a:prstGeom prst="roundRect">
+            <a:avLst/>
+          </a:prstGeom>
+          <a:solidFill>
+            <a:srgbClr val="131B2C"/>
+          </a:solidFill>
+          <a:ln w="19050">
+            <a:solidFill>
+              <a:srgbClr val="34D399"/>
+            </a:solidFill>
+          </a:ln>
+        </p:spPr>
+        <p:style>
+          <a:lnRef idx="1">
+            <a:schemeClr val="accent1"/>
+          </a:lnRef>
+          <a:fillRef idx="3">
+            <a:schemeClr val="accent1"/>
+          </a:fillRef>
+          <a:effectRef idx="2">
+            <a:schemeClr val="accent1"/>
+          </a:effectRef>
+          <a:fontRef idx="minor">
+            <a:schemeClr val="lt1"/>
+          </a:fontRef>
+        </p:style>
+        <p:txBody>
+          <a:bodyPr rtlCol="0" anchor="ctr" wrap="square" lIns="274320" tIns="274320"/>
+          <a:lstStyle/>
+          <a:p>
+            <a:pPr algn="ctr">
+              <a:spcAft>
+                <a:spcPts val="400"/>
+              </a:spcAft>
+              <a:defRPr sz="1200" b="1">
+                <a:solidFill>
+                  <a:srgbClr val="34D399"/>
+                </a:solidFill>
+              </a:defRPr>
+            </a:pPr>
+            <a:r>
+              <a:t>NODE 02: REGIONAL VALIDATOR NODE</a:t>
+            </a:r>
+          </a:p>
+          <a:p>
+            <a:pPr>
+              <a:spcAft>
+                <a:spcPts val="1000"/>
+              </a:spcAft>
+              <a:defRPr sz="900" i="1">
+                <a:solidFill>
+                  <a:srgbClr val="94A3B8"/>
+                </a:solidFill>
+              </a:defRPr>
+            </a:pPr>
+            <a:r>
+              <a:t>Proposed Regional Validator (e.g. Lead Technical Campus)</a:t>
+            </a:r>
+          </a:p>
+          <a:p>
+            <a:pPr>
+              <a:spcAft>
+                <a:spcPts val="600"/>
+              </a:spcAft>
+              <a:defRPr sz="1000">
+                <a:solidFill>
+                  <a:srgbClr val="F1F5F9"/>
+                </a:solidFill>
+              </a:defRPr>
+            </a:pPr>
+            <a:r>
+              <a:t>• Validates consensus blocks via independent Merkle checks</a:t>
+            </a:r>
+          </a:p>
+          <a:p>
+            <a:pPr>
+              <a:spcAft>
+                <a:spcPts val="600"/>
+              </a:spcAft>
+              <a:defRPr sz="1000">
+                <a:solidFill>
+                  <a:srgbClr val="F1F5F9"/>
+                </a:solidFill>
+              </a:defRPr>
+            </a:pPr>
+            <a:r>
+              <a:t>• Executes regional peer risk verification</a:t>
+            </a:r>
+          </a:p>
+          <a:p>
+            <a:pPr>
+              <a:spcAft>
+                <a:spcPts val="600"/>
+              </a:spcAft>
+              <a:defRPr sz="1000">
+                <a:solidFill>
+                  <a:srgbClr val="F1F5F9"/>
+                </a:solidFill>
+              </a:defRPr>
+            </a:pPr>
+            <a:r>
+              <a:t>• Distributes computational load for consortium mining</a:t>
+            </a:r>
+          </a:p>
+          <a:p>
+            <a:pPr>
+              <a:spcAft>
+                <a:spcPts val="600"/>
+              </a:spcAft>
+              <a:defRPr sz="1000">
+                <a:solidFill>
+                  <a:srgbClr val="F1F5F9"/>
+                </a:solidFill>
+              </a:defRPr>
+            </a:pPr>
+            <a:r>
+              <a:t>• Maintains verifiable mirror of consortium ledger</a:t>
+            </a:r>
+          </a:p>
+        </p:txBody>
+      </p:sp>
+      <p:sp>
+        <p:nvSpPr>
+          <p:cNvPr id="8" name="Rounded Rectangle 7"/>
+          <p:cNvSpPr/>
+          <p:nvPr/>
+        </p:nvSpPr>
+        <p:spPr>
+          <a:xfrm>
+            <a:off x="8046720" y="1828800"/>
+            <a:ext cx="3383280" cy="4480560"/>
+          </a:xfrm>
+          <a:prstGeom prst="roundRect">
+            <a:avLst/>
+          </a:prstGeom>
+          <a:solidFill>
+            <a:srgbClr val="131B2C"/>
+          </a:solidFill>
+          <a:ln w="19050">
+            <a:solidFill>
+              <a:srgbClr val="FBBF24"/>
+            </a:solidFill>
+          </a:ln>
+        </p:spPr>
+        <p:style>
+          <a:lnRef idx="1">
+            <a:schemeClr val="accent1"/>
+          </a:lnRef>
+          <a:fillRef idx="3">
+            <a:schemeClr val="accent1"/>
+          </a:fillRef>
+          <a:effectRef idx="2">
+            <a:schemeClr val="accent1"/>
+          </a:effectRef>
+          <a:fontRef idx="minor">
+            <a:schemeClr val="lt1"/>
+          </a:fontRef>
+        </p:style>
+        <p:txBody>
+          <a:bodyPr rtlCol="0" anchor="ctr" wrap="square" lIns="274320" tIns="274320"/>
+          <a:lstStyle/>
+          <a:p>
+            <a:pPr algn="ctr">
+              <a:spcAft>
+                <a:spcPts val="400"/>
+              </a:spcAft>
+              <a:defRPr sz="1200" b="1">
+                <a:solidFill>
                   <a:srgbClr val="FBBF24"/>
                 </a:solidFill>
               </a:defRPr>
             </a:pPr>
             <a:r>
-              <a:t>• Team Name &amp; ID: </a:t>
+              <a:t>NODE 03: INSTITUTIONAL AUDITOR NODE</a:t>
+            </a:r>
+          </a:p>
+          <a:p>
+            <a:pPr>
+              <a:spcAft>
+                <a:spcPts val="1000"/>
+              </a:spcAft>
+              <a:defRPr sz="900" i="1">
+                <a:solidFill>
+                  <a:srgbClr val="94A3B8"/>
+                </a:solidFill>
+              </a:defRPr>
+            </a:pPr>
+            <a:r>
+              <a:t>Proposed Campus Auditor (e.g. Individual College Node)</a:t>
+            </a:r>
+          </a:p>
+          <a:p>
+            <a:pPr>
+              <a:spcAft>
+                <a:spcPts val="600"/>
+              </a:spcAft>
+              <a:defRPr sz="1000">
+                <a:solidFill>
+                  <a:srgbClr val="F1F5F9"/>
+                </a:solidFill>
+              </a:defRPr>
+            </a:pPr>
+            <a:r>
+              <a:t>• Operates local-first agent monitoring campus endpoints</a:t>
+            </a:r>
+          </a:p>
+          <a:p>
+            <a:pPr>
+              <a:spcAft>
+                <a:spcPts val="600"/>
+              </a:spcAft>
+              <a:defRPr sz="1000">
+                <a:solidFill>
+                  <a:srgbClr val="F1F5F9"/>
+                </a:solidFill>
+              </a:defRPr>
+            </a:pPr>
+            <a:r>
+              <a:t>• Emits tamper-evident risk assessments to the ledger</a:t>
+            </a:r>
+          </a:p>
+          <a:p>
+            <a:pPr>
+              <a:spcAft>
+                <a:spcPts val="600"/>
+              </a:spcAft>
+              <a:defRPr sz="1000">
+                <a:solidFill>
+                  <a:srgbClr val="F1F5F9"/>
+                </a:solidFill>
+              </a:defRPr>
+            </a:pPr>
+            <a:r>
+              <a:t>• Validates compliance posture against regulatory requirements</a:t>
+            </a:r>
+          </a:p>
+          <a:p>
+            <a:pPr>
+              <a:spcAft>
+                <a:spcPts val="600"/>
+              </a:spcAft>
+              <a:defRPr sz="1000">
+                <a:solidFill>
+                  <a:srgbClr val="F1F5F9"/>
+                </a:solidFill>
+              </a:defRPr>
+            </a:pPr>
+            <a:r>
+              <a:t>• Prevents local insider repudiation of breach incidents</a:t>
+            </a:r>
+          </a:p>
+        </p:txBody>
+      </p:sp>
+    </p:spTree>
+  </p:cSld>
+  <p:clrMapOvr>
+    <a:masterClrMapping/>
+  </p:clrMapOvr>
+</p:sld>
+</file>
+
+<file path=ppt/slides/slide13.xml><?xml version="1.0" encoding="utf-8"?>
+<p:sld xmlns:a="http://schemas.openxmlformats.org/drawingml/2006/main" xmlns:p="http://schemas.openxmlformats.org/presentationml/2006/main" xmlns:r="http://schemas.openxmlformats.org/officeDocument/2006/relationships">
+  <p:cSld>
+    <p:spTree>
+      <p:nvGrpSpPr>
+        <p:cNvPr id="1" name=""/>
+        <p:cNvGrpSpPr/>
+        <p:nvPr/>
+      </p:nvGrpSpPr>
+      <p:grpSpPr/>
+      <p:sp>
+        <p:nvSpPr>
+          <p:cNvPr id="2" name="Rectangle 1"/>
+          <p:cNvSpPr/>
+          <p:nvPr/>
+        </p:nvSpPr>
+        <p:spPr>
+          <a:xfrm>
+            <a:off x="0" y="0"/>
+            <a:ext cx="12191695" cy="6858000"/>
+          </a:xfrm>
+          <a:prstGeom prst="rect">
+            <a:avLst/>
+          </a:prstGeom>
+          <a:solidFill>
+            <a:srgbClr val="0B0F19"/>
+          </a:solidFill>
+          <a:ln>
+            <a:noFill/>
+          </a:ln>
+        </p:spPr>
+        <p:style>
+          <a:lnRef idx="1">
+            <a:schemeClr val="accent1"/>
+          </a:lnRef>
+          <a:fillRef idx="3">
+            <a:schemeClr val="accent1"/>
+          </a:fillRef>
+          <a:effectRef idx="2">
+            <a:schemeClr val="accent1"/>
+          </a:effectRef>
+          <a:fontRef idx="minor">
+            <a:schemeClr val="lt1"/>
+          </a:fontRef>
+        </p:style>
+        <p:txBody>
+          <a:bodyPr rtlCol="0" anchor="ctr"/>
+          <a:lstStyle/>
+          <a:p>
+            <a:pPr algn="ctr"/>
+          </a:p>
+        </p:txBody>
+      </p:sp>
+      <p:sp>
+        <p:nvSpPr>
+          <p:cNvPr id="3" name="TextBox 2"/>
+          <p:cNvSpPr txBox="1"/>
+          <p:nvPr/>
+        </p:nvSpPr>
+        <p:spPr>
+          <a:xfrm>
+            <a:off x="731520" y="320040"/>
+            <a:ext cx="10698480" cy="320040"/>
+          </a:xfrm>
+          <a:prstGeom prst="rect">
+            <a:avLst/>
+          </a:prstGeom>
+          <a:noFill/>
+        </p:spPr>
+        <p:txBody>
+          <a:bodyPr wrap="square">
+            <a:spAutoFit/>
+          </a:bodyPr>
+          <a:lstStyle/>
+          <a:p>
+            <a:pPr>
+              <a:defRPr sz="1000" b="1">
+                <a:solidFill>
+                  <a:srgbClr val="22D3EE"/>
+                </a:solidFill>
+              </a:defRPr>
+            </a:pPr>
+            <a:r>
+              <a:t>SMART INDIA HACKATHON 2026 | PS ID: SIH26105 | BYTEFORCE_1 (180219)</a:t>
+            </a:r>
+          </a:p>
+        </p:txBody>
+      </p:sp>
+      <p:sp>
+        <p:nvSpPr>
+          <p:cNvPr id="4" name="TextBox 3"/>
+          <p:cNvSpPr txBox="1"/>
+          <p:nvPr/>
+        </p:nvSpPr>
+        <p:spPr>
+          <a:xfrm>
+            <a:off x="731520" y="594360"/>
+            <a:ext cx="10698480" cy="640080"/>
+          </a:xfrm>
+          <a:prstGeom prst="rect">
+            <a:avLst/>
+          </a:prstGeom>
+          <a:noFill/>
+        </p:spPr>
+        <p:txBody>
+          <a:bodyPr wrap="square">
+            <a:spAutoFit/>
+          </a:bodyPr>
+          <a:lstStyle/>
+          <a:p>
+            <a:pPr>
+              <a:defRPr sz="2200" b="1">
+                <a:solidFill>
+                  <a:srgbClr val="F1F5F9"/>
+                </a:solidFill>
+              </a:defRPr>
+            </a:pPr>
+            <a:r>
+              <a:t>Slide 13 | Implementation Status Matrix &amp; Development Roadmap</a:t>
+            </a:r>
+          </a:p>
+        </p:txBody>
+      </p:sp>
+      <p:sp>
+        <p:nvSpPr>
+          <p:cNvPr id="5" name="Rounded Rectangle 4"/>
+          <p:cNvSpPr/>
+          <p:nvPr/>
+        </p:nvSpPr>
+        <p:spPr>
+          <a:xfrm>
+            <a:off x="731520" y="1371600"/>
+            <a:ext cx="5120640" cy="4937760"/>
+          </a:xfrm>
+          <a:prstGeom prst="roundRect">
+            <a:avLst/>
+          </a:prstGeom>
+          <a:solidFill>
+            <a:srgbClr val="131B2C"/>
+          </a:solidFill>
+          <a:ln>
+            <a:solidFill>
+              <a:srgbClr val="34D399"/>
+            </a:solidFill>
+          </a:ln>
+        </p:spPr>
+        <p:style>
+          <a:lnRef idx="1">
+            <a:schemeClr val="accent1"/>
+          </a:lnRef>
+          <a:fillRef idx="3">
+            <a:schemeClr val="accent1"/>
+          </a:fillRef>
+          <a:effectRef idx="2">
+            <a:schemeClr val="accent1"/>
+          </a:effectRef>
+          <a:fontRef idx="minor">
+            <a:schemeClr val="lt1"/>
+          </a:fontRef>
+        </p:style>
+        <p:txBody>
+          <a:bodyPr rtlCol="0" anchor="ctr" wrap="square" lIns="365760" tIns="365760"/>
+          <a:lstStyle/>
+          <a:p>
+            <a:pPr algn="ctr">
+              <a:spcAft>
+                <a:spcPts val="1000"/>
+              </a:spcAft>
+              <a:defRPr sz="1400" b="1">
+                <a:solidFill>
+                  <a:srgbClr val="34D399"/>
+                </a:solidFill>
+              </a:defRPr>
+            </a:pPr>
+            <a:r>
+              <a:t>RUNNABLE IN CURRENT MVP (TODAY)</a:t>
+            </a:r>
+          </a:p>
+          <a:p>
+            <a:pPr>
+              <a:spcAft>
+                <a:spcPts val="600"/>
+              </a:spcAft>
+              <a:defRPr sz="1000" b="1">
+                <a:solidFill>
+                  <a:srgbClr val="F1F5F9"/>
+                </a:solidFill>
+              </a:defRPr>
+            </a:pPr>
+            <a:r>
+              <a:t>✔ Host Telemetry &amp; Port Inspector: </a:t>
             </a:r>
             <a:r>
               <a:rPr b="0">
                 <a:solidFill>
-                  <a:srgbClr val="F1F5F9"/>
-                </a:solidFill>
-              </a:rPr>
-              <a:t>ByteForce_1 (Official SIH Team ID: 180219)</a:t>
-            </a:r>
-          </a:p>
-          <a:p>
-            <a:pPr>
-              <a:defRPr sz="1200" b="1">
+                  <a:srgbClr val="94A3B8"/>
+                </a:solidFill>
+              </a:rPr>
+              <a:t>Live extraction of open sockets, CPU/RAM utilization, and process states (psutil).</a:t>
+            </a:r>
+          </a:p>
+          <a:p>
+            <a:pPr>
+              <a:spcAft>
+                <a:spcPts val="600"/>
+              </a:spcAft>
+              <a:defRPr sz="1000" b="1">
+                <a:solidFill>
+                  <a:srgbClr val="F1F5F9"/>
+                </a:solidFill>
+              </a:defRPr>
+            </a:pPr>
+            <a:r>
+              <a:t>✔ Prototype Financial Exposure (EAL): </a:t>
+            </a:r>
+            <a:r>
+              <a:rPr b="0">
+                <a:solidFill>
+                  <a:srgbClr val="94A3B8"/>
+                </a:solidFill>
+              </a:rPr>
+              <a:t>Live computation of hourly downtime loss and estimated incident cost in ₹ INR.</a:t>
+            </a:r>
+          </a:p>
+          <a:p>
+            <a:pPr>
+              <a:spcAft>
+                <a:spcPts val="600"/>
+              </a:spcAft>
+              <a:defRPr sz="1000" b="1">
+                <a:solidFill>
+                  <a:srgbClr val="F1F5F9"/>
+                </a:solidFill>
+              </a:defRPr>
+            </a:pPr>
+            <a:r>
+              <a:t>✔ What-If Simulation Engine: </a:t>
+            </a:r>
+            <a:r>
+              <a:rPr b="0">
+                <a:solidFill>
+                  <a:srgbClr val="94A3B8"/>
+                </a:solidFill>
+              </a:rPr>
+              <a:t>Interactive parameter tuning and MITRE attack vector wargaming.</a:t>
+            </a:r>
+          </a:p>
+          <a:p>
+            <a:pPr>
+              <a:spcAft>
+                <a:spcPts val="600"/>
+              </a:spcAft>
+              <a:defRPr sz="1000" b="1">
+                <a:solidFill>
+                  <a:srgbClr val="F1F5F9"/>
+                </a:solidFill>
+              </a:defRPr>
+            </a:pPr>
+            <a:r>
+              <a:t>✔ Budget Investment Optimizer: </a:t>
+            </a:r>
+            <a:r>
+              <a:rPr b="0">
+                <a:solidFill>
+                  <a:srgbClr val="94A3B8"/>
+                </a:solidFill>
+              </a:rPr>
+              <a:t>Knapsack evaluation of defense packages, ROSI %, and tailored action list.</a:t>
+            </a:r>
+          </a:p>
+          <a:p>
+            <a:pPr>
+              <a:spcAft>
+                <a:spcPts val="600"/>
+              </a:spcAft>
+              <a:defRPr sz="1000" b="1">
+                <a:solidFill>
+                  <a:srgbClr val="F1F5F9"/>
+                </a:solidFill>
+              </a:defRPr>
+            </a:pPr>
+            <a:r>
+              <a:t>✔ Blockchain Ledger &amp; Tamper Demo: </a:t>
+            </a:r>
+            <a:r>
+              <a:rPr b="0">
+                <a:solidFill>
+                  <a:srgbClr val="94A3B8"/>
+                </a:solidFill>
+              </a:rPr>
+              <a:t>SHA-256 blocks with Merkle roots, Proof-of-Work mining, and live tamper simulation.</a:t>
+            </a:r>
+          </a:p>
+          <a:p>
+            <a:pPr>
+              <a:spcAft>
+                <a:spcPts val="600"/>
+              </a:spcAft>
+              <a:defRPr sz="1000" b="1">
+                <a:solidFill>
+                  <a:srgbClr val="F1F5F9"/>
+                </a:solidFill>
+              </a:defRPr>
+            </a:pPr>
+            <a:r>
+              <a:t>✔ Physical Security &amp; Gestures: </a:t>
+            </a:r>
+            <a:r>
+              <a:rPr b="0">
+                <a:solidFill>
+                  <a:srgbClr val="94A3B8"/>
+                </a:solidFill>
+              </a:rPr>
+              <a:t>YOLOv8 operator auto-lock + MediaPipe touchless OS mouse controls.</a:t>
+            </a:r>
+          </a:p>
+        </p:txBody>
+      </p:sp>
+      <p:sp>
+        <p:nvSpPr>
+          <p:cNvPr id="6" name="Rounded Rectangle 5"/>
+          <p:cNvSpPr/>
+          <p:nvPr/>
+        </p:nvSpPr>
+        <p:spPr>
+          <a:xfrm>
+            <a:off x="6217920" y="1371600"/>
+            <a:ext cx="5212080" cy="4937760"/>
+          </a:xfrm>
+          <a:prstGeom prst="roundRect">
+            <a:avLst/>
+          </a:prstGeom>
+          <a:solidFill>
+            <a:srgbClr val="131B2C"/>
+          </a:solidFill>
+          <a:ln>
+            <a:solidFill>
+              <a:srgbClr val="22D3EE"/>
+            </a:solidFill>
+          </a:ln>
+        </p:spPr>
+        <p:style>
+          <a:lnRef idx="1">
+            <a:schemeClr val="accent1"/>
+          </a:lnRef>
+          <a:fillRef idx="3">
+            <a:schemeClr val="accent1"/>
+          </a:fillRef>
+          <a:effectRef idx="2">
+            <a:schemeClr val="accent1"/>
+          </a:effectRef>
+          <a:fontRef idx="minor">
+            <a:schemeClr val="lt1"/>
+          </a:fontRef>
+        </p:style>
+        <p:txBody>
+          <a:bodyPr rtlCol="0" anchor="ctr" wrap="square" lIns="365760" tIns="365760"/>
+          <a:lstStyle/>
+          <a:p>
+            <a:pPr algn="ctr">
+              <a:spcAft>
+                <a:spcPts val="1000"/>
+              </a:spcAft>
+              <a:defRPr sz="1400" b="1">
+                <a:solidFill>
+                  <a:srgbClr val="22D3EE"/>
+                </a:solidFill>
+              </a:defRPr>
+            </a:pPr>
+            <a:r>
+              <a:t>FUTURE PRODUCTION ROADMAP</a:t>
+            </a:r>
+          </a:p>
+          <a:p>
+            <a:pPr>
+              <a:spcAft>
+                <a:spcPts val="600"/>
+              </a:spcAft>
+              <a:defRPr sz="1000" b="1">
+                <a:solidFill>
+                  <a:srgbClr val="F1F5F9"/>
+                </a:solidFill>
+              </a:defRPr>
+            </a:pPr>
+            <a:r>
+              <a:t>🚀 Enterprise Ingestion Connectors (Q1):</a:t>
+            </a:r>
+            <a:br/>
+            <a:r>
+              <a:rPr b="0">
+                <a:solidFill>
+                  <a:srgbClr val="94A3B8"/>
+                </a:solidFill>
+              </a:rPr>
+              <a:t>Native log forwarders for Wazuh, Splunk, CrowdStrike EDR, and AWS/Azure CSPM.</a:t>
+            </a:r>
+          </a:p>
+          <a:p>
+            <a:pPr>
+              <a:spcAft>
+                <a:spcPts val="600"/>
+              </a:spcAft>
+              <a:defRPr sz="1000" b="1">
+                <a:solidFill>
+                  <a:srgbClr val="F1F5F9"/>
+                </a:solidFill>
+              </a:defRPr>
+            </a:pPr>
+            <a:r>
+              <a:t>🚀 Monte Carlo Probabilistic VaR (Q2):</a:t>
+            </a:r>
+            <a:br/>
+            <a:r>
+              <a:rPr b="0">
+                <a:solidFill>
+                  <a:srgbClr val="94A3B8"/>
+                </a:solidFill>
+              </a:rPr>
+              <a:t>Statistical probability density distributions estimating Value at Risk at 95% confidence intervals.</a:t>
+            </a:r>
+          </a:p>
+          <a:p>
+            <a:pPr>
+              <a:spcAft>
+                <a:spcPts val="600"/>
+              </a:spcAft>
+              <a:defRPr sz="1000" b="1">
+                <a:solidFill>
+                  <a:srgbClr val="F1F5F9"/>
+                </a:solidFill>
+              </a:defRPr>
+            </a:pPr>
+            <a:r>
+              <a:t>🚀 Multi-Campus Consortium Network (Q2):</a:t>
+            </a:r>
+            <a:br/>
+            <a:r>
+              <a:rPr b="0">
+                <a:solidFill>
+                  <a:srgbClr val="94A3B8"/>
+                </a:solidFill>
+              </a:rPr>
+              <a:t>Deploying real peer-to-peer validator nodes across participating universities.</a:t>
+            </a:r>
+          </a:p>
+          <a:p>
+            <a:pPr>
+              <a:spcAft>
+                <a:spcPts val="600"/>
+              </a:spcAft>
+              <a:defRPr sz="1000" b="1">
+                <a:solidFill>
+                  <a:srgbClr val="F1F5F9"/>
+                </a:solidFill>
+              </a:defRPr>
+            </a:pPr>
+            <a:r>
+              <a:t>🚀 Automated Dynamic Control Discovery (Q3):</a:t>
+            </a:r>
+            <a:br/>
+            <a:r>
+              <a:rPr b="0">
+                <a:solidFill>
+                  <a:srgbClr val="94A3B8"/>
+                </a:solidFill>
+              </a:rPr>
+              <a:t>Direct API integration with IT procurement systems for dynamic security solution pricing.</a:t>
+            </a:r>
+          </a:p>
+          <a:p>
+            <a:pPr>
+              <a:spcAft>
+                <a:spcPts val="600"/>
+              </a:spcAft>
+              <a:defRPr sz="1000" b="1">
+                <a:solidFill>
+                  <a:srgbClr val="F1F5F9"/>
+                </a:solidFill>
+              </a:defRPr>
+            </a:pPr>
+            <a:r>
+              <a:t>🚀 Full DPDP Audit Automation (Q3):</a:t>
+            </a:r>
+            <a:br/>
+            <a:r>
+              <a:rPr b="0">
+                <a:solidFill>
+                  <a:srgbClr val="94A3B8"/>
+                </a:solidFill>
+              </a:rPr>
+              <a:t>Automated compliance reports formatted for direct submission to Indian regulatory authorities.</a:t>
+            </a:r>
+          </a:p>
+        </p:txBody>
+      </p:sp>
+    </p:spTree>
+  </p:cSld>
+  <p:clrMapOvr>
+    <a:masterClrMapping/>
+  </p:clrMapOvr>
+</p:sld>
+</file>
+
+<file path=ppt/slides/slide14.xml><?xml version="1.0" encoding="utf-8"?>
+<p:sld xmlns:a="http://schemas.openxmlformats.org/drawingml/2006/main" xmlns:p="http://schemas.openxmlformats.org/presentationml/2006/main" xmlns:r="http://schemas.openxmlformats.org/officeDocument/2006/relationships">
+  <p:cSld>
+    <p:spTree>
+      <p:nvGrpSpPr>
+        <p:cNvPr id="1" name=""/>
+        <p:cNvGrpSpPr/>
+        <p:nvPr/>
+      </p:nvGrpSpPr>
+      <p:grpSpPr/>
+      <p:sp>
+        <p:nvSpPr>
+          <p:cNvPr id="2" name="Rectangle 1"/>
+          <p:cNvSpPr/>
+          <p:nvPr/>
+        </p:nvSpPr>
+        <p:spPr>
+          <a:xfrm>
+            <a:off x="0" y="0"/>
+            <a:ext cx="12191695" cy="6858000"/>
+          </a:xfrm>
+          <a:prstGeom prst="rect">
+            <a:avLst/>
+          </a:prstGeom>
+          <a:solidFill>
+            <a:srgbClr val="0B0F19"/>
+          </a:solidFill>
+          <a:ln>
+            <a:noFill/>
+          </a:ln>
+        </p:spPr>
+        <p:style>
+          <a:lnRef idx="1">
+            <a:schemeClr val="accent1"/>
+          </a:lnRef>
+          <a:fillRef idx="3">
+            <a:schemeClr val="accent1"/>
+          </a:fillRef>
+          <a:effectRef idx="2">
+            <a:schemeClr val="accent1"/>
+          </a:effectRef>
+          <a:fontRef idx="minor">
+            <a:schemeClr val="lt1"/>
+          </a:fontRef>
+        </p:style>
+        <p:txBody>
+          <a:bodyPr rtlCol="0" anchor="ctr"/>
+          <a:lstStyle/>
+          <a:p>
+            <a:pPr algn="ctr"/>
+          </a:p>
+        </p:txBody>
+      </p:sp>
+      <p:sp>
+        <p:nvSpPr>
+          <p:cNvPr id="3" name="TextBox 2"/>
+          <p:cNvSpPr txBox="1"/>
+          <p:nvPr/>
+        </p:nvSpPr>
+        <p:spPr>
+          <a:xfrm>
+            <a:off x="731520" y="320040"/>
+            <a:ext cx="10698480" cy="320040"/>
+          </a:xfrm>
+          <a:prstGeom prst="rect">
+            <a:avLst/>
+          </a:prstGeom>
+          <a:noFill/>
+        </p:spPr>
+        <p:txBody>
+          <a:bodyPr wrap="square">
+            <a:spAutoFit/>
+          </a:bodyPr>
+          <a:lstStyle/>
+          <a:p>
+            <a:pPr>
+              <a:defRPr sz="1000" b="1">
+                <a:solidFill>
+                  <a:srgbClr val="22D3EE"/>
+                </a:solidFill>
+              </a:defRPr>
+            </a:pPr>
+            <a:r>
+              <a:t>SMART INDIA HACKATHON 2026 | PS ID: SIH26105 | BYTEFORCE_1 (180219)</a:t>
+            </a:r>
+          </a:p>
+        </p:txBody>
+      </p:sp>
+      <p:sp>
+        <p:nvSpPr>
+          <p:cNvPr id="4" name="TextBox 3"/>
+          <p:cNvSpPr txBox="1"/>
+          <p:nvPr/>
+        </p:nvSpPr>
+        <p:spPr>
+          <a:xfrm>
+            <a:off x="731520" y="594360"/>
+            <a:ext cx="10698480" cy="640080"/>
+          </a:xfrm>
+          <a:prstGeom prst="rect">
+            <a:avLst/>
+          </a:prstGeom>
+          <a:noFill/>
+        </p:spPr>
+        <p:txBody>
+          <a:bodyPr wrap="square">
+            <a:spAutoFit/>
+          </a:bodyPr>
+          <a:lstStyle/>
+          <a:p>
+            <a:pPr>
+              <a:defRPr sz="2200" b="1">
+                <a:solidFill>
+                  <a:srgbClr val="F1F5F9"/>
+                </a:solidFill>
+              </a:defRPr>
+            </a:pPr>
+            <a:r>
+              <a:t>Slide 14 | Evaluator-Grounded 5-Minute Live Demonstration Sequence</a:t>
+            </a:r>
+          </a:p>
+        </p:txBody>
+      </p:sp>
+      <p:sp>
+        <p:nvSpPr>
+          <p:cNvPr id="5" name="Rounded Rectangle 4"/>
+          <p:cNvSpPr/>
+          <p:nvPr/>
+        </p:nvSpPr>
+        <p:spPr>
+          <a:xfrm>
+            <a:off x="731520" y="1371600"/>
+            <a:ext cx="10698480" cy="4937760"/>
+          </a:xfrm>
+          <a:prstGeom prst="roundRect">
+            <a:avLst/>
+          </a:prstGeom>
+          <a:solidFill>
+            <a:srgbClr val="131B2C"/>
+          </a:solidFill>
+          <a:ln w="19050">
+            <a:solidFill>
+              <a:srgbClr val="00E5FF"/>
+            </a:solidFill>
+          </a:ln>
+        </p:spPr>
+        <p:style>
+          <a:lnRef idx="1">
+            <a:schemeClr val="accent1"/>
+          </a:lnRef>
+          <a:fillRef idx="3">
+            <a:schemeClr val="accent1"/>
+          </a:fillRef>
+          <a:effectRef idx="2">
+            <a:schemeClr val="accent1"/>
+          </a:effectRef>
+          <a:fontRef idx="minor">
+            <a:schemeClr val="lt1"/>
+          </a:fontRef>
+        </p:style>
+        <p:txBody>
+          <a:bodyPr rtlCol="0" anchor="ctr" wrap="square" lIns="365760" tIns="274320"/>
+          <a:lstStyle/>
+          <a:p>
+            <a:pPr algn="ctr">
+              <a:spcAft>
+                <a:spcPts val="800"/>
+              </a:spcAft>
+              <a:defRPr sz="1400" b="1">
+                <a:solidFill>
+                  <a:srgbClr val="22D3EE"/>
+                </a:solidFill>
+              </a:defRPr>
+            </a:pPr>
+            <a:r>
+              <a:t>STEP-BY-STEP LIVE DEMO FLOW (100% DEMONSTRABLE ON CURRENT BUILD)</a:t>
+            </a:r>
+          </a:p>
+          <a:p>
+            <a:pPr>
+              <a:spcAft>
+                <a:spcPts val="500"/>
+              </a:spcAft>
+              <a:defRPr sz="1100" b="1">
+                <a:solidFill>
+                  <a:srgbClr val="22D3EE"/>
+                </a:solidFill>
+              </a:defRPr>
+            </a:pPr>
+            <a:r>
+              <a:t>⏱ 0:00 – 0:45 | Dashboard &amp; Host Status: </a:t>
+            </a:r>
+            <a:r>
+              <a:rPr b="0">
+                <a:solidFill>
+                  <a:srgbClr val="F1F5F9"/>
+                </a:solidFill>
+              </a:rPr>
+              <a:t>Launch AURA SOC Dashboard (Module 01). Show live compute telemetry, listening socket counts, and normalized technical risk score.</a:t>
+            </a:r>
+          </a:p>
+          <a:p>
+            <a:pPr>
+              <a:spcAft>
+                <a:spcPts val="500"/>
+              </a:spcAft>
+              <a:defRPr sz="1100" b="1">
+                <a:solidFill>
+                  <a:srgbClr val="22D3EE"/>
+                </a:solidFill>
+              </a:defRPr>
+            </a:pPr>
+            <a:r>
+              <a:t>⏱ 0:45 – 1:30 | Attack Surface Detection: </a:t>
+            </a:r>
+            <a:r>
+              <a:rPr b="0">
+                <a:solidFill>
+                  <a:srgbClr val="F1F5F9"/>
+                </a:solidFill>
+              </a:rPr>
+              <a:t>Navigate to Attack Surface (Module 02). Highlight active listening ports, danger classifications, and process IDs.</a:t>
+            </a:r>
+          </a:p>
+          <a:p>
+            <a:pPr>
+              <a:spcAft>
+                <a:spcPts val="500"/>
+              </a:spcAft>
+              <a:defRPr sz="1100" b="1">
+                <a:solidFill>
+                  <a:srgbClr val="34D399"/>
+                </a:solidFill>
+              </a:defRPr>
+            </a:pPr>
+            <a:r>
+              <a:t>⏱ 1:30 – 2:15 | Prototype Financial Risk (EAL): </a:t>
+            </a:r>
+            <a:r>
+              <a:rPr b="0">
+                <a:solidFill>
+                  <a:srgbClr val="F1F5F9"/>
+                </a:solidFill>
+              </a:rPr>
+              <a:t>Open Financial Risk (Module 04). Demonstrate live translation of socket stress into hourly downtime rate and estimated exposure in ₹ INR.</a:t>
+            </a:r>
+          </a:p>
+          <a:p>
+            <a:pPr>
+              <a:spcAft>
+                <a:spcPts val="500"/>
+              </a:spcAft>
+              <a:defRPr sz="1100" b="1">
+                <a:solidFill>
+                  <a:srgbClr val="34D399"/>
+                </a:solidFill>
+              </a:defRPr>
+            </a:pPr>
+            <a:r>
+              <a:t>⏱ 2:15 – 3:15 | What-If Scenario Simulation: </a:t>
+            </a:r>
+            <a:r>
+              <a:rPr b="0">
+                <a:solidFill>
+                  <a:srgbClr val="F1F5F9"/>
+                </a:solidFill>
+              </a:rPr>
+              <a:t>Open What-If Engine (Module 05). Adjust sliders to demonstrate exposure reduction; trigger MITRE wargame scenario and log mitigation.</a:t>
+            </a:r>
+          </a:p>
+          <a:p>
+            <a:pPr>
+              <a:spcAft>
+                <a:spcPts val="500"/>
+              </a:spcAft>
+              <a:defRPr sz="1100" b="1">
                 <a:solidFill>
                   <a:srgbClr val="FBBF24"/>
                 </a:solidFill>
               </a:defRPr>
             </a:pPr>
             <a:r>
-              <a:t>• College / Institute: </a:t>
+              <a:t>⏱ 3:15 – 4:15 | Budget Investment Optimizer: </a:t>
             </a:r>
             <a:r>
               <a:rPr b="0">
@@ -3255,19 +5625,22 @@
                   <a:srgbClr val="F1F5F9"/>
                 </a:solidFill>
               </a:rPr>
-              <a:t>Skyline Institute of Engineering and Technology, Greater Noida</a:t>
-            </a:r>
-          </a:p>
-          <a:p>
-            <a:pPr>
-              <a:defRPr sz="1200" b="1">
-                <a:solidFill>
-                  <a:srgbClr val="FBBF24"/>
-                </a:solidFill>
-              </a:defRPr>
-            </a:pPr>
-            <a:r>
-              <a:t>• Team Leader &amp; Members: </a:t>
+              <a:t>Open Investment Optimizer (Module 06). Input ₹1,00,000 budget; execute Knapsack optimizer to display recommended tier and ROSI %.</a:t>
+            </a:r>
+          </a:p>
+          <a:p>
+            <a:pPr>
+              <a:spcAft>
+                <a:spcPts val="500"/>
+              </a:spcAft>
+              <a:defRPr sz="1100" b="1">
+                <a:solidFill>
+                  <a:srgbClr val="F87171"/>
+                </a:solidFill>
+              </a:defRPr>
+            </a:pPr>
+            <a:r>
+              <a:t>⏱ 4:15 – 4:45 | Blockchain Tamper Showdown: </a:t>
             </a:r>
             <a:r>
               <a:rPr b="0">
@@ -3275,19 +5648,22 @@
                   <a:srgbClr val="F1F5F9"/>
                 </a:solidFill>
               </a:rPr>
-              <a:t>Aryan Baghel (Lead), Kirti, Hitesh Chauhan, Avinav Jha, Sharim Khan, Aman Sekh</a:t>
-            </a:r>
-          </a:p>
-          <a:p>
-            <a:pPr>
-              <a:defRPr sz="1200" b="1">
-                <a:solidFill>
-                  <a:srgbClr val="FBBF24"/>
-                </a:solidFill>
-              </a:defRPr>
-            </a:pPr>
-            <a:r>
-              <a:t>• Problem Statement ID: </a:t>
+              <a:t>Open Blockchain Ledger (Module 10). Run integrity audit (100% valid) ➔ Trigger tamper simulation ➔ Show instant red alert ➔ Restore consensus.</a:t>
+            </a:r>
+          </a:p>
+          <a:p>
+            <a:pPr>
+              <a:spcAft>
+                <a:spcPts val="500"/>
+              </a:spcAft>
+              <a:defRPr sz="1100" b="1">
+                <a:solidFill>
+                  <a:srgbClr val="F1F5F9"/>
+                </a:solidFill>
+              </a:defRPr>
+            </a:pPr>
+            <a:r>
+              <a:t>⏱ 4:45 – 5:00 | Executive Audit Report Wrap-up: </a:t>
             </a:r>
             <a:r>
               <a:rPr b="0">
@@ -3295,67 +5671,7 @@
                   <a:srgbClr val="F1F5F9"/>
                 </a:solidFill>
               </a:rPr>
-              <a:t>SIH26105 (AICTE Cyber Security Cell)</a:t>
-            </a:r>
-          </a:p>
-          <a:p>
-            <a:pPr>
-              <a:defRPr sz="1200" b="1">
-                <a:solidFill>
-                  <a:srgbClr val="FBBF24"/>
-                </a:solidFill>
-              </a:defRPr>
-            </a:pPr>
-            <a:r>
-              <a:t>• Theme &amp; Category: </a:t>
-            </a:r>
-            <a:r>
-              <a:rPr b="0">
-                <a:solidFill>
-                  <a:srgbClr val="F1F5F9"/>
-                </a:solidFill>
-              </a:rPr>
-              <a:t>Blockchain &amp; Cybersecurity (Software - Enterprise Defense)</a:t>
-            </a:r>
-          </a:p>
-          <a:p>
-            <a:pPr>
-              <a:defRPr sz="1200" b="1">
-                <a:solidFill>
-                  <a:srgbClr val="FBBF24"/>
-                </a:solidFill>
-              </a:defRPr>
-            </a:pPr>
-            <a:r>
-              <a:t>• Core Tagline: </a:t>
-            </a:r>
-            <a:r>
-              <a:rPr b="0">
-                <a:solidFill>
-                  <a:srgbClr val="F1F5F9"/>
-                </a:solidFill>
-              </a:rPr>
-              <a:t>"From Abstract Vulnerabilities to Actuarial Rupee Losses — Sealed in Cryptographic Proof."</a:t>
-            </a:r>
-          </a:p>
-          <a:p>
-            <a:pPr>
-              <a:defRPr sz="1200" b="1">
-                <a:solidFill>
-                  <a:srgbClr val="FBBF24"/>
-                </a:solidFill>
-              </a:defRPr>
-            </a:pPr>
-            <a:r>
-              <a:t>• Unified Stack: </a:t>
-            </a:r>
-            <a:r>
-              <a:rPr b="0">
-                <a:solidFill>
-                  <a:srgbClr val="F1F5F9"/>
-                </a:solidFill>
-              </a:rPr>
-              <a:t>FastAPI Micro-Kernel + React 19 SOC + MediaPipe Touchless + YOLOv8 + SHA-256 Merkle Ledger</a:t>
+              <a:t>Click 'Audit Report' button in navbar. Present printable executive report summarizing compliance alignment and actuarial exposure.</a:t>
             </a:r>
           </a:p>
         </p:txBody>
@@ -3429,8 +5745,8 @@
         </p:nvSpPr>
         <p:spPr>
           <a:xfrm>
-            <a:off x="731520" y="365760"/>
-            <a:ext cx="10698480" cy="365760"/>
+            <a:off x="731520" y="320040"/>
+            <a:ext cx="10698480" cy="320040"/>
           </a:xfrm>
           <a:prstGeom prst="rect">
             <a:avLst/>
@@ -3444,14 +5760,14 @@
           <a:lstStyle/>
           <a:p>
             <a:pPr>
-              <a:defRPr sz="1100" b="1">
+              <a:defRPr sz="1000" b="1">
                 <a:solidFill>
                   <a:srgbClr val="22D3EE"/>
                 </a:solidFill>
               </a:defRPr>
             </a:pPr>
             <a:r>
-              <a:t>SMART INDIA HACKATHON 2026 | PS ID: SIH26105</a:t>
+              <a:t>SMART INDIA HACKATHON 2026 | PS ID: SIH26105 | BYTEFORCE_1 (180219)</a:t>
             </a:r>
           </a:p>
         </p:txBody>
@@ -3464,8 +5780,8 @@
         </p:nvSpPr>
         <p:spPr>
           <a:xfrm>
-            <a:off x="731520" y="640080"/>
-            <a:ext cx="10698480" cy="731520"/>
+            <a:off x="731520" y="594360"/>
+            <a:ext cx="10698480" cy="640080"/>
           </a:xfrm>
           <a:prstGeom prst="rect">
             <a:avLst/>
@@ -3479,14 +5795,14 @@
           <a:lstStyle/>
           <a:p>
             <a:pPr>
-              <a:defRPr sz="2400" b="1">
-                <a:solidFill>
-                  <a:srgbClr val="F1F5F9"/>
-                </a:solidFill>
-              </a:defRPr>
-            </a:pPr>
-            <a:r>
-              <a:t>01. The Problem vs. AURA Sentinel Breakthrough</a:t>
+              <a:defRPr sz="2200" b="1">
+                <a:solidFill>
+                  <a:srgbClr val="F1F5F9"/>
+                </a:solidFill>
+              </a:defRPr>
+            </a:pPr>
+            <a:r>
+              <a:t>Slide 02 | The Problem: The Disconnect in Cyber Risk Communication</a:t>
             </a:r>
           </a:p>
         </p:txBody>
@@ -3499,8 +5815,8 @@
         </p:nvSpPr>
         <p:spPr>
           <a:xfrm>
-            <a:off x="731520" y="1463040"/>
-            <a:ext cx="5120640" cy="4846320"/>
+            <a:off x="731520" y="1371600"/>
+            <a:ext cx="5120640" cy="4937760"/>
           </a:xfrm>
           <a:prstGeom prst="roundRect">
             <a:avLst/>
@@ -3508,7 +5824,7 @@
           <a:solidFill>
             <a:srgbClr val="131B2C"/>
           </a:solidFill>
-          <a:ln w="19050">
+          <a:ln>
             <a:solidFill>
               <a:srgbClr val="F87171"/>
             </a:solidFill>
@@ -3529,21 +5845,21 @@
           </a:fontRef>
         </p:style>
         <p:txBody>
-          <a:bodyPr rtlCol="0" anchor="ctr" wrap="square" lIns="365760" rIns="365760" tIns="365760"/>
+          <a:bodyPr rtlCol="0" anchor="ctr" wrap="square" lIns="365760" tIns="365760"/>
           <a:lstStyle/>
           <a:p>
             <a:pPr algn="ctr">
               <a:spcAft>
-                <a:spcPts val="1400"/>
-              </a:spcAft>
-              <a:defRPr sz="1800" b="1">
+                <a:spcPts val="1200"/>
+              </a:spcAft>
+              <a:defRPr sz="1600" b="1">
                 <a:solidFill>
                   <a:srgbClr val="F87171"/>
                 </a:solidFill>
               </a:defRPr>
             </a:pPr>
             <a:r>
-              <a:t>⚠️ THE INDUSTRY SHORTCOMING</a:t>
+              <a:t>CURRENT INDUSTRY LIMITATIONS</a:t>
             </a:r>
           </a:p>
           <a:p>
@@ -3551,14 +5867,14 @@
               <a:spcAft>
                 <a:spcPts val="800"/>
               </a:spcAft>
-              <a:defRPr sz="1200" b="1">
-                <a:solidFill>
-                  <a:srgbClr val="F1F5F9"/>
-                </a:solidFill>
-              </a:defRPr>
-            </a:pPr>
-            <a:r>
-              <a:t>• Qualitative Guesswork: </a:t>
+              <a:defRPr sz="1100" b="1">
+                <a:solidFill>
+                  <a:srgbClr val="F1F5F9"/>
+                </a:solidFill>
+              </a:defRPr>
+            </a:pPr>
+            <a:r>
+              <a:t>❌ Qualitative Risk Ratings: </a:t>
             </a:r>
             <a:r>
               <a:rPr b="0">
@@ -3566,7 +5882,7 @@
                   <a:srgbClr val="94A3B8"/>
                 </a:solidFill>
               </a:rPr>
-              <a:t>Scanners spit out 'High/Med/Low' labels. A Vice-Chancellor or CFO cannot comprehend abstract CVE scores.</a:t>
+              <a:t>Vulnerability scanners produce labels like 'High', 'Medium', 'Low' which fail to convey actual monetary liability to leadership.</a:t>
             </a:r>
           </a:p>
           <a:p>
@@ -3574,14 +5890,14 @@
               <a:spcAft>
                 <a:spcPts val="800"/>
               </a:spcAft>
-              <a:defRPr sz="1200" b="1">
-                <a:solidFill>
-                  <a:srgbClr val="F1F5F9"/>
-                </a:solidFill>
-              </a:defRPr>
-            </a:pPr>
-            <a:r>
-              <a:t>• No Budget Correlation: </a:t>
+              <a:defRPr sz="1100" b="1">
+                <a:solidFill>
+                  <a:srgbClr val="F1F5F9"/>
+                </a:solidFill>
+              </a:defRPr>
+            </a:pPr>
+            <a:r>
+              <a:t>❌ Stale Risk Registers: </a:t>
             </a:r>
             <a:r>
               <a:rPr b="0">
@@ -3589,7 +5905,7 @@
                   <a:srgbClr val="94A3B8"/>
                 </a:solidFill>
               </a:rPr>
-              <a:t>Security teams buy expensive tools randomly with zero mathematically justifiable ROI/ROSI.</a:t>
+              <a:t>Traditional compliance relies on annual or quarterly manual audits, missing dynamic threat evolution and emerging vulnerabilities.</a:t>
             </a:r>
           </a:p>
           <a:p>
@@ -3597,14 +5913,14 @@
               <a:spcAft>
                 <a:spcPts val="800"/>
               </a:spcAft>
-              <a:defRPr sz="1200" b="1">
-                <a:solidFill>
-                  <a:srgbClr val="F1F5F9"/>
-                </a:solidFill>
-              </a:defRPr>
-            </a:pPr>
-            <a:r>
-              <a:t>• Mutable Compliance Logs: </a:t>
+              <a:defRPr sz="1100" b="1">
+                <a:solidFill>
+                  <a:srgbClr val="F1F5F9"/>
+                </a:solidFill>
+              </a:defRPr>
+            </a:pPr>
+            <a:r>
+              <a:t>❌ Suboptimal Budget Allocation: </a:t>
             </a:r>
             <a:r>
               <a:rPr b="0">
@@ -3612,7 +5928,7 @@
                   <a:srgbClr val="94A3B8"/>
                 </a:solidFill>
               </a:rPr>
-              <a:t>Rogue insiders or ransomware attackers covertly erase database logs to conceal data breaches.</a:t>
+              <a:t>Organizations invest in security controls without quantifiable Return on Security Investment (ROSI) metrics.</a:t>
             </a:r>
           </a:p>
           <a:p>
@@ -3620,14 +5936,14 @@
               <a:spcAft>
                 <a:spcPts val="800"/>
               </a:spcAft>
-              <a:defRPr sz="1200" b="1">
-                <a:solidFill>
-                  <a:srgbClr val="F1F5F9"/>
-                </a:solidFill>
-              </a:defRPr>
-            </a:pPr>
-            <a:r>
-              <a:t>• Blind Physical Perimeter: </a:t>
+              <a:defRPr sz="1100" b="1">
+                <a:solidFill>
+                  <a:srgbClr val="F1F5F9"/>
+                </a:solidFill>
+              </a:defRPr>
+            </a:pPr>
+            <a:r>
+              <a:t>❌ Log Vulnerability: </a:t>
             </a:r>
             <a:r>
               <a:rPr b="0">
@@ -3635,7 +5951,7 @@
                   <a:srgbClr val="94A3B8"/>
                 </a:solidFill>
               </a:rPr>
-              <a:t>Zero-Trust stops at the network; anyone can walk up to an unlocked operator console and exfiltrate data.</a:t>
+              <a:t>Centralized audit logs in traditional databases remain susceptible to internal modification during a breach investigation.</a:t>
             </a:r>
           </a:p>
         </p:txBody>
@@ -3648,8 +5964,8 @@
         </p:nvSpPr>
         <p:spPr>
           <a:xfrm>
-            <a:off x="6217920" y="1463040"/>
-            <a:ext cx="5212080" cy="4846320"/>
+            <a:off x="6217920" y="1371600"/>
+            <a:ext cx="5212080" cy="4937760"/>
           </a:xfrm>
           <a:prstGeom prst="roundRect">
             <a:avLst/>
@@ -3657,7 +5973,7 @@
           <a:solidFill>
             <a:srgbClr val="131B2C"/>
           </a:solidFill>
-          <a:ln w="19050">
+          <a:ln>
             <a:solidFill>
               <a:srgbClr val="34D399"/>
             </a:solidFill>
@@ -3678,21 +5994,21 @@
           </a:fontRef>
         </p:style>
         <p:txBody>
-          <a:bodyPr rtlCol="0" anchor="ctr" wrap="square" lIns="365760" rIns="365760" tIns="365760"/>
+          <a:bodyPr rtlCol="0" anchor="ctr" wrap="square" lIns="365760" tIns="365760"/>
           <a:lstStyle/>
           <a:p>
             <a:pPr algn="ctr">
               <a:spcAft>
-                <a:spcPts val="1400"/>
-              </a:spcAft>
-              <a:defRPr sz="1800" b="1">
+                <a:spcPts val="1200"/>
+              </a:spcAft>
+              <a:defRPr sz="1600" b="1">
                 <a:solidFill>
                   <a:srgbClr val="34D399"/>
                 </a:solidFill>
               </a:defRPr>
             </a:pPr>
             <a:r>
-              <a:t>🛡️ THE AURA SENTINEL BREAKTHROUGH</a:t>
+              <a:t>THE AURA SENTINEL APPROACH</a:t>
             </a:r>
           </a:p>
           <a:p>
@@ -3700,14 +6016,14 @@
               <a:spcAft>
                 <a:spcPts val="800"/>
               </a:spcAft>
-              <a:defRPr sz="1200" b="1">
-                <a:solidFill>
-                  <a:srgbClr val="F1F5F9"/>
-                </a:solidFill>
-              </a:defRPr>
-            </a:pPr>
-            <a:r>
-              <a:t>✔ Actuarial Rupee Quantification (FAIR): </a:t>
+              <a:defRPr sz="1100" b="1">
+                <a:solidFill>
+                  <a:srgbClr val="F1F5F9"/>
+                </a:solidFill>
+              </a:defRPr>
+            </a:pPr>
+            <a:r>
+              <a:t>✔ Monetary Cyber Risk Translation: </a:t>
             </a:r>
             <a:r>
               <a:rPr b="0">
@@ -3715,7 +6031,7 @@
                   <a:srgbClr val="94A3B8"/>
                 </a:solidFill>
               </a:rPr>
-              <a:t>Translates live open sockets and CPU/RAM strain into Expected Annual Loss &amp; Hourly Downtime in ₹ INR.</a:t>
+              <a:t>Translates real-time socket exposures, process states, and compute telemetry into prototype Expected Annual Loss (EAL) in ₹ INR.</a:t>
             </a:r>
           </a:p>
           <a:p>
@@ -3723,14 +6039,14 @@
               <a:spcAft>
                 <a:spcPts val="800"/>
               </a:spcAft>
-              <a:defRPr sz="1200" b="1">
-                <a:solidFill>
-                  <a:srgbClr val="F1F5F9"/>
-                </a:solidFill>
-              </a:defRPr>
-            </a:pPr>
-            <a:r>
-              <a:t>✔ Pareto Knapsack Optimizer: </a:t>
+              <a:defRPr sz="1100" b="1">
+                <a:solidFill>
+                  <a:srgbClr val="F1F5F9"/>
+                </a:solidFill>
+              </a:defRPr>
+            </a:pPr>
+            <a:r>
+              <a:t>✔ Continuous Telemetry Correlation: </a:t>
             </a:r>
             <a:r>
               <a:rPr b="0">
@@ -3738,7 +6054,7 @@
                   <a:srgbClr val="94A3B8"/>
                 </a:solidFill>
               </a:rPr>
-              <a:t>Takes exact college budget (e.g. ₹25 Lakhs) and calculates optimal portfolio yielding peak ROSI.</a:t>
+              <a:t>Continuously ingests local host metrics and open attack surfaces rather than relying on static questionnaires.</a:t>
             </a:r>
           </a:p>
           <a:p>
@@ -3746,14 +6062,14 @@
               <a:spcAft>
                 <a:spcPts val="800"/>
               </a:spcAft>
-              <a:defRPr sz="1200" b="1">
-                <a:solidFill>
-                  <a:srgbClr val="F1F5F9"/>
-                </a:solidFill>
-              </a:defRPr>
-            </a:pPr>
-            <a:r>
-              <a:t>✔ SHA-256 Merkle Blockchain Ledger: </a:t>
+              <a:defRPr sz="1100" b="1">
+                <a:solidFill>
+                  <a:srgbClr val="F1F5F9"/>
+                </a:solidFill>
+              </a:defRPr>
+            </a:pPr>
+            <a:r>
+              <a:t>✔ Budget-Constrained Optimization: </a:t>
             </a:r>
             <a:r>
               <a:rPr b="0">
@@ -3761,7 +6077,7 @@
                   <a:srgbClr val="94A3B8"/>
                 </a:solidFill>
               </a:rPr>
-              <a:t>Every audit log and risk score is cryptographically chained with Proof-of-Work; impossible to tamper.</a:t>
+              <a:t>Evaluates candidate defense controls under an explicit institutional budget to maximize risk reduction.</a:t>
             </a:r>
           </a:p>
           <a:p>
@@ -3769,14 +6085,14 @@
               <a:spcAft>
                 <a:spcPts val="800"/>
               </a:spcAft>
-              <a:defRPr sz="1200" b="1">
-                <a:solidFill>
-                  <a:srgbClr val="F1F5F9"/>
-                </a:solidFill>
-              </a:defRPr>
-            </a:pPr>
-            <a:r>
-              <a:t>✔ Zero-Trust Auto-Lock &amp; Touchless Gestures: </a:t>
+              <a:defRPr sz="1100" b="1">
+                <a:solidFill>
+                  <a:srgbClr val="F1F5F9"/>
+                </a:solidFill>
+              </a:defRPr>
+            </a:pPr>
+            <a:r>
+              <a:t>✔ Tamper-Evident Audit Ledger: </a:t>
             </a:r>
             <a:r>
               <a:rPr b="0">
@@ -3784,7 +6100,7 @@
                   <a:srgbClr val="94A3B8"/>
                 </a:solidFill>
               </a:rPr>
-              <a:t>YOLOv8 presence auto-locks Windows if operator departs; MediaPipe enables 100% touchless OS navigation.</a:t>
+              <a:t>Anchors risk evaluations and mitigation actions in a SHA-256 Merkle blockchain to provide cryptographic audit verification.</a:t>
             </a:r>
           </a:p>
         </p:txBody>
@@ -3858,8 +6174,8 @@
         </p:nvSpPr>
         <p:spPr>
           <a:xfrm>
-            <a:off x="731520" y="365760"/>
-            <a:ext cx="10698480" cy="365760"/>
+            <a:off x="731520" y="320040"/>
+            <a:ext cx="10698480" cy="320040"/>
           </a:xfrm>
           <a:prstGeom prst="rect">
             <a:avLst/>
@@ -3873,14 +6189,14 @@
           <a:lstStyle/>
           <a:p>
             <a:pPr>
-              <a:defRPr sz="1100" b="1">
+              <a:defRPr sz="1000" b="1">
                 <a:solidFill>
                   <a:srgbClr val="22D3EE"/>
                 </a:solidFill>
               </a:defRPr>
             </a:pPr>
             <a:r>
-              <a:t>SMART INDIA HACKATHON 2026 | PS ID: SIH26105</a:t>
+              <a:t>SMART INDIA HACKATHON 2026 | PS ID: SIH26105 | BYTEFORCE_1 (180219)</a:t>
             </a:r>
           </a:p>
         </p:txBody>
@@ -3893,8 +6209,8 @@
         </p:nvSpPr>
         <p:spPr>
           <a:xfrm>
-            <a:off x="731520" y="640080"/>
-            <a:ext cx="10698480" cy="731520"/>
+            <a:off x="731520" y="594360"/>
+            <a:ext cx="10698480" cy="640080"/>
           </a:xfrm>
           <a:prstGeom prst="rect">
             <a:avLst/>
@@ -3908,14 +6224,14 @@
           <a:lstStyle/>
           <a:p>
             <a:pPr>
-              <a:defRPr sz="2400" b="1">
-                <a:solidFill>
-                  <a:srgbClr val="F1F5F9"/>
-                </a:solidFill>
-              </a:defRPr>
-            </a:pPr>
-            <a:r>
-              <a:t>02. Technical Architecture &amp; 10 Autonomous Subsystems</a:t>
+              <a:defRPr sz="2200" b="1">
+                <a:solidFill>
+                  <a:srgbClr val="F1F5F9"/>
+                </a:solidFill>
+              </a:defRPr>
+            </a:pPr>
+            <a:r>
+              <a:t>Slide 03 | Core System Workflow: Technical Signals to Executive Decision</a:t>
             </a:r>
           </a:p>
         </p:txBody>
@@ -3929,7 +6245,7 @@
         <p:spPr>
           <a:xfrm>
             <a:off x="731520" y="1463040"/>
-            <a:ext cx="3383280" cy="4846320"/>
+            <a:ext cx="3291840" cy="2194560"/>
           </a:xfrm>
           <a:prstGeom prst="roundRect">
             <a:avLst/>
@@ -3937,7 +6253,7 @@
           <a:solidFill>
             <a:srgbClr val="131B2C"/>
           </a:solidFill>
-          <a:ln>
+          <a:ln w="19050">
             <a:solidFill>
               <a:srgbClr val="22D3EE"/>
             </a:solidFill>
@@ -3958,28 +6274,25 @@
           </a:fontRef>
         </p:style>
         <p:txBody>
-          <a:bodyPr rtlCol="0" anchor="ctr" wrap="square" lIns="274320" rIns="274320" tIns="274320"/>
+          <a:bodyPr rtlCol="0" anchor="ctr" wrap="square" lIns="274320" tIns="274320"/>
           <a:lstStyle/>
           <a:p>
             <a:pPr algn="ctr">
               <a:spcAft>
-                <a:spcPts val="1000"/>
-              </a:spcAft>
-              <a:defRPr sz="1400" b="1">
+                <a:spcPts val="800"/>
+              </a:spcAft>
+              <a:defRPr sz="1300" b="1">
                 <a:solidFill>
                   <a:srgbClr val="22D3EE"/>
                 </a:solidFill>
               </a:defRPr>
             </a:pPr>
             <a:r>
-              <a:t>LAYER 1: PRESENTATION &amp; SOC</a:t>
-            </a:r>
-          </a:p>
-          <a:p>
-            <a:pPr>
-              <a:spcAft>
-                <a:spcPts val="600"/>
-              </a:spcAft>
+              <a:t>1. Technical Telemetry</a:t>
+            </a:r>
+          </a:p>
+          <a:p>
+            <a:pPr>
               <a:defRPr sz="1100">
                 <a:solidFill>
                   <a:srgbClr val="F1F5F9"/>
@@ -3987,97 +6300,7 @@
               </a:defRPr>
             </a:pPr>
             <a:r>
-              <a:t>• React 19 + Vite Supercharged Frontend</a:t>
-            </a:r>
-          </a:p>
-          <a:p>
-            <a:pPr>
-              <a:spcAft>
-                <a:spcPts val="600"/>
-              </a:spcAft>
-              <a:defRPr sz="1100">
-                <a:solidFill>
-                  <a:srgbClr val="F1F5F9"/>
-                </a:solidFill>
-              </a:defRPr>
-            </a:pPr>
-            <a:r>
-              <a:t>• Unified 10-Engine SOC Command Center</a:t>
-            </a:r>
-          </a:p>
-          <a:p>
-            <a:pPr>
-              <a:spcAft>
-                <a:spcPts val="600"/>
-              </a:spcAft>
-              <a:defRPr sz="1100">
-                <a:solidFill>
-                  <a:srgbClr val="F1F5F9"/>
-                </a:solidFill>
-              </a:defRPr>
-            </a:pPr>
-            <a:r>
-              <a:t>• Real-Time Threat Telemetry Feeds</a:t>
-            </a:r>
-          </a:p>
-          <a:p>
-            <a:pPr>
-              <a:spcAft>
-                <a:spcPts val="600"/>
-              </a:spcAft>
-              <a:defRPr sz="1100">
-                <a:solidFill>
-                  <a:srgbClr val="F1F5F9"/>
-                </a:solidFill>
-              </a:defRPr>
-            </a:pPr>
-            <a:r>
-              <a:t>• Global Quick Action Palette (Ctrl+K)</a:t>
-            </a:r>
-          </a:p>
-          <a:p>
-            <a:pPr>
-              <a:spcAft>
-                <a:spcPts val="600"/>
-              </a:spcAft>
-              <a:defRPr sz="1100">
-                <a:solidFill>
-                  <a:srgbClr val="F1F5F9"/>
-                </a:solidFill>
-              </a:defRPr>
-            </a:pPr>
-            <a:r>
-              <a:t>• Web Biometric Facial Auth (face-api.js)</a:t>
-            </a:r>
-          </a:p>
-          <a:p>
-            <a:pPr>
-              <a:spcAft>
-                <a:spcPts val="600"/>
-              </a:spcAft>
-              <a:defRPr sz="1100">
-                <a:solidFill>
-                  <a:srgbClr val="F1F5F9"/>
-                </a:solidFill>
-              </a:defRPr>
-            </a:pPr>
-            <a:r>
-              <a:t>• Procedural Cyber Synthesizer Audio</a:t>
-            </a:r>
-          </a:p>
-          <a:p>
-            <a:pPr>
-              <a:spcAft>
-                <a:spcPts val="600"/>
-              </a:spcAft>
-              <a:defRPr sz="1100">
-                <a:solidFill>
-                  <a:srgbClr val="F1F5F9"/>
-                </a:solidFill>
-              </a:defRPr>
-            </a:pPr>
-            <a:r>
-              <a:t>• Instant Executive PDF Audit Generator</a:t>
+              <a:t>Host metrics, listening sockets, CPU/RAM stress, and sensitive file exposures.</a:t>
             </a:r>
           </a:p>
         </p:txBody>
@@ -4090,8 +6313,8 @@
         </p:nvSpPr>
         <p:spPr>
           <a:xfrm>
-            <a:off x="4389120" y="1463040"/>
-            <a:ext cx="3383280" cy="4846320"/>
+            <a:off x="4297680" y="1463040"/>
+            <a:ext cx="3291840" cy="2194560"/>
           </a:xfrm>
           <a:prstGeom prst="roundRect">
             <a:avLst/>
@@ -4099,7 +6322,76 @@
           <a:solidFill>
             <a:srgbClr val="131B2C"/>
           </a:solidFill>
-          <a:ln>
+          <a:ln w="19050">
+            <a:solidFill>
+              <a:srgbClr val="22D3EE"/>
+            </a:solidFill>
+          </a:ln>
+        </p:spPr>
+        <p:style>
+          <a:lnRef idx="1">
+            <a:schemeClr val="accent1"/>
+          </a:lnRef>
+          <a:fillRef idx="3">
+            <a:schemeClr val="accent1"/>
+          </a:fillRef>
+          <a:effectRef idx="2">
+            <a:schemeClr val="accent1"/>
+          </a:effectRef>
+          <a:fontRef idx="minor">
+            <a:schemeClr val="lt1"/>
+          </a:fontRef>
+        </p:style>
+        <p:txBody>
+          <a:bodyPr rtlCol="0" anchor="ctr" wrap="square" lIns="274320" tIns="274320"/>
+          <a:lstStyle/>
+          <a:p>
+            <a:pPr algn="ctr">
+              <a:spcAft>
+                <a:spcPts val="800"/>
+              </a:spcAft>
+              <a:defRPr sz="1300" b="1">
+                <a:solidFill>
+                  <a:srgbClr val="22D3EE"/>
+                </a:solidFill>
+              </a:defRPr>
+            </a:pPr>
+            <a:r>
+              <a:t>2. Continuous Analysis</a:t>
+            </a:r>
+          </a:p>
+          <a:p>
+            <a:pPr>
+              <a:defRPr sz="1100">
+                <a:solidFill>
+                  <a:srgbClr val="F1F5F9"/>
+                </a:solidFill>
+              </a:defRPr>
+            </a:pPr>
+            <a:r>
+              <a:t>Correlates exposure counts with system vulnerability factors and threat indicators.</a:t>
+            </a:r>
+          </a:p>
+        </p:txBody>
+      </p:sp>
+      <p:sp>
+        <p:nvSpPr>
+          <p:cNvPr id="7" name="Rounded Rectangle 6"/>
+          <p:cNvSpPr/>
+          <p:nvPr/>
+        </p:nvSpPr>
+        <p:spPr>
+          <a:xfrm>
+            <a:off x="7863840" y="1463040"/>
+            <a:ext cx="3291840" cy="2194560"/>
+          </a:xfrm>
+          <a:prstGeom prst="roundRect">
+            <a:avLst/>
+          </a:prstGeom>
+          <a:solidFill>
+            <a:srgbClr val="131B2C"/>
+          </a:solidFill>
+          <a:ln w="19050">
             <a:solidFill>
               <a:srgbClr val="34D399"/>
             </a:solidFill>
@@ -4120,28 +6412,25 @@
           </a:fontRef>
         </p:style>
         <p:txBody>
-          <a:bodyPr rtlCol="0" anchor="ctr" wrap="square" lIns="274320" rIns="274320" tIns="274320"/>
+          <a:bodyPr rtlCol="0" anchor="ctr" wrap="square" lIns="274320" tIns="274320"/>
           <a:lstStyle/>
           <a:p>
             <a:pPr algn="ctr">
               <a:spcAft>
-                <a:spcPts val="1000"/>
-              </a:spcAft>
-              <a:defRPr sz="1400" b="1">
+                <a:spcPts val="800"/>
+              </a:spcAft>
+              <a:defRPr sz="1300" b="1">
                 <a:solidFill>
                   <a:srgbClr val="34D399"/>
                 </a:solidFill>
               </a:defRPr>
             </a:pPr>
             <a:r>
-              <a:t>LAYER 2: COMPUTATIONAL CORE</a:t>
-            </a:r>
-          </a:p>
-          <a:p>
-            <a:pPr>
-              <a:spcAft>
-                <a:spcPts val="600"/>
-              </a:spcAft>
+              <a:t>3. Prototype Exposure</a:t>
+            </a:r>
+          </a:p>
+          <a:p>
+            <a:pPr>
               <a:defRPr sz="1100">
                 <a:solidFill>
                   <a:srgbClr val="F1F5F9"/>
@@ -4149,111 +6438,21 @@
               </a:defRPr>
             </a:pPr>
             <a:r>
-              <a:t>• Python FastAPI Async Micro-Kernel</a:t>
-            </a:r>
-          </a:p>
-          <a:p>
-            <a:pPr>
-              <a:spcAft>
-                <a:spcPts val="600"/>
-              </a:spcAft>
-              <a:defRPr sz="1100">
-                <a:solidFill>
-                  <a:srgbClr val="F1F5F9"/>
-                </a:solidFill>
-              </a:defRPr>
-            </a:pPr>
-            <a:r>
-              <a:t>• FAIR Quantitative Loss Formulation in ₹</a:t>
-            </a:r>
-          </a:p>
-          <a:p>
-            <a:pPr>
-              <a:spcAft>
-                <a:spcPts val="600"/>
-              </a:spcAft>
-              <a:defRPr sz="1100">
-                <a:solidFill>
-                  <a:srgbClr val="F1F5F9"/>
-                </a:solidFill>
-              </a:defRPr>
-            </a:pPr>
-            <a:r>
-              <a:t>• Pareto Knapsack Security Optimizer</a:t>
-            </a:r>
-          </a:p>
-          <a:p>
-            <a:pPr>
-              <a:spcAft>
-                <a:spcPts val="600"/>
-              </a:spcAft>
-              <a:defRPr sz="1100">
-                <a:solidFill>
-                  <a:srgbClr val="F1F5F9"/>
-                </a:solidFill>
-              </a:defRPr>
-            </a:pPr>
-            <a:r>
-              <a:t>• Attack Surface &amp; Open Socket Sentinel</a:t>
-            </a:r>
-          </a:p>
-          <a:p>
-            <a:pPr>
-              <a:spcAft>
-                <a:spcPts val="600"/>
-              </a:spcAft>
-              <a:defRPr sz="1100">
-                <a:solidFill>
-                  <a:srgbClr val="F1F5F9"/>
-                </a:solidFill>
-              </a:defRPr>
-            </a:pPr>
-            <a:r>
-              <a:t>• MITRE ATT&amp;CK Scenario Simulator</a:t>
-            </a:r>
-          </a:p>
-          <a:p>
-            <a:pPr>
-              <a:spcAft>
-                <a:spcPts val="600"/>
-              </a:spcAft>
-              <a:defRPr sz="1100">
-                <a:solidFill>
-                  <a:srgbClr val="F1F5F9"/>
-                </a:solidFill>
-              </a:defRPr>
-            </a:pPr>
-            <a:r>
-              <a:t>• Sensitive File Scanner (Aadhaar/PAN/Keys)</a:t>
-            </a:r>
-          </a:p>
-          <a:p>
-            <a:pPr>
-              <a:spcAft>
-                <a:spcPts val="600"/>
-              </a:spcAft>
-              <a:defRPr sz="1100">
-                <a:solidFill>
-                  <a:srgbClr val="F1F5F9"/>
-                </a:solidFill>
-              </a:defRPr>
-            </a:pPr>
-            <a:r>
-              <a:t>• Automated Quarantine Isolation Vault</a:t>
-            </a:r>
-          </a:p>
-        </p:txBody>
-      </p:sp>
-      <p:sp>
-        <p:nvSpPr>
-          <p:cNvPr id="7" name="Rounded Rectangle 6"/>
+              <a:t>Computes hourly operational downtime costs and prototype Expected Annual Loss (₹).</a:t>
+            </a:r>
+          </a:p>
+        </p:txBody>
+      </p:sp>
+      <p:sp>
+        <p:nvSpPr>
+          <p:cNvPr id="8" name="Rounded Rectangle 7"/>
           <p:cNvSpPr/>
           <p:nvPr/>
         </p:nvSpPr>
         <p:spPr>
           <a:xfrm>
-            <a:off x="8046720" y="1463040"/>
-            <a:ext cx="3383280" cy="4846320"/>
+            <a:off x="731520" y="3931920"/>
+            <a:ext cx="3291840" cy="2194560"/>
           </a:xfrm>
           <a:prstGeom prst="roundRect">
             <a:avLst/>
@@ -4261,7 +6460,76 @@
           <a:solidFill>
             <a:srgbClr val="131B2C"/>
           </a:solidFill>
-          <a:ln>
+          <a:ln w="19050">
+            <a:solidFill>
+              <a:srgbClr val="34D399"/>
+            </a:solidFill>
+          </a:ln>
+        </p:spPr>
+        <p:style>
+          <a:lnRef idx="1">
+            <a:schemeClr val="accent1"/>
+          </a:lnRef>
+          <a:fillRef idx="3">
+            <a:schemeClr val="accent1"/>
+          </a:fillRef>
+          <a:effectRef idx="2">
+            <a:schemeClr val="accent1"/>
+          </a:effectRef>
+          <a:fontRef idx="minor">
+            <a:schemeClr val="lt1"/>
+          </a:fontRef>
+        </p:style>
+        <p:txBody>
+          <a:bodyPr rtlCol="0" anchor="ctr" wrap="square" lIns="274320" tIns="274320"/>
+          <a:lstStyle/>
+          <a:p>
+            <a:pPr algn="ctr">
+              <a:spcAft>
+                <a:spcPts val="800"/>
+              </a:spcAft>
+              <a:defRPr sz="1300" b="1">
+                <a:solidFill>
+                  <a:srgbClr val="34D399"/>
+                </a:solidFill>
+              </a:defRPr>
+            </a:pPr>
+            <a:r>
+              <a:t>4. What-If Scenarios</a:t>
+            </a:r>
+          </a:p>
+          <a:p>
+            <a:pPr>
+              <a:defRPr sz="1100">
+                <a:solidFill>
+                  <a:srgbClr val="F1F5F9"/>
+                </a:solidFill>
+              </a:defRPr>
+            </a:pPr>
+            <a:r>
+              <a:t>Simulates threat scenarios and hypothetical control parameter tuning.</a:t>
+            </a:r>
+          </a:p>
+        </p:txBody>
+      </p:sp>
+      <p:sp>
+        <p:nvSpPr>
+          <p:cNvPr id="9" name="Rounded Rectangle 8"/>
+          <p:cNvSpPr/>
+          <p:nvPr/>
+        </p:nvSpPr>
+        <p:spPr>
+          <a:xfrm>
+            <a:off x="4297680" y="3931920"/>
+            <a:ext cx="3291840" cy="2194560"/>
+          </a:xfrm>
+          <a:prstGeom prst="roundRect">
+            <a:avLst/>
+          </a:prstGeom>
+          <a:solidFill>
+            <a:srgbClr val="131B2C"/>
+          </a:solidFill>
+          <a:ln w="19050">
             <a:solidFill>
               <a:srgbClr val="FBBF24"/>
             </a:solidFill>
@@ -4282,28 +6550,25 @@
           </a:fontRef>
         </p:style>
         <p:txBody>
-          <a:bodyPr rtlCol="0" anchor="ctr" wrap="square" lIns="274320" rIns="274320" tIns="274320"/>
+          <a:bodyPr rtlCol="0" anchor="ctr" wrap="square" lIns="274320" tIns="274320"/>
           <a:lstStyle/>
           <a:p>
             <a:pPr algn="ctr">
               <a:spcAft>
-                <a:spcPts val="1000"/>
-              </a:spcAft>
-              <a:defRPr sz="1400" b="1">
+                <a:spcPts val="800"/>
+              </a:spcAft>
+              <a:defRPr sz="1300" b="1">
                 <a:solidFill>
                   <a:srgbClr val="FBBF24"/>
                 </a:solidFill>
               </a:defRPr>
             </a:pPr>
             <a:r>
-              <a:t>LAYER 3: TRUST &amp; AI ENGINES</a:t>
-            </a:r>
-          </a:p>
-          <a:p>
-            <a:pPr>
-              <a:spcAft>
-                <a:spcPts val="600"/>
-              </a:spcAft>
+              <a:t>5. Knapsack Optimizer</a:t>
+            </a:r>
+          </a:p>
+          <a:p>
+            <a:pPr>
               <a:defRPr sz="1100">
                 <a:solidFill>
                   <a:srgbClr val="F1F5F9"/>
@@ -4311,14 +6576,68 @@
               </a:defRPr>
             </a:pPr>
             <a:r>
-              <a:t>• YOLOv8 Nano Presence &amp; Auto-Lock</a:t>
-            </a:r>
-          </a:p>
-          <a:p>
-            <a:pPr>
-              <a:spcAft>
-                <a:spcPts val="600"/>
-              </a:spcAft>
+              <a:t>Selects optimal defense packages under explicit budget constraints to maximize ROSI.</a:t>
+            </a:r>
+          </a:p>
+        </p:txBody>
+      </p:sp>
+      <p:sp>
+        <p:nvSpPr>
+          <p:cNvPr id="10" name="Rounded Rectangle 9"/>
+          <p:cNvSpPr/>
+          <p:nvPr/>
+        </p:nvSpPr>
+        <p:spPr>
+          <a:xfrm>
+            <a:off x="7863840" y="3931920"/>
+            <a:ext cx="3291840" cy="2194560"/>
+          </a:xfrm>
+          <a:prstGeom prst="roundRect">
+            <a:avLst/>
+          </a:prstGeom>
+          <a:solidFill>
+            <a:srgbClr val="131B2C"/>
+          </a:solidFill>
+          <a:ln w="19050">
+            <a:solidFill>
+              <a:srgbClr val="FBBF24"/>
+            </a:solidFill>
+          </a:ln>
+        </p:spPr>
+        <p:style>
+          <a:lnRef idx="1">
+            <a:schemeClr val="accent1"/>
+          </a:lnRef>
+          <a:fillRef idx="3">
+            <a:schemeClr val="accent1"/>
+          </a:fillRef>
+          <a:effectRef idx="2">
+            <a:schemeClr val="accent1"/>
+          </a:effectRef>
+          <a:fontRef idx="minor">
+            <a:schemeClr val="lt1"/>
+          </a:fontRef>
+        </p:style>
+        <p:txBody>
+          <a:bodyPr rtlCol="0" anchor="ctr" wrap="square" lIns="274320" tIns="274320"/>
+          <a:lstStyle/>
+          <a:p>
+            <a:pPr algn="ctr">
+              <a:spcAft>
+                <a:spcPts val="800"/>
+              </a:spcAft>
+              <a:defRPr sz="1300" b="1">
+                <a:solidFill>
+                  <a:srgbClr val="FBBF24"/>
+                </a:solidFill>
+              </a:defRPr>
+            </a:pPr>
+            <a:r>
+              <a:t>6. Cryptographic Audit</a:t>
+            </a:r>
+          </a:p>
+          <a:p>
+            <a:pPr>
               <a:defRPr sz="1100">
                 <a:solidFill>
                   <a:srgbClr val="F1F5F9"/>
@@ -4326,82 +6645,7 @@
               </a:defRPr>
             </a:pPr>
             <a:r>
-              <a:t>• MediaPipe 0.10 Touchless Hand Mouse</a:t>
-            </a:r>
-          </a:p>
-          <a:p>
-            <a:pPr>
-              <a:spcAft>
-                <a:spcPts val="600"/>
-              </a:spcAft>
-              <a:defRPr sz="1100">
-                <a:solidFill>
-                  <a:srgbClr val="F1F5F9"/>
-                </a:solidFill>
-              </a:defRPr>
-            </a:pPr>
-            <a:r>
-              <a:t>• SHA-256 Merkle Blockchain Ledger</a:t>
-            </a:r>
-          </a:p>
-          <a:p>
-            <a:pPr>
-              <a:spcAft>
-                <a:spcPts val="600"/>
-              </a:spcAft>
-              <a:defRPr sz="1100">
-                <a:solidFill>
-                  <a:srgbClr val="F1F5F9"/>
-                </a:solidFill>
-              </a:defRPr>
-            </a:pPr>
-            <a:r>
-              <a:t>• Cryptographic Proof-of-Work (PoW)</a:t>
-            </a:r>
-          </a:p>
-          <a:p>
-            <a:pPr>
-              <a:spcAft>
-                <a:spcPts val="600"/>
-              </a:spcAft>
-              <a:defRPr sz="1100">
-                <a:solidFill>
-                  <a:srgbClr val="F1F5F9"/>
-                </a:solidFill>
-              </a:defRPr>
-            </a:pPr>
-            <a:r>
-              <a:t>• Tamper Detection &amp; Auto Consensus Restore</a:t>
-            </a:r>
-          </a:p>
-          <a:p>
-            <a:pPr>
-              <a:spcAft>
-                <a:spcPts val="600"/>
-              </a:spcAft>
-              <a:defRPr sz="1100">
-                <a:solidFill>
-                  <a:srgbClr val="F1F5F9"/>
-                </a:solidFill>
-              </a:defRPr>
-            </a:pPr>
-            <a:r>
-              <a:t>• SQLite 3 WAL Mode Database Hub</a:t>
-            </a:r>
-          </a:p>
-          <a:p>
-            <a:pPr>
-              <a:spcAft>
-                <a:spcPts val="600"/>
-              </a:spcAft>
-              <a:defRPr sz="1100">
-                <a:solidFill>
-                  <a:srgbClr val="F1F5F9"/>
-                </a:solidFill>
-              </a:defRPr>
-            </a:pPr>
-            <a:r>
-              <a:t>• Zero Cloud Dependency (100% Local-First)</a:t>
+              <a:t>Records assessments and mitigations into a tamper-evident SHA-256 Merkle ledger.</a:t>
             </a:r>
           </a:p>
         </p:txBody>
@@ -4475,8 +6719,8 @@
         </p:nvSpPr>
         <p:spPr>
           <a:xfrm>
-            <a:off x="731520" y="365760"/>
-            <a:ext cx="10698480" cy="365760"/>
+            <a:off x="731520" y="320040"/>
+            <a:ext cx="10698480" cy="320040"/>
           </a:xfrm>
           <a:prstGeom prst="rect">
             <a:avLst/>
@@ -4490,14 +6734,14 @@
           <a:lstStyle/>
           <a:p>
             <a:pPr>
-              <a:defRPr sz="1100" b="1">
+              <a:defRPr sz="1000" b="1">
                 <a:solidFill>
                   <a:srgbClr val="22D3EE"/>
                 </a:solidFill>
               </a:defRPr>
             </a:pPr>
             <a:r>
-              <a:t>SMART INDIA HACKATHON 2026 | PS ID: SIH26105</a:t>
+              <a:t>SMART INDIA HACKATHON 2026 | PS ID: SIH26105 | BYTEFORCE_1 (180219)</a:t>
             </a:r>
           </a:p>
         </p:txBody>
@@ -4510,8 +6754,8 @@
         </p:nvSpPr>
         <p:spPr>
           <a:xfrm>
-            <a:off x="731520" y="640080"/>
-            <a:ext cx="10698480" cy="731520"/>
+            <a:off x="731520" y="594360"/>
+            <a:ext cx="10698480" cy="640080"/>
           </a:xfrm>
           <a:prstGeom prst="rect">
             <a:avLst/>
@@ -4525,14 +6769,14 @@
           <a:lstStyle/>
           <a:p>
             <a:pPr>
-              <a:defRPr sz="2400" b="1">
-                <a:solidFill>
-                  <a:srgbClr val="F1F5F9"/>
-                </a:solidFill>
-              </a:defRPr>
-            </a:pPr>
-            <a:r>
-              <a:t>03. Mathematical Formulation &amp; Algorithmic Rigor</a:t>
+              <a:defRPr sz="2200" b="1">
+                <a:solidFill>
+                  <a:srgbClr val="F1F5F9"/>
+                </a:solidFill>
+              </a:defRPr>
+            </a:pPr>
+            <a:r>
+              <a:t>Slide 04 | Technical Architecture &amp; Implementation Classification</a:t>
             </a:r>
           </a:p>
         </p:txBody>
@@ -4545,8 +6789,8 @@
         </p:nvSpPr>
         <p:spPr>
           <a:xfrm>
-            <a:off x="731520" y="1463040"/>
-            <a:ext cx="5212080" cy="2286000"/>
+            <a:off x="731520" y="1371600"/>
+            <a:ext cx="3383280" cy="4937760"/>
           </a:xfrm>
           <a:prstGeom prst="roundRect">
             <a:avLst/>
@@ -4575,49 +6819,165 @@
           </a:fontRef>
         </p:style>
         <p:txBody>
-          <a:bodyPr rtlCol="0" anchor="ctr" wrap="square" lIns="365760" tIns="274320"/>
+          <a:bodyPr rtlCol="0" anchor="ctr" wrap="square" lIns="274320" tIns="274320"/>
           <a:lstStyle/>
           <a:p>
             <a:pPr algn="ctr">
-              <a:defRPr sz="1400" b="1">
+              <a:spcAft>
+                <a:spcPts val="800"/>
+              </a:spcAft>
+              <a:defRPr sz="1300" b="1">
                 <a:solidFill>
                   <a:srgbClr val="22D3EE"/>
                 </a:solidFill>
               </a:defRPr>
             </a:pPr>
             <a:r>
-              <a:t>1. ACTUARIAL FINANCIAL RISK (FAIR STANDARD)</a:t>
-            </a:r>
-          </a:p>
-          <a:p>
-            <a:pPr>
-              <a:spcBef>
-                <a:spcPts val="400"/>
-              </a:spcBef>
-              <a:defRPr sz="1100" b="1">
-                <a:solidFill>
-                  <a:srgbClr val="F1F5F9"/>
-                </a:solidFill>
-              </a:defRPr>
-            </a:pPr>
-            <a:r>
-              <a:t>EAL (₹) = TEF × Vulnerability Factor × Loss Magnitude (₹) | Value at Risk (VaR 95%)</a:t>
+              <a:t>LAYER 1: PRESENTATION &amp; SOC</a:t>
+            </a:r>
+          </a:p>
+          <a:p>
+            <a:pPr>
+              <a:spcAft>
+                <a:spcPts val="600"/>
+              </a:spcAft>
+              <a:defRPr sz="1000" b="1">
+                <a:solidFill>
+                  <a:srgbClr val="F1F5F9"/>
+                </a:solidFill>
+              </a:defRPr>
+            </a:pPr>
+            <a:r>
+              <a:t>React 19 + Vite SOC Dashboard</a:t>
             </a:r>
             <a:br/>
             <a:r>
-              <a:t>Hourly Disruption Cost = Active Sockets × Baseline Compute Rate</a:t>
-            </a:r>
-          </a:p>
-          <a:p>
-            <a:pPr>
-              <a:defRPr sz="1100">
-                <a:solidFill>
-                  <a:srgbClr val="94A3B8"/>
-                </a:solidFill>
-              </a:defRPr>
-            </a:pPr>
-            <a:r>
-              <a:t>Replaces unquantified CVE scores with definitive INR liability &amp; Value at Risk (VaR) figures understood by CFOs/Directors.</a:t>
+              <a:rPr sz="900">
+                <a:solidFill>
+                  <a:srgbClr val="34D399"/>
+                </a:solidFill>
+              </a:rPr>
+              <a:t>Status: ● IMPLEMENTED</a:t>
+            </a:r>
+          </a:p>
+          <a:p>
+            <a:pPr>
+              <a:spcAft>
+                <a:spcPts val="600"/>
+              </a:spcAft>
+              <a:defRPr sz="1000" b="1">
+                <a:solidFill>
+                  <a:srgbClr val="F1F5F9"/>
+                </a:solidFill>
+              </a:defRPr>
+            </a:pPr>
+            <a:r>
+              <a:t>Live Threat Telemetry &amp; Port Monitor</a:t>
+            </a:r>
+            <a:br/>
+            <a:r>
+              <a:rPr sz="900">
+                <a:solidFill>
+                  <a:srgbClr val="34D399"/>
+                </a:solidFill>
+              </a:rPr>
+              <a:t>Status: ● IMPLEMENTED</a:t>
+            </a:r>
+          </a:p>
+          <a:p>
+            <a:pPr>
+              <a:spcAft>
+                <a:spcPts val="600"/>
+              </a:spcAft>
+              <a:defRPr sz="1000" b="1">
+                <a:solidFill>
+                  <a:srgbClr val="F1F5F9"/>
+                </a:solidFill>
+              </a:defRPr>
+            </a:pPr>
+            <a:r>
+              <a:t>Global Command Palette (Ctrl+K)</a:t>
+            </a:r>
+            <a:br/>
+            <a:r>
+              <a:rPr sz="900">
+                <a:solidFill>
+                  <a:srgbClr val="34D399"/>
+                </a:solidFill>
+              </a:rPr>
+              <a:t>Status: ● IMPLEMENTED</a:t>
+            </a:r>
+          </a:p>
+          <a:p>
+            <a:pPr>
+              <a:spcAft>
+                <a:spcPts val="600"/>
+              </a:spcAft>
+              <a:defRPr sz="1000" b="1">
+                <a:solidFill>
+                  <a:srgbClr val="F1F5F9"/>
+                </a:solidFill>
+              </a:defRPr>
+            </a:pPr>
+            <a:r>
+              <a:t>Executive Audit Report Generator</a:t>
+            </a:r>
+            <a:br/>
+            <a:r>
+              <a:rPr sz="900">
+                <a:solidFill>
+                  <a:srgbClr val="34D399"/>
+                </a:solidFill>
+              </a:rPr>
+              <a:t>Status: ● IMPLEMENTED</a:t>
+            </a:r>
+          </a:p>
+          <a:p>
+            <a:pPr>
+              <a:spcAft>
+                <a:spcPts val="600"/>
+              </a:spcAft>
+              <a:defRPr sz="1000" b="1">
+                <a:solidFill>
+                  <a:srgbClr val="F1F5F9"/>
+                </a:solidFill>
+              </a:defRPr>
+            </a:pPr>
+            <a:r>
+              <a:t>Client Biometric Face Verification</a:t>
+            </a:r>
+            <a:br/>
+            <a:r>
+              <a:rPr sz="900">
+                <a:solidFill>
+                  <a:srgbClr val="FBBF24"/>
+                </a:solidFill>
+              </a:rPr>
+              <a:t>Status: ◐ PROTOTYPE</a:t>
+            </a:r>
+          </a:p>
+          <a:p>
+            <a:pPr>
+              <a:spcAft>
+                <a:spcPts val="600"/>
+              </a:spcAft>
+              <a:defRPr sz="1000" b="1">
+                <a:solidFill>
+                  <a:srgbClr val="F1F5F9"/>
+                </a:solidFill>
+              </a:defRPr>
+            </a:pPr>
+            <a:r>
+              <a:t>Procedural Cyber Audio Cues</a:t>
+            </a:r>
+            <a:br/>
+            <a:r>
+              <a:rPr sz="900">
+                <a:solidFill>
+                  <a:srgbClr val="34D399"/>
+                </a:solidFill>
+              </a:rPr>
+              <a:t>Status: ● IMPLEMENTED</a:t>
             </a:r>
           </a:p>
         </p:txBody>
@@ -4630,8 +6990,8 @@
         </p:nvSpPr>
         <p:spPr>
           <a:xfrm>
-            <a:off x="6217920" y="1463040"/>
-            <a:ext cx="5212080" cy="2286000"/>
+            <a:off x="4389120" y="1371600"/>
+            <a:ext cx="3383280" cy="4937760"/>
           </a:xfrm>
           <a:prstGeom prst="roundRect">
             <a:avLst/>
@@ -4660,49 +7020,189 @@
           </a:fontRef>
         </p:style>
         <p:txBody>
-          <a:bodyPr rtlCol="0" anchor="ctr" wrap="square" lIns="365760" tIns="274320"/>
+          <a:bodyPr rtlCol="0" anchor="ctr" wrap="square" lIns="274320" tIns="274320"/>
           <a:lstStyle/>
           <a:p>
             <a:pPr algn="ctr">
-              <a:defRPr sz="1400" b="1">
+              <a:spcAft>
+                <a:spcPts val="800"/>
+              </a:spcAft>
+              <a:defRPr sz="1300" b="1">
                 <a:solidFill>
                   <a:srgbClr val="34D399"/>
                 </a:solidFill>
               </a:defRPr>
             </a:pPr>
             <a:r>
-              <a:t>2. PARETO KNAPSACK INVESTMENT OPTIMIZER</a:t>
-            </a:r>
-          </a:p>
-          <a:p>
-            <a:pPr>
-              <a:spcBef>
-                <a:spcPts val="400"/>
-              </a:spcBef>
-              <a:defRPr sz="1100" b="1">
-                <a:solidFill>
-                  <a:srgbClr val="F1F5F9"/>
-                </a:solidFill>
-              </a:defRPr>
-            </a:pPr>
-            <a:r>
-              <a:t>ROSI (%) = [ (Mitigated Risk Loss × Efficacy) - Cost ] / Cost × 100</a:t>
+              <a:t>LAYER 2: COMPUTATIONAL CORE</a:t>
+            </a:r>
+          </a:p>
+          <a:p>
+            <a:pPr>
+              <a:spcAft>
+                <a:spcPts val="600"/>
+              </a:spcAft>
+              <a:defRPr sz="1000" b="1">
+                <a:solidFill>
+                  <a:srgbClr val="F1F5F9"/>
+                </a:solidFill>
+              </a:defRPr>
+            </a:pPr>
+            <a:r>
+              <a:t>FastAPI Async Kernel (Uvicorn)</a:t>
             </a:r>
             <a:br/>
             <a:r>
-              <a:t>Budget Constraint: Σ(Costs) ≤ Institutional Budget (e.g. ₹1 Crore)</a:t>
-            </a:r>
-          </a:p>
-          <a:p>
-            <a:pPr>
-              <a:defRPr sz="1100">
-                <a:solidFill>
-                  <a:srgbClr val="94A3B8"/>
-                </a:solidFill>
-              </a:defRPr>
-            </a:pPr>
-            <a:r>
-              <a:t>Dynamic programming Pareto frontier reveals diminishing returns &amp; optimal spend zones for board-level decisions.</a:t>
+              <a:rPr sz="900">
+                <a:solidFill>
+                  <a:srgbClr val="34D399"/>
+                </a:solidFill>
+              </a:rPr>
+              <a:t>Status: ● IMPLEMENTED</a:t>
+            </a:r>
+          </a:p>
+          <a:p>
+            <a:pPr>
+              <a:spcAft>
+                <a:spcPts val="600"/>
+              </a:spcAft>
+              <a:defRPr sz="1000" b="1">
+                <a:solidFill>
+                  <a:srgbClr val="F1F5F9"/>
+                </a:solidFill>
+              </a:defRPr>
+            </a:pPr>
+            <a:r>
+              <a:t>Attack Surface Port Inspector</a:t>
+            </a:r>
+            <a:br/>
+            <a:r>
+              <a:rPr sz="900">
+                <a:solidFill>
+                  <a:srgbClr val="34D399"/>
+                </a:solidFill>
+              </a:rPr>
+              <a:t>Status: ● IMPLEMENTED</a:t>
+            </a:r>
+          </a:p>
+          <a:p>
+            <a:pPr>
+              <a:spcAft>
+                <a:spcPts val="600"/>
+              </a:spcAft>
+              <a:defRPr sz="1000" b="1">
+                <a:solidFill>
+                  <a:srgbClr val="F1F5F9"/>
+                </a:solidFill>
+              </a:defRPr>
+            </a:pPr>
+            <a:r>
+              <a:t>Sensitive Credential Scanner</a:t>
+            </a:r>
+            <a:br/>
+            <a:r>
+              <a:rPr sz="900">
+                <a:solidFill>
+                  <a:srgbClr val="34D399"/>
+                </a:solidFill>
+              </a:rPr>
+              <a:t>Status: ● IMPLEMENTED</a:t>
+            </a:r>
+          </a:p>
+          <a:p>
+            <a:pPr>
+              <a:spcAft>
+                <a:spcPts val="600"/>
+              </a:spcAft>
+              <a:defRPr sz="1000" b="1">
+                <a:solidFill>
+                  <a:srgbClr val="F1F5F9"/>
+                </a:solidFill>
+              </a:defRPr>
+            </a:pPr>
+            <a:r>
+              <a:t>File Isolation Quarantine Vault</a:t>
+            </a:r>
+            <a:br/>
+            <a:r>
+              <a:rPr sz="900">
+                <a:solidFill>
+                  <a:srgbClr val="34D399"/>
+                </a:solidFill>
+              </a:rPr>
+              <a:t>Status: ● IMPLEMENTED</a:t>
+            </a:r>
+          </a:p>
+          <a:p>
+            <a:pPr>
+              <a:spcAft>
+                <a:spcPts val="600"/>
+              </a:spcAft>
+              <a:defRPr sz="1000" b="1">
+                <a:solidFill>
+                  <a:srgbClr val="F1F5F9"/>
+                </a:solidFill>
+              </a:defRPr>
+            </a:pPr>
+            <a:r>
+              <a:t>Prototype Financial Exposure (EAL)</a:t>
+            </a:r>
+            <a:br/>
+            <a:r>
+              <a:rPr sz="900">
+                <a:solidFill>
+                  <a:srgbClr val="FBBF24"/>
+                </a:solidFill>
+              </a:rPr>
+              <a:t>Status: ◐ PROTOTYPE</a:t>
+            </a:r>
+          </a:p>
+          <a:p>
+            <a:pPr>
+              <a:spcAft>
+                <a:spcPts val="600"/>
+              </a:spcAft>
+              <a:defRPr sz="1000" b="1">
+                <a:solidFill>
+                  <a:srgbClr val="F1F5F9"/>
+                </a:solidFill>
+              </a:defRPr>
+            </a:pPr>
+            <a:r>
+              <a:t>Knapsack Investment Optimizer</a:t>
+            </a:r>
+            <a:br/>
+            <a:r>
+              <a:rPr sz="900">
+                <a:solidFill>
+                  <a:srgbClr val="FBBF24"/>
+                </a:solidFill>
+              </a:rPr>
+              <a:t>Status: ◐ PROTOTYPE</a:t>
+            </a:r>
+          </a:p>
+          <a:p>
+            <a:pPr>
+              <a:spcAft>
+                <a:spcPts val="600"/>
+              </a:spcAft>
+              <a:defRPr sz="1000" b="1">
+                <a:solidFill>
+                  <a:srgbClr val="F1F5F9"/>
+                </a:solidFill>
+              </a:defRPr>
+            </a:pPr>
+            <a:r>
+              <a:t>What-If Scenario Simulation Engine</a:t>
+            </a:r>
+            <a:br/>
+            <a:r>
+              <a:rPr sz="900">
+                <a:solidFill>
+                  <a:srgbClr val="34D399"/>
+                </a:solidFill>
+              </a:rPr>
+              <a:t>Status: ● IMPLEMENTED</a:t>
             </a:r>
           </a:p>
         </p:txBody>
@@ -4715,8 +7215,8 @@
         </p:nvSpPr>
         <p:spPr>
           <a:xfrm>
-            <a:off x="731520" y="4023360"/>
-            <a:ext cx="10698480" cy="2286000"/>
+            <a:off x="8046720" y="1371600"/>
+            <a:ext cx="3383280" cy="4937760"/>
           </a:xfrm>
           <a:prstGeom prst="roundRect">
             <a:avLst/>
@@ -4745,87 +7245,189 @@
           </a:fontRef>
         </p:style>
         <p:txBody>
-          <a:bodyPr rtlCol="0" anchor="ctr" wrap="square" lIns="365760" tIns="274320"/>
+          <a:bodyPr rtlCol="0" anchor="ctr" wrap="square" lIns="274320" tIns="274320"/>
           <a:lstStyle/>
           <a:p>
             <a:pPr algn="ctr">
-              <a:defRPr sz="1400" b="1">
+              <a:spcAft>
+                <a:spcPts val="800"/>
+              </a:spcAft>
+              <a:defRPr sz="1300" b="1">
                 <a:solidFill>
                   <a:srgbClr val="FBBF24"/>
                 </a:solidFill>
               </a:defRPr>
             </a:pPr>
             <a:r>
-              <a:t>3. CRYPTOGRAPHIC IMMUTABILITY &amp; LIGHTWEIGHT CPU EFFICIENCY</a:t>
-            </a:r>
-          </a:p>
-          <a:p>
-            <a:pPr>
-              <a:spcAft>
-                <a:spcPts val="400"/>
-              </a:spcAft>
-              <a:defRPr sz="1100" b="1">
-                <a:solidFill>
-                  <a:srgbClr val="F1F5F9"/>
-                </a:solidFill>
-              </a:defRPr>
-            </a:pPr>
-            <a:r>
-              <a:t>• Merkle Root Verification: </a:t>
-            </a:r>
-            <a:r>
-              <a:rPr b="0">
-                <a:solidFill>
-                  <a:srgbClr val="94A3B8"/>
-                </a:solidFill>
-              </a:rPr>
-              <a:t>Block Hash = SHA256(Block_Index + Prev_Hash + Merkle_Root + Nonce + Timestamp). Modifying 1 byte triggers immediate chain invalidation.</a:t>
-            </a:r>
-          </a:p>
-          <a:p>
-            <a:pPr>
-              <a:spcAft>
-                <a:spcPts val="400"/>
-              </a:spcAft>
-              <a:defRPr sz="1100" b="1">
-                <a:solidFill>
-                  <a:srgbClr val="F1F5F9"/>
-                </a:solidFill>
-              </a:defRPr>
-            </a:pPr>
-            <a:r>
-              <a:t>• Sub-30ms Inference Latency: </a:t>
-            </a:r>
-            <a:r>
-              <a:rPr b="0">
-                <a:solidFill>
-                  <a:srgbClr val="94A3B8"/>
-                </a:solidFill>
-              </a:rPr>
-              <a:t>Runs YOLOv8-Nano &amp; MediaPipe on standard Intel i3/i5 quad-core CPUs (&lt;45% utilization, &lt;350MB RAM).</a:t>
-            </a:r>
-          </a:p>
-          <a:p>
-            <a:pPr>
-              <a:spcAft>
-                <a:spcPts val="400"/>
-              </a:spcAft>
-              <a:defRPr sz="1100" b="1">
-                <a:solidFill>
-                  <a:srgbClr val="F1F5F9"/>
-                </a:solidFill>
-              </a:defRPr>
-            </a:pPr>
-            <a:r>
-              <a:t>• Zero Cloud Recurring Fees: </a:t>
-            </a:r>
-            <a:r>
-              <a:rPr b="0">
-                <a:solidFill>
-                  <a:srgbClr val="94A3B8"/>
-                </a:solidFill>
-              </a:rPr>
-              <a:t>Requires no Azure/AWS GPU clusters; ideal for budget-constrained educational institutions.</a:t>
+              <a:t>LAYER 3: TRUST &amp; INTERACTION</a:t>
+            </a:r>
+          </a:p>
+          <a:p>
+            <a:pPr>
+              <a:spcAft>
+                <a:spcPts val="600"/>
+              </a:spcAft>
+              <a:defRPr sz="1000" b="1">
+                <a:solidFill>
+                  <a:srgbClr val="F1F5F9"/>
+                </a:solidFill>
+              </a:defRPr>
+            </a:pPr>
+            <a:r>
+              <a:t>SHA-256 Merkle Risk Ledger</a:t>
+            </a:r>
+            <a:br/>
+            <a:r>
+              <a:rPr sz="900">
+                <a:solidFill>
+                  <a:srgbClr val="34D399"/>
+                </a:solidFill>
+              </a:rPr>
+              <a:t>Status: ● IMPLEMENTED</a:t>
+            </a:r>
+          </a:p>
+          <a:p>
+            <a:pPr>
+              <a:spcAft>
+                <a:spcPts val="600"/>
+              </a:spcAft>
+              <a:defRPr sz="1000" b="1">
+                <a:solidFill>
+                  <a:srgbClr val="F1F5F9"/>
+                </a:solidFill>
+              </a:defRPr>
+            </a:pPr>
+            <a:r>
+              <a:t>Proof-of-Work Mining Engine</a:t>
+            </a:r>
+            <a:br/>
+            <a:r>
+              <a:rPr sz="900">
+                <a:solidFill>
+                  <a:srgbClr val="34D399"/>
+                </a:solidFill>
+              </a:rPr>
+              <a:t>Status: ● IMPLEMENTED</a:t>
+            </a:r>
+          </a:p>
+          <a:p>
+            <a:pPr>
+              <a:spcAft>
+                <a:spcPts val="600"/>
+              </a:spcAft>
+              <a:defRPr sz="1000" b="1">
+                <a:solidFill>
+                  <a:srgbClr val="F1F5F9"/>
+                </a:solidFill>
+              </a:defRPr>
+            </a:pPr>
+            <a:r>
+              <a:t>Tamper Detection &amp; Verification</a:t>
+            </a:r>
+            <a:br/>
+            <a:r>
+              <a:rPr sz="900">
+                <a:solidFill>
+                  <a:srgbClr val="34D399"/>
+                </a:solidFill>
+              </a:rPr>
+              <a:t>Status: ● IMPLEMENTED</a:t>
+            </a:r>
+          </a:p>
+          <a:p>
+            <a:pPr>
+              <a:spcAft>
+                <a:spcPts val="600"/>
+              </a:spcAft>
+              <a:defRPr sz="1000" b="1">
+                <a:solidFill>
+                  <a:srgbClr val="F1F5F9"/>
+                </a:solidFill>
+              </a:defRPr>
+            </a:pPr>
+            <a:r>
+              <a:t>SQLite 3 WAL Mode Storage Hub</a:t>
+            </a:r>
+            <a:br/>
+            <a:r>
+              <a:rPr sz="900">
+                <a:solidFill>
+                  <a:srgbClr val="34D399"/>
+                </a:solidFill>
+              </a:rPr>
+              <a:t>Status: ● IMPLEMENTED</a:t>
+            </a:r>
+          </a:p>
+          <a:p>
+            <a:pPr>
+              <a:spcAft>
+                <a:spcPts val="600"/>
+              </a:spcAft>
+              <a:defRPr sz="1000" b="1">
+                <a:solidFill>
+                  <a:srgbClr val="F1F5F9"/>
+                </a:solidFill>
+              </a:defRPr>
+            </a:pPr>
+            <a:r>
+              <a:t>YOLOv8 Operator Presence Lock</a:t>
+            </a:r>
+            <a:br/>
+            <a:r>
+              <a:rPr sz="900">
+                <a:solidFill>
+                  <a:srgbClr val="34D399"/>
+                </a:solidFill>
+              </a:rPr>
+              <a:t>Status: ● IMPLEMENTED</a:t>
+            </a:r>
+          </a:p>
+          <a:p>
+            <a:pPr>
+              <a:spcAft>
+                <a:spcPts val="600"/>
+              </a:spcAft>
+              <a:defRPr sz="1000" b="1">
+                <a:solidFill>
+                  <a:srgbClr val="F1F5F9"/>
+                </a:solidFill>
+              </a:defRPr>
+            </a:pPr>
+            <a:r>
+              <a:t>MediaPipe Touchless Gesture Control</a:t>
+            </a:r>
+            <a:br/>
+            <a:r>
+              <a:rPr sz="900">
+                <a:solidFill>
+                  <a:srgbClr val="34D399"/>
+                </a:solidFill>
+              </a:rPr>
+              <a:t>Status: ● IMPLEMENTED</a:t>
+            </a:r>
+          </a:p>
+          <a:p>
+            <a:pPr>
+              <a:spcAft>
+                <a:spcPts val="600"/>
+              </a:spcAft>
+              <a:defRPr sz="1000" b="1">
+                <a:solidFill>
+                  <a:srgbClr val="F1F5F9"/>
+                </a:solidFill>
+              </a:defRPr>
+            </a:pPr>
+            <a:r>
+              <a:t>Value at Risk (Monte Carlo VaR)</a:t>
+            </a:r>
+            <a:br/>
+            <a:r>
+              <a:rPr sz="900">
+                <a:solidFill>
+                  <a:srgbClr val="22D3EE"/>
+                </a:solidFill>
+              </a:rPr>
+              <a:t>Status: ○ FUTURE</a:t>
             </a:r>
           </a:p>
         </p:txBody>
@@ -4899,8 +7501,8 @@
         </p:nvSpPr>
         <p:spPr>
           <a:xfrm>
-            <a:off x="731520" y="365760"/>
-            <a:ext cx="10698480" cy="365760"/>
+            <a:off x="731520" y="320040"/>
+            <a:ext cx="10698480" cy="320040"/>
           </a:xfrm>
           <a:prstGeom prst="rect">
             <a:avLst/>
@@ -4914,14 +7516,14 @@
           <a:lstStyle/>
           <a:p>
             <a:pPr>
-              <a:defRPr sz="1100" b="1">
+              <a:defRPr sz="1000" b="1">
                 <a:solidFill>
                   <a:srgbClr val="22D3EE"/>
                 </a:solidFill>
               </a:defRPr>
             </a:pPr>
             <a:r>
-              <a:t>SMART INDIA HACKATHON 2026 | PS ID: SIH26105</a:t>
+              <a:t>SMART INDIA HACKATHON 2026 | PS ID: SIH26105 | BYTEFORCE_1 (180219)</a:t>
             </a:r>
           </a:p>
         </p:txBody>
@@ -4934,8 +7536,8 @@
         </p:nvSpPr>
         <p:spPr>
           <a:xfrm>
-            <a:off x="731520" y="640080"/>
-            <a:ext cx="10698480" cy="731520"/>
+            <a:off x="731520" y="594360"/>
+            <a:ext cx="10698480" cy="640080"/>
           </a:xfrm>
           <a:prstGeom prst="rect">
             <a:avLst/>
@@ -4949,14 +7551,14 @@
           <a:lstStyle/>
           <a:p>
             <a:pPr>
-              <a:defRPr sz="2400" b="1">
-                <a:solidFill>
-                  <a:srgbClr val="F1F5F9"/>
-                </a:solidFill>
-              </a:defRPr>
-            </a:pPr>
-            <a:r>
-              <a:t>04. Impact, Scalability &amp; Campus Deployment for AICTE</a:t>
+              <a:defRPr sz="2200" b="1">
+                <a:solidFill>
+                  <a:srgbClr val="F1F5F9"/>
+                </a:solidFill>
+              </a:defRPr>
+            </a:pPr>
+            <a:r>
+              <a:t>Slide 05 | Attack Surface Telemetry &amp; Risk Scoring</a:t>
             </a:r>
           </a:p>
         </p:txBody>
@@ -4969,8 +7571,8 @@
         </p:nvSpPr>
         <p:spPr>
           <a:xfrm>
-            <a:off x="731520" y="1463040"/>
-            <a:ext cx="5212080" cy="4846320"/>
+            <a:off x="731520" y="1371600"/>
+            <a:ext cx="5120640" cy="4937760"/>
           </a:xfrm>
           <a:prstGeom prst="roundRect">
             <a:avLst/>
@@ -5004,16 +7606,16 @@
           <a:p>
             <a:pPr algn="ctr">
               <a:spcAft>
-                <a:spcPts val="1200"/>
-              </a:spcAft>
-              <a:defRPr sz="1600" b="1">
+                <a:spcPts val="1000"/>
+              </a:spcAft>
+              <a:defRPr sz="1400" b="1">
                 <a:solidFill>
                   <a:srgbClr val="22D3EE"/>
                 </a:solidFill>
               </a:defRPr>
             </a:pPr>
             <a:r>
-              <a:t>CAMPUS-WIDE SCALE &amp; REAL-WORLD VALUE</a:t>
+              <a:t>HOST TELEMETRY INGESTION (IMPLEMENTED)</a:t>
             </a:r>
           </a:p>
           <a:p>
@@ -5028,11 +7630,7 @@
               </a:defRPr>
             </a:pPr>
             <a:r>
-              <a:t>✔ 10,000+ Colleges Addressed:</a:t>
-            </a:r>
-            <a:br/>
-            <a:r>
-              <a:t>   </a:t>
+              <a:t>• Active Socket Inspection: </a:t>
             </a:r>
             <a:r>
               <a:rPr b="0">
@@ -5040,7 +7638,7 @@
                   <a:srgbClr val="94A3B8"/>
                 </a:solidFill>
               </a:rPr>
-              <a:t>AICTE technical colleges face an average of 5,100+ cyber attack attempts per week in India.</a:t>
+              <a:t>Queries network socket table via psutil, isolating listening ports and tracking bound IP interfaces.</a:t>
             </a:r>
           </a:p>
           <a:p>
@@ -5055,11 +7653,7 @@
               </a:defRPr>
             </a:pPr>
             <a:r>
-              <a:t>✔ Replaces Costly Foreign Suites:</a:t>
-            </a:r>
-            <a:br/>
-            <a:r>
-              <a:t>   </a:t>
+              <a:t>• Port Threat Categorization: </a:t>
             </a:r>
             <a:r>
               <a:rPr b="0">
@@ -5067,7 +7661,7 @@
                   <a:srgbClr val="94A3B8"/>
                 </a:solidFill>
               </a:rPr>
-              <a:t>Traditional enterprise SIEM/GRC suites cost ₹30L - ₹60L/year per college. AURA provides a local-first alternative with zero license fees.</a:t>
+              <a:t>Heuristically maps sensitive ports (e.g. 22 SSH, 3389 RDP, 445 SMB) vs standard application ports.</a:t>
             </a:r>
           </a:p>
           <a:p>
@@ -5082,11 +7676,7 @@
               </a:defRPr>
             </a:pPr>
             <a:r>
-              <a:t>✔ Empowers Non-Technical Leadership:</a:t>
-            </a:r>
-            <a:br/>
-            <a:r>
-              <a:t>   </a:t>
+              <a:t>• Resource Stress Telemetry: </a:t>
             </a:r>
             <a:r>
               <a:rPr b="0">
@@ -5094,7 +7684,7 @@
                   <a:srgbClr val="94A3B8"/>
                 </a:solidFill>
               </a:rPr>
-              <a:t>Principals &amp; Registrars can see exact rupee liabilities and authorize cybersecurity budget with confidence.</a:t>
+              <a:t>Monitors CPU percent, virtual memory usage, and disk saturation as stability and availability factors.</a:t>
             </a:r>
           </a:p>
           <a:p>
@@ -5109,11 +7699,7 @@
               </a:defRPr>
             </a:pPr>
             <a:r>
-              <a:t>✔ Air-Gapped Lab Security:</a:t>
-            </a:r>
-            <a:br/>
-            <a:r>
-              <a:t>   </a:t>
+              <a:t>• Active Port Remediation: </a:t>
             </a:r>
             <a:r>
               <a:rPr b="0">
@@ -5121,7 +7707,7 @@
                   <a:srgbClr val="94A3B8"/>
                 </a:solidFill>
               </a:rPr>
-              <a:t>Operates completely offline without internet telemetry leakage, safeguarding sensitive university research data.</a:t>
+              <a:t>Includes prototype capability to terminate rogue listening processes or suppress non-critical noise.</a:t>
             </a:r>
           </a:p>
         </p:txBody>
@@ -5134,8 +7720,8 @@
         </p:nvSpPr>
         <p:spPr>
           <a:xfrm>
-            <a:off x="6217920" y="1463040"/>
-            <a:ext cx="5212080" cy="4846320"/>
+            <a:off x="6217920" y="1371600"/>
+            <a:ext cx="5212080" cy="4937760"/>
           </a:xfrm>
           <a:prstGeom prst="roundRect">
             <a:avLst/>
@@ -5169,16 +7755,16 @@
           <a:p>
             <a:pPr algn="ctr">
               <a:spcAft>
-                <a:spcPts val="1200"/>
-              </a:spcAft>
-              <a:defRPr sz="1600" b="1">
+                <a:spcPts val="1000"/>
+              </a:spcAft>
+              <a:defRPr sz="1400" b="1">
                 <a:solidFill>
                   <a:srgbClr val="34D399"/>
                 </a:solidFill>
               </a:defRPr>
             </a:pPr>
             <a:r>
-              <a:t>DECENTRALIZED CONSENSUS ARCHITECTURE</a:t>
+              <a:t>WEIGHTED RISK SCORING MODEL</a:t>
             </a:r>
           </a:p>
           <a:p>
@@ -5186,18 +7772,29 @@
               <a:spcAft>
                 <a:spcPts val="800"/>
               </a:spcAft>
-              <a:defRPr sz="1100" b="1">
-                <a:solidFill>
-                  <a:srgbClr val="F1F5F9"/>
-                </a:solidFill>
-              </a:defRPr>
-            </a:pPr>
-            <a:r>
-              <a:t>⛓ Node 01: AICTE HQ Sentinel (Master)</a:t>
-            </a:r>
-            <a:br/>
-            <a:r>
-              <a:t>   </a:t>
+              <a:defRPr sz="1200" b="1">
+                <a:solidFill>
+                  <a:srgbClr val="F1F5F9"/>
+                </a:solidFill>
+              </a:defRPr>
+            </a:pPr>
+            <a:r>
+              <a:t>Technical Risk Score = f(Open Ports, CPU, RAM, Disk)</a:t>
+            </a:r>
+          </a:p>
+          <a:p>
+            <a:pPr>
+              <a:spcAft>
+                <a:spcPts val="600"/>
+              </a:spcAft>
+              <a:defRPr sz="1000" b="1">
+                <a:solidFill>
+                  <a:srgbClr val="F1F5F9"/>
+                </a:solidFill>
+              </a:defRPr>
+            </a:pPr>
+            <a:r>
+              <a:t>✔ Port Exposure Factor: </a:t>
             </a:r>
             <a:r>
               <a:rPr b="0">
@@ -5205,26 +7802,22 @@
                   <a:srgbClr val="94A3B8"/>
                 </a:solidFill>
               </a:rPr>
-              <a:t>Maintains national risk ledger, sets security benchmark baselines, and distributes global threat advisories.</a:t>
-            </a:r>
-          </a:p>
-          <a:p>
-            <a:pPr>
-              <a:spcAft>
-                <a:spcPts val="800"/>
-              </a:spcAft>
-              <a:defRPr sz="1100" b="1">
-                <a:solidFill>
-                  <a:srgbClr val="F1F5F9"/>
-                </a:solidFill>
-              </a:defRPr>
-            </a:pPr>
-            <a:r>
-              <a:t>⛓ Node 02: IIT Delhi Regional Validator</a:t>
-            </a:r>
-            <a:br/>
-            <a:r>
-              <a:t>   </a:t>
+              <a:t>Up to 30 points based on listening socket count (&gt;15 ports = +30, &gt;8 ports = +20, &gt;3 ports = +10).</a:t>
+            </a:r>
+          </a:p>
+          <a:p>
+            <a:pPr>
+              <a:spcAft>
+                <a:spcPts val="600"/>
+              </a:spcAft>
+              <a:defRPr sz="1000" b="1">
+                <a:solidFill>
+                  <a:srgbClr val="F1F5F9"/>
+                </a:solidFill>
+              </a:defRPr>
+            </a:pPr>
+            <a:r>
+              <a:t>✔ Compute Stress Factor: </a:t>
             </a:r>
             <a:r>
               <a:rPr b="0">
@@ -5232,26 +7825,22 @@
                   <a:srgbClr val="94A3B8"/>
                 </a:solidFill>
               </a:rPr>
-              <a:t>Validates consensus blocks, performs independent Merkle verification, and executes AI audit models.</a:t>
-            </a:r>
-          </a:p>
-          <a:p>
-            <a:pPr>
-              <a:spcAft>
-                <a:spcPts val="800"/>
-              </a:spcAft>
-              <a:defRPr sz="1100" b="1">
-                <a:solidFill>
-                  <a:srgbClr val="F1F5F9"/>
-                </a:solidFill>
-              </a:defRPr>
-            </a:pPr>
-            <a:r>
-              <a:t>⛓ Node 03: NIT Surathkal Regional Auditor</a:t>
-            </a:r>
-            <a:br/>
-            <a:r>
-              <a:t>   </a:t>
+              <a:t>Up to 25 points for sustained CPU utilization (&gt;90% = +25, &gt;75% = +15).</a:t>
+            </a:r>
+          </a:p>
+          <a:p>
+            <a:pPr>
+              <a:spcAft>
+                <a:spcPts val="600"/>
+              </a:spcAft>
+              <a:defRPr sz="1000" b="1">
+                <a:solidFill>
+                  <a:srgbClr val="F1F5F9"/>
+                </a:solidFill>
+              </a:defRPr>
+            </a:pPr>
+            <a:r>
+              <a:t>✔ Memory Exhaustion Factor: </a:t>
             </a:r>
             <a:r>
               <a:rPr b="0">
@@ -5259,26 +7848,22 @@
                   <a:srgbClr val="94A3B8"/>
                 </a:solidFill>
               </a:rPr>
-              <a:t>Maintains independent distributed ledger mirror, ensuring zero single point of failure across Indian campuses.</a:t>
-            </a:r>
-          </a:p>
-          <a:p>
-            <a:pPr>
-              <a:spcAft>
-                <a:spcPts val="800"/>
-              </a:spcAft>
-              <a:defRPr sz="1100" b="1">
-                <a:solidFill>
-                  <a:srgbClr val="F1F5F9"/>
-                </a:solidFill>
-              </a:defRPr>
-            </a:pPr>
-            <a:r>
-              <a:t>⛓ Instant Cross-Campus Threat Sharing:</a:t>
-            </a:r>
-            <a:br/>
-            <a:r>
-              <a:t>   </a:t>
+              <a:t>Up to 25 points for virtual memory saturation (&gt;90% = +25, &gt;80% = +15).</a:t>
+            </a:r>
+          </a:p>
+          <a:p>
+            <a:pPr>
+              <a:spcAft>
+                <a:spcPts val="600"/>
+              </a:spcAft>
+              <a:defRPr sz="1000" b="1">
+                <a:solidFill>
+                  <a:srgbClr val="F1F5F9"/>
+                </a:solidFill>
+              </a:defRPr>
+            </a:pPr>
+            <a:r>
+              <a:t>✔ Storage Saturation Factor: </a:t>
             </a:r>
             <a:r>
               <a:rPr b="0">
@@ -5286,7 +7871,30 @@
                   <a:srgbClr val="94A3B8"/>
                 </a:solidFill>
               </a:rPr>
-              <a:t>An attack detected at one university is hashed and committed to blockchain in &lt;5ms, immediately immunizing all peer campuses.</a:t>
+              <a:t>Up to 20 points for critical disk capacity (&gt;95% = +20, &gt;85% = +12).</a:t>
+            </a:r>
+          </a:p>
+          <a:p>
+            <a:pPr>
+              <a:spcAft>
+                <a:spcPts val="600"/>
+              </a:spcAft>
+              <a:defRPr sz="1000" b="1">
+                <a:solidFill>
+                  <a:srgbClr val="F1F5F9"/>
+                </a:solidFill>
+              </a:defRPr>
+            </a:pPr>
+            <a:r>
+              <a:t>✔ Threshold Normalization: </a:t>
+            </a:r>
+            <a:r>
+              <a:rPr b="0">
+                <a:solidFill>
+                  <a:srgbClr val="94A3B8"/>
+                </a:solidFill>
+              </a:rPr>
+              <a:t>Clamped to 0–100 scale, categorizing system state into LOW, MODERATE, or HIGH risk.</a:t>
             </a:r>
           </a:p>
         </p:txBody>
@@ -5360,8 +7968,8 @@
         </p:nvSpPr>
         <p:spPr>
           <a:xfrm>
-            <a:off x="731520" y="365760"/>
-            <a:ext cx="10698480" cy="365760"/>
+            <a:off x="731520" y="320040"/>
+            <a:ext cx="10698480" cy="320040"/>
           </a:xfrm>
           <a:prstGeom prst="rect">
             <a:avLst/>
@@ -5375,14 +7983,14 @@
           <a:lstStyle/>
           <a:p>
             <a:pPr>
-              <a:defRPr sz="1100" b="1">
+              <a:defRPr sz="1000" b="1">
                 <a:solidFill>
                   <a:srgbClr val="22D3EE"/>
                 </a:solidFill>
               </a:defRPr>
             </a:pPr>
             <a:r>
-              <a:t>SMART INDIA HACKATHON 2026 | PS ID: SIH26105</a:t>
+              <a:t>SMART INDIA HACKATHON 2026 | PS ID: SIH26105 | BYTEFORCE_1 (180219)</a:t>
             </a:r>
           </a:p>
         </p:txBody>
@@ -5395,8 +8003,8 @@
         </p:nvSpPr>
         <p:spPr>
           <a:xfrm>
-            <a:off x="731520" y="640080"/>
-            <a:ext cx="10698480" cy="731520"/>
+            <a:off x="731520" y="594360"/>
+            <a:ext cx="10698480" cy="640080"/>
           </a:xfrm>
           <a:prstGeom prst="rect">
             <a:avLst/>
@@ -5410,14 +8018,14 @@
           <a:lstStyle/>
           <a:p>
             <a:pPr>
-              <a:defRPr sz="2400" b="1">
-                <a:solidFill>
-                  <a:srgbClr val="F1F5F9"/>
-                </a:solidFill>
-              </a:defRPr>
-            </a:pPr>
-            <a:r>
-              <a:t>05. Regulatory Standards &amp; Live Demonstration Playbook</a:t>
+              <a:defRPr sz="2200" b="1">
+                <a:solidFill>
+                  <a:srgbClr val="F1F5F9"/>
+                </a:solidFill>
+              </a:defRPr>
+            </a:pPr>
+            <a:r>
+              <a:t>Slide 06 | Prototype Financial Risk &amp; Exposure Modeling (FAIR Grounded)</a:t>
             </a:r>
           </a:p>
         </p:txBody>
@@ -5430,8 +8038,8 @@
         </p:nvSpPr>
         <p:spPr>
           <a:xfrm>
-            <a:off x="731520" y="1463040"/>
-            <a:ext cx="5212080" cy="4846320"/>
+            <a:off x="731520" y="1371600"/>
+            <a:ext cx="5120640" cy="4937760"/>
           </a:xfrm>
           <a:prstGeom prst="roundRect">
             <a:avLst/>
@@ -5465,35 +8073,31 @@
           <a:p>
             <a:pPr algn="ctr">
               <a:spcAft>
-                <a:spcPts val="1200"/>
-              </a:spcAft>
-              <a:defRPr sz="1600" b="1">
+                <a:spcPts val="1000"/>
+              </a:spcAft>
+              <a:defRPr sz="1400" b="1">
                 <a:solidFill>
                   <a:srgbClr val="FBBF24"/>
                 </a:solidFill>
               </a:defRPr>
             </a:pPr>
             <a:r>
-              <a:t>MANDATORY COMPLIANCE ALIGNMENT</a:t>
-            </a:r>
-          </a:p>
-          <a:p>
-            <a:pPr>
-              <a:spcAft>
-                <a:spcPts val="800"/>
-              </a:spcAft>
-              <a:defRPr sz="1100" b="1">
-                <a:solidFill>
-                  <a:srgbClr val="F1F5F9"/>
-                </a:solidFill>
-              </a:defRPr>
-            </a:pPr>
-            <a:r>
-              <a:t>📜 RBI &amp; SEBI Cyber Resilience Frameworks:</a:t>
-            </a:r>
-            <a:br/>
-            <a:r>
-              <a:t>   </a:t>
+              <a:t>PROTOTYPE FORMULATION IN ₹ INR</a:t>
+            </a:r>
+          </a:p>
+          <a:p>
+            <a:pPr>
+              <a:spcAft>
+                <a:spcPts val="600"/>
+              </a:spcAft>
+              <a:defRPr sz="1000" b="1">
+                <a:solidFill>
+                  <a:srgbClr val="F1F5F9"/>
+                </a:solidFill>
+              </a:defRPr>
+            </a:pPr>
+            <a:r>
+              <a:t>• Base Operational Loss Rate: </a:t>
             </a:r>
             <a:r>
               <a:rPr b="0">
@@ -5501,26 +8105,22 @@
                   <a:srgbClr val="94A3B8"/>
                 </a:solidFill>
               </a:rPr>
-              <a:t>Native regulatory control mapping, risk threshold alerting, and board-level risk posture reporting.</a:t>
-            </a:r>
-          </a:p>
-          <a:p>
-            <a:pPr>
-              <a:spcAft>
-                <a:spcPts val="800"/>
-              </a:spcAft>
-              <a:defRPr sz="1100" b="1">
-                <a:solidFill>
-                  <a:srgbClr val="F1F5F9"/>
-                </a:solidFill>
-              </a:defRPr>
-            </a:pPr>
-            <a:r>
-              <a:t>📜 ISO/IEC 27001 &amp; NIST CSF 2.0 &amp; CIS Controls:</a:t>
-            </a:r>
-            <a:br/>
-            <a:r>
-              <a:t>   </a:t>
+              <a:t>Calibrated at ₹15,000/hr as an illustrative enterprise baseline rate.</a:t>
+            </a:r>
+          </a:p>
+          <a:p>
+            <a:pPr>
+              <a:spcAft>
+                <a:spcPts val="600"/>
+              </a:spcAft>
+              <a:defRPr sz="1000" b="1">
+                <a:solidFill>
+                  <a:srgbClr val="F1F5F9"/>
+                </a:solidFill>
+              </a:defRPr>
+            </a:pPr>
+            <a:r>
+              <a:t>• Risk-Adjusted Hourly Loss: </a:t>
             </a:r>
             <a:r>
               <a:rPr b="0">
@@ -5528,26 +8128,22 @@
                   <a:srgbClr val="94A3B8"/>
                 </a:solidFill>
               </a:rPr>
-              <a:t>Automated evidence aggregation across Identify, Protect, Detect, Respond, Recover functions.</a:t>
-            </a:r>
-          </a:p>
-          <a:p>
-            <a:pPr>
-              <a:spcAft>
-                <a:spcPts val="800"/>
-              </a:spcAft>
-              <a:defRPr sz="1100" b="1">
-                <a:solidFill>
-                  <a:srgbClr val="F1F5F9"/>
-                </a:solidFill>
-              </a:defRPr>
-            </a:pPr>
-            <a:r>
-              <a:t>📜 CERT-In Directions (April 2022) &amp; DPDP Act 2023:</a:t>
-            </a:r>
-            <a:br/>
-            <a:r>
-              <a:t>   </a:t>
+              <a:t>Hourly Loss = ₹15,000 × (1.0 + Technical_Risk_Score / 100).</a:t>
+            </a:r>
+          </a:p>
+          <a:p>
+            <a:pPr>
+              <a:spcAft>
+                <a:spcPts val="600"/>
+              </a:spcAft>
+              <a:defRPr sz="1000" b="1">
+                <a:solidFill>
+                  <a:srgbClr val="F1F5F9"/>
+                </a:solidFill>
+              </a:defRPr>
+            </a:pPr>
+            <a:r>
+              <a:t>• Estimated Downtime Duration: </a:t>
             </a:r>
             <a:r>
               <a:rPr b="0">
@@ -5555,26 +8151,22 @@
                   <a:srgbClr val="94A3B8"/>
                 </a:solidFill>
               </a:rPr>
-              <a:t>Mandatory 180-day unalterable incident log retention via SHA-256 Merkle blockchain + Indian PII protection.</a:t>
-            </a:r>
-          </a:p>
-          <a:p>
-            <a:pPr>
-              <a:spcAft>
-                <a:spcPts val="800"/>
-              </a:spcAft>
-              <a:defRPr sz="1100" b="1">
-                <a:solidFill>
-                  <a:srgbClr val="F1F5F9"/>
-                </a:solidFill>
-              </a:defRPr>
-            </a:pPr>
-            <a:r>
-              <a:t>📜 MITRE ATT&amp;CK Matrix v15 &amp; What-If Simulations:</a:t>
-            </a:r>
-            <a:br/>
-            <a:r>
-              <a:t>   </a:t>
+              <a:t>Dynamic mapping based on severity: HIGH = 8 hrs, MODERATE = 4 hrs, LOW = 1 hr.</a:t>
+            </a:r>
+          </a:p>
+          <a:p>
+            <a:pPr>
+              <a:spcAft>
+                <a:spcPts val="600"/>
+              </a:spcAft>
+              <a:defRPr sz="1000" b="1">
+                <a:solidFill>
+                  <a:srgbClr val="F1F5F9"/>
+                </a:solidFill>
+              </a:defRPr>
+            </a:pPr>
+            <a:r>
+              <a:t>• Incident Direct Cost: </a:t>
             </a:r>
             <a:r>
               <a:rPr b="0">
@@ -5582,7 +8174,53 @@
                   <a:srgbClr val="94A3B8"/>
                 </a:solidFill>
               </a:rPr>
-              <a:t>Real-time threat actor TTP mappings &amp; scenario modeling (e.g. MFA deployment vs 30-day patch delay).</a:t>
+              <a:t>Direct Cost = Risk-Adjusted Hourly Loss × Downtime Hours.</a:t>
+            </a:r>
+          </a:p>
+          <a:p>
+            <a:pPr>
+              <a:spcAft>
+                <a:spcPts val="600"/>
+              </a:spcAft>
+              <a:defRPr sz="1000" b="1">
+                <a:solidFill>
+                  <a:srgbClr val="F1F5F9"/>
+                </a:solidFill>
+              </a:defRPr>
+            </a:pPr>
+            <a:r>
+              <a:t>• Recovery Overhead: </a:t>
+            </a:r>
+            <a:r>
+              <a:rPr b="0">
+                <a:solidFill>
+                  <a:srgbClr val="94A3B8"/>
+                </a:solidFill>
+              </a:rPr>
+              <a:t>Recovery Cost = Direct Cost × 0.35 (forensics &amp; incident cleanup).</a:t>
+            </a:r>
+          </a:p>
+          <a:p>
+            <a:pPr>
+              <a:spcAft>
+                <a:spcPts val="600"/>
+              </a:spcAft>
+              <a:defRPr sz="1000" b="1">
+                <a:solidFill>
+                  <a:srgbClr val="F1F5F9"/>
+                </a:solidFill>
+              </a:defRPr>
+            </a:pPr>
+            <a:r>
+              <a:t>• Total Estimated Exposure: </a:t>
+            </a:r>
+            <a:r>
+              <a:rPr b="0">
+                <a:solidFill>
+                  <a:srgbClr val="94A3B8"/>
+                </a:solidFill>
+              </a:rPr>
+              <a:t>Total = Direct Incident Cost + Recovery Overhead + Asset Impact Factor.</a:t>
             </a:r>
           </a:p>
         </p:txBody>
@@ -5595,8 +8233,8 @@
         </p:nvSpPr>
         <p:spPr>
           <a:xfrm>
-            <a:off x="6217920" y="1463040"/>
-            <a:ext cx="5212080" cy="4846320"/>
+            <a:off x="6217920" y="1371600"/>
+            <a:ext cx="5212080" cy="4937760"/>
           </a:xfrm>
           <a:prstGeom prst="roundRect">
             <a:avLst/>
@@ -5630,16 +8268,16 @@
           <a:p>
             <a:pPr algn="ctr">
               <a:spcAft>
-                <a:spcPts val="1200"/>
-              </a:spcAft>
-              <a:defRPr sz="1600" b="1">
+                <a:spcPts val="1000"/>
+              </a:spcAft>
+              <a:defRPr sz="1400" b="1">
                 <a:solidFill>
                   <a:srgbClr val="22D3EE"/>
                 </a:solidFill>
               </a:defRPr>
             </a:pPr>
             <a:r>
-              <a:t>5-MINUTE LIVE DEMO SEQUENCE</a:t>
+              <a:t>FAIR ALIGNMENT &amp; FUTURE MODELING</a:t>
             </a:r>
           </a:p>
           <a:p>
@@ -5647,6 +8285,290 @@
               <a:spcAft>
                 <a:spcPts val="600"/>
               </a:spcAft>
+              <a:defRPr sz="1000" b="1">
+                <a:solidFill>
+                  <a:srgbClr val="F1F5F9"/>
+                </a:solidFill>
+              </a:defRPr>
+            </a:pPr>
+            <a:r>
+              <a:t>✔ Factor Analysis of Information Risk (FAIR):</a:t>
+            </a:r>
+            <a:br/>
+            <a:r>
+              <a:rPr b="0">
+                <a:solidFill>
+                  <a:srgbClr val="94A3B8"/>
+                </a:solidFill>
+              </a:rPr>
+              <a:t>The Open FAIR framework standardizes decomposing risk into Threat Event Frequency (TEF) and Loss Magnitude (LM).</a:t>
+            </a:r>
+          </a:p>
+          <a:p>
+            <a:pPr>
+              <a:spcAft>
+                <a:spcPts val="600"/>
+              </a:spcAft>
+              <a:defRPr sz="1000" b="1">
+                <a:solidFill>
+                  <a:srgbClr val="F1F5F9"/>
+                </a:solidFill>
+              </a:defRPr>
+            </a:pPr>
+            <a:r>
+              <a:t>✔ Prototype Implementation Status:</a:t>
+            </a:r>
+            <a:br/>
+            <a:r>
+              <a:rPr b="0">
+                <a:solidFill>
+                  <a:srgbClr val="94A3B8"/>
+                </a:solidFill>
+              </a:rPr>
+              <a:t>◐ PROTOTYPE — Uses deterministic actuarial equations based on live host signals and user-supplied asset valuations.</a:t>
+            </a:r>
+          </a:p>
+          <a:p>
+            <a:pPr>
+              <a:spcAft>
+                <a:spcPts val="600"/>
+              </a:spcAft>
+              <a:defRPr sz="1000" b="1">
+                <a:solidFill>
+                  <a:srgbClr val="F1F5F9"/>
+                </a:solidFill>
+              </a:defRPr>
+            </a:pPr>
+            <a:r>
+              <a:t>✔ Value at Risk (VaR) Distinction:</a:t>
+            </a:r>
+            <a:br/>
+            <a:r>
+              <a:rPr b="0">
+                <a:solidFill>
+                  <a:srgbClr val="94A3B8"/>
+                </a:solidFill>
+              </a:rPr>
+              <a:t>○ FUTURE ENHANCEMENT — Monte Carlo probabilistic VaR distribution (e.g. 95% annual confidence) is scoped for future cloud telemetry integration.</a:t>
+            </a:r>
+          </a:p>
+          <a:p>
+            <a:pPr>
+              <a:spcAft>
+                <a:spcPts val="600"/>
+              </a:spcAft>
+              <a:defRPr sz="1000" b="1">
+                <a:solidFill>
+                  <a:srgbClr val="F1F5F9"/>
+                </a:solidFill>
+              </a:defRPr>
+            </a:pPr>
+            <a:r>
+              <a:t>✔ Defensible Evaluator Positioning:</a:t>
+            </a:r>
+            <a:br/>
+            <a:r>
+              <a:rPr b="0">
+                <a:solidFill>
+                  <a:srgbClr val="94A3B8"/>
+                </a:solidFill>
+              </a:rPr>
+              <a:t>Figures represent illustrative calculated risk exposure under current host conditions, not guaranteed financial forecasts.</a:t>
+            </a:r>
+          </a:p>
+        </p:txBody>
+      </p:sp>
+    </p:spTree>
+  </p:cSld>
+  <p:clrMapOvr>
+    <a:masterClrMapping/>
+  </p:clrMapOvr>
+</p:sld>
+</file>
+
+<file path=ppt/slides/slide7.xml><?xml version="1.0" encoding="utf-8"?>
+<p:sld xmlns:a="http://schemas.openxmlformats.org/drawingml/2006/main" xmlns:p="http://schemas.openxmlformats.org/presentationml/2006/main" xmlns:r="http://schemas.openxmlformats.org/officeDocument/2006/relationships">
+  <p:cSld>
+    <p:spTree>
+      <p:nvGrpSpPr>
+        <p:cNvPr id="1" name=""/>
+        <p:cNvGrpSpPr/>
+        <p:nvPr/>
+      </p:nvGrpSpPr>
+      <p:grpSpPr/>
+      <p:sp>
+        <p:nvSpPr>
+          <p:cNvPr id="2" name="Rectangle 1"/>
+          <p:cNvSpPr/>
+          <p:nvPr/>
+        </p:nvSpPr>
+        <p:spPr>
+          <a:xfrm>
+            <a:off x="0" y="0"/>
+            <a:ext cx="12191695" cy="6858000"/>
+          </a:xfrm>
+          <a:prstGeom prst="rect">
+            <a:avLst/>
+          </a:prstGeom>
+          <a:solidFill>
+            <a:srgbClr val="0B0F19"/>
+          </a:solidFill>
+          <a:ln>
+            <a:noFill/>
+          </a:ln>
+        </p:spPr>
+        <p:style>
+          <a:lnRef idx="1">
+            <a:schemeClr val="accent1"/>
+          </a:lnRef>
+          <a:fillRef idx="3">
+            <a:schemeClr val="accent1"/>
+          </a:fillRef>
+          <a:effectRef idx="2">
+            <a:schemeClr val="accent1"/>
+          </a:effectRef>
+          <a:fontRef idx="minor">
+            <a:schemeClr val="lt1"/>
+          </a:fontRef>
+        </p:style>
+        <p:txBody>
+          <a:bodyPr rtlCol="0" anchor="ctr"/>
+          <a:lstStyle/>
+          <a:p>
+            <a:pPr algn="ctr"/>
+          </a:p>
+        </p:txBody>
+      </p:sp>
+      <p:sp>
+        <p:nvSpPr>
+          <p:cNvPr id="3" name="TextBox 2"/>
+          <p:cNvSpPr txBox="1"/>
+          <p:nvPr/>
+        </p:nvSpPr>
+        <p:spPr>
+          <a:xfrm>
+            <a:off x="731520" y="320040"/>
+            <a:ext cx="10698480" cy="320040"/>
+          </a:xfrm>
+          <a:prstGeom prst="rect">
+            <a:avLst/>
+          </a:prstGeom>
+          <a:noFill/>
+        </p:spPr>
+        <p:txBody>
+          <a:bodyPr wrap="square">
+            <a:spAutoFit/>
+          </a:bodyPr>
+          <a:lstStyle/>
+          <a:p>
+            <a:pPr>
+              <a:defRPr sz="1000" b="1">
+                <a:solidFill>
+                  <a:srgbClr val="22D3EE"/>
+                </a:solidFill>
+              </a:defRPr>
+            </a:pPr>
+            <a:r>
+              <a:t>SMART INDIA HACKATHON 2026 | PS ID: SIH26105 | BYTEFORCE_1 (180219)</a:t>
+            </a:r>
+          </a:p>
+        </p:txBody>
+      </p:sp>
+      <p:sp>
+        <p:nvSpPr>
+          <p:cNvPr id="4" name="TextBox 3"/>
+          <p:cNvSpPr txBox="1"/>
+          <p:nvPr/>
+        </p:nvSpPr>
+        <p:spPr>
+          <a:xfrm>
+            <a:off x="731520" y="594360"/>
+            <a:ext cx="10698480" cy="640080"/>
+          </a:xfrm>
+          <a:prstGeom prst="rect">
+            <a:avLst/>
+          </a:prstGeom>
+          <a:noFill/>
+        </p:spPr>
+        <p:txBody>
+          <a:bodyPr wrap="square">
+            <a:spAutoFit/>
+          </a:bodyPr>
+          <a:lstStyle/>
+          <a:p>
+            <a:pPr>
+              <a:defRPr sz="2200" b="1">
+                <a:solidFill>
+                  <a:srgbClr val="F1F5F9"/>
+                </a:solidFill>
+              </a:defRPr>
+            </a:pPr>
+            <a:r>
+              <a:t>Slide 07 | Decision Support: What-If Scenario Simulation Engine</a:t>
+            </a:r>
+          </a:p>
+        </p:txBody>
+      </p:sp>
+      <p:sp>
+        <p:nvSpPr>
+          <p:cNvPr id="5" name="Rounded Rectangle 4"/>
+          <p:cNvSpPr/>
+          <p:nvPr/>
+        </p:nvSpPr>
+        <p:spPr>
+          <a:xfrm>
+            <a:off x="731520" y="1371600"/>
+            <a:ext cx="5120640" cy="4937760"/>
+          </a:xfrm>
+          <a:prstGeom prst="roundRect">
+            <a:avLst/>
+          </a:prstGeom>
+          <a:solidFill>
+            <a:srgbClr val="131B2C"/>
+          </a:solidFill>
+          <a:ln>
+            <a:solidFill>
+              <a:srgbClr val="34D399"/>
+            </a:solidFill>
+          </a:ln>
+        </p:spPr>
+        <p:style>
+          <a:lnRef idx="1">
+            <a:schemeClr val="accent1"/>
+          </a:lnRef>
+          <a:fillRef idx="3">
+            <a:schemeClr val="accent1"/>
+          </a:fillRef>
+          <a:effectRef idx="2">
+            <a:schemeClr val="accent1"/>
+          </a:effectRef>
+          <a:fontRef idx="minor">
+            <a:schemeClr val="lt1"/>
+          </a:fontRef>
+        </p:style>
+        <p:txBody>
+          <a:bodyPr rtlCol="0" anchor="ctr" wrap="square" lIns="365760" tIns="365760"/>
+          <a:lstStyle/>
+          <a:p>
+            <a:pPr algn="ctr">
+              <a:spcAft>
+                <a:spcPts val="1000"/>
+              </a:spcAft>
+              <a:defRPr sz="1400" b="1">
+                <a:solidFill>
+                  <a:srgbClr val="34D399"/>
+                </a:solidFill>
+              </a:defRPr>
+            </a:pPr>
+            <a:r>
+              <a:t>HYPOTHETICAL TUNING (IMPLEMENTED)</a:t>
+            </a:r>
+          </a:p>
+          <a:p>
+            <a:pPr>
+              <a:spcAft>
+                <a:spcPts val="800"/>
+              </a:spcAft>
               <a:defRPr sz="1100" b="1">
                 <a:solidFill>
                   <a:srgbClr val="F1F5F9"/>
@@ -5654,19 +8576,445 @@
               </a:defRPr>
             </a:pPr>
             <a:r>
-              <a:t>⏱ Step 1 (0:00 - 1:00): Rupee Risk Quantification</a:t>
+              <a:t>• Interactive Parameter Sliders: </a:t>
+            </a:r>
+            <a:r>
+              <a:rPr b="0">
+                <a:solidFill>
+                  <a:srgbClr val="94A3B8"/>
+                </a:solidFill>
+              </a:rPr>
+              <a:t>Allows security operators to model varying CPU, memory, disk, and exposed port counts.</a:t>
+            </a:r>
+          </a:p>
+          <a:p>
+            <a:pPr>
+              <a:spcAft>
+                <a:spcPts val="800"/>
+              </a:spcAft>
+              <a:defRPr sz="1100" b="1">
+                <a:solidFill>
+                  <a:srgbClr val="F1F5F9"/>
+                </a:solidFill>
+              </a:defRPr>
+            </a:pPr>
+            <a:r>
+              <a:t>• Live Exposure Re-calculation: </a:t>
+            </a:r>
+            <a:r>
+              <a:rPr b="0">
+                <a:solidFill>
+                  <a:srgbClr val="94A3B8"/>
+                </a:solidFill>
+              </a:rPr>
+              <a:t>Instantly computes simulated risk score and projected monetary exposure as parameters shift.</a:t>
+            </a:r>
+          </a:p>
+          <a:p>
+            <a:pPr>
+              <a:spcAft>
+                <a:spcPts val="800"/>
+              </a:spcAft>
+              <a:defRPr sz="1100" b="1">
+                <a:solidFill>
+                  <a:srgbClr val="F1F5F9"/>
+                </a:solidFill>
+              </a:defRPr>
+            </a:pPr>
+            <a:r>
+              <a:t>• Remediation Impact Assessment: </a:t>
+            </a:r>
+            <a:r>
+              <a:rPr b="0">
+                <a:solidFill>
+                  <a:srgbClr val="94A3B8"/>
+                </a:solidFill>
+              </a:rPr>
+              <a:t>Demonstrates how reducing exposed ports from 18 to 2 reduces simulated business exposure.</a:t>
+            </a:r>
+          </a:p>
+          <a:p>
+            <a:pPr>
+              <a:spcAft>
+                <a:spcPts val="800"/>
+              </a:spcAft>
+              <a:defRPr sz="1100" b="1">
+                <a:solidFill>
+                  <a:srgbClr val="F1F5F9"/>
+                </a:solidFill>
+              </a:defRPr>
+            </a:pPr>
+            <a:r>
+              <a:t>• Single-Click Live Sync: </a:t>
+            </a:r>
+            <a:r>
+              <a:rPr b="0">
+                <a:solidFill>
+                  <a:srgbClr val="94A3B8"/>
+                </a:solidFill>
+              </a:rPr>
+              <a:t>Features button to pull actual live host metrics into the simulator as a baseline reference.</a:t>
+            </a:r>
+          </a:p>
+        </p:txBody>
+      </p:sp>
+      <p:sp>
+        <p:nvSpPr>
+          <p:cNvPr id="6" name="Rounded Rectangle 5"/>
+          <p:cNvSpPr/>
+          <p:nvPr/>
+        </p:nvSpPr>
+        <p:spPr>
+          <a:xfrm>
+            <a:off x="6217920" y="1371600"/>
+            <a:ext cx="5212080" cy="4937760"/>
+          </a:xfrm>
+          <a:prstGeom prst="roundRect">
+            <a:avLst/>
+          </a:prstGeom>
+          <a:solidFill>
+            <a:srgbClr val="131B2C"/>
+          </a:solidFill>
+          <a:ln>
+            <a:solidFill>
+              <a:srgbClr val="F87171"/>
+            </a:solidFill>
+          </a:ln>
+        </p:spPr>
+        <p:style>
+          <a:lnRef idx="1">
+            <a:schemeClr val="accent1"/>
+          </a:lnRef>
+          <a:fillRef idx="3">
+            <a:schemeClr val="accent1"/>
+          </a:fillRef>
+          <a:effectRef idx="2">
+            <a:schemeClr val="accent1"/>
+          </a:effectRef>
+          <a:fontRef idx="minor">
+            <a:schemeClr val="lt1"/>
+          </a:fontRef>
+        </p:style>
+        <p:txBody>
+          <a:bodyPr rtlCol="0" anchor="ctr" wrap="square" lIns="365760" tIns="365760"/>
+          <a:lstStyle/>
+          <a:p>
+            <a:pPr algn="ctr">
+              <a:spcAft>
+                <a:spcPts val="1000"/>
+              </a:spcAft>
+              <a:defRPr sz="1400" b="1">
+                <a:solidFill>
+                  <a:srgbClr val="F87171"/>
+                </a:solidFill>
+              </a:defRPr>
+            </a:pPr>
+            <a:r>
+              <a:t>MITRE ATT&amp;CK WARGAME SCENARIOS</a:t>
+            </a:r>
+          </a:p>
+          <a:p>
+            <a:pPr>
+              <a:spcAft>
+                <a:spcPts val="800"/>
+              </a:spcAft>
+              <a:defRPr sz="1000" b="1">
+                <a:solidFill>
+                  <a:srgbClr val="F1F5F9"/>
+                </a:solidFill>
+              </a:defRPr>
+            </a:pPr>
+            <a:r>
+              <a:t>⚔ SSH / RDP Brute Force Storm (T1110): </a:t>
+            </a:r>
+            <a:r>
+              <a:rPr b="0">
+                <a:solidFill>
+                  <a:srgbClr val="94A3B8"/>
+                </a:solidFill>
+              </a:rPr>
+              <a:t>Simulates credential-stuffing pressure against remote daemons, generating live security alert logs.</a:t>
+            </a:r>
+          </a:p>
+          <a:p>
+            <a:pPr>
+              <a:spcAft>
+                <a:spcPts val="800"/>
+              </a:spcAft>
+              <a:defRPr sz="1000" b="1">
+                <a:solidFill>
+                  <a:srgbClr val="F1F5F9"/>
+                </a:solidFill>
+              </a:defRPr>
+            </a:pPr>
+            <a:r>
+              <a:t>⚔ Distributed SYN Flood DDoS (T1499): </a:t>
+            </a:r>
+            <a:r>
+              <a:rPr b="0">
+                <a:solidFill>
+                  <a:srgbClr val="94A3B8"/>
+                </a:solidFill>
+              </a:rPr>
+              <a:t>Models volumetric connection exhaustion and elevated risk scoring.</a:t>
+            </a:r>
+          </a:p>
+          <a:p>
+            <a:pPr>
+              <a:spcAft>
+                <a:spcPts val="800"/>
+              </a:spcAft>
+              <a:defRPr sz="1000" b="1">
+                <a:solidFill>
+                  <a:srgbClr val="F1F5F9"/>
+                </a:solidFill>
+              </a:defRPr>
+            </a:pPr>
+            <a:r>
+              <a:t>⚔ Aggressive Reconnaissance Scan (T1046): </a:t>
+            </a:r>
+            <a:r>
+              <a:rPr b="0">
+                <a:solidFill>
+                  <a:srgbClr val="94A3B8"/>
+                </a:solidFill>
+              </a:rPr>
+              <a:t>Simulates full-range port sweeps attempting to fingerprint local services.</a:t>
+            </a:r>
+          </a:p>
+          <a:p>
+            <a:pPr>
+              <a:spcAft>
+                <a:spcPts val="800"/>
+              </a:spcAft>
+              <a:defRPr sz="1000" b="1">
+                <a:solidFill>
+                  <a:srgbClr val="F1F5F9"/>
+                </a:solidFill>
+              </a:defRPr>
+            </a:pPr>
+            <a:r>
+              <a:t>⚔ Interactive Defense Trigger: </a:t>
+            </a:r>
+            <a:r>
+              <a:rPr b="0">
+                <a:solidFill>
+                  <a:srgbClr val="94A3B8"/>
+                </a:solidFill>
+              </a:rPr>
+              <a:t>Operator triggers simulated mitigation, logging the defensive event into the persistent SQLite database.</a:t>
+            </a:r>
+          </a:p>
+        </p:txBody>
+      </p:sp>
+    </p:spTree>
+  </p:cSld>
+  <p:clrMapOvr>
+    <a:masterClrMapping/>
+  </p:clrMapOvr>
+</p:sld>
+</file>
+
+<file path=ppt/slides/slide8.xml><?xml version="1.0" encoding="utf-8"?>
+<p:sld xmlns:a="http://schemas.openxmlformats.org/drawingml/2006/main" xmlns:p="http://schemas.openxmlformats.org/presentationml/2006/main" xmlns:r="http://schemas.openxmlformats.org/officeDocument/2006/relationships">
+  <p:cSld>
+    <p:spTree>
+      <p:nvGrpSpPr>
+        <p:cNvPr id="1" name=""/>
+        <p:cNvGrpSpPr/>
+        <p:nvPr/>
+      </p:nvGrpSpPr>
+      <p:grpSpPr/>
+      <p:sp>
+        <p:nvSpPr>
+          <p:cNvPr id="2" name="Rectangle 1"/>
+          <p:cNvSpPr/>
+          <p:nvPr/>
+        </p:nvSpPr>
+        <p:spPr>
+          <a:xfrm>
+            <a:off x="0" y="0"/>
+            <a:ext cx="12191695" cy="6858000"/>
+          </a:xfrm>
+          <a:prstGeom prst="rect">
+            <a:avLst/>
+          </a:prstGeom>
+          <a:solidFill>
+            <a:srgbClr val="0B0F19"/>
+          </a:solidFill>
+          <a:ln>
+            <a:noFill/>
+          </a:ln>
+        </p:spPr>
+        <p:style>
+          <a:lnRef idx="1">
+            <a:schemeClr val="accent1"/>
+          </a:lnRef>
+          <a:fillRef idx="3">
+            <a:schemeClr val="accent1"/>
+          </a:fillRef>
+          <a:effectRef idx="2">
+            <a:schemeClr val="accent1"/>
+          </a:effectRef>
+          <a:fontRef idx="minor">
+            <a:schemeClr val="lt1"/>
+          </a:fontRef>
+        </p:style>
+        <p:txBody>
+          <a:bodyPr rtlCol="0" anchor="ctr"/>
+          <a:lstStyle/>
+          <a:p>
+            <a:pPr algn="ctr"/>
+          </a:p>
+        </p:txBody>
+      </p:sp>
+      <p:sp>
+        <p:nvSpPr>
+          <p:cNvPr id="3" name="TextBox 2"/>
+          <p:cNvSpPr txBox="1"/>
+          <p:nvPr/>
+        </p:nvSpPr>
+        <p:spPr>
+          <a:xfrm>
+            <a:off x="731520" y="320040"/>
+            <a:ext cx="10698480" cy="320040"/>
+          </a:xfrm>
+          <a:prstGeom prst="rect">
+            <a:avLst/>
+          </a:prstGeom>
+          <a:noFill/>
+        </p:spPr>
+        <p:txBody>
+          <a:bodyPr wrap="square">
+            <a:spAutoFit/>
+          </a:bodyPr>
+          <a:lstStyle/>
+          <a:p>
+            <a:pPr>
+              <a:defRPr sz="1000" b="1">
+                <a:solidFill>
+                  <a:srgbClr val="22D3EE"/>
+                </a:solidFill>
+              </a:defRPr>
+            </a:pPr>
+            <a:r>
+              <a:t>SMART INDIA HACKATHON 2026 | PS ID: SIH26105 | BYTEFORCE_1 (180219)</a:t>
+            </a:r>
+          </a:p>
+        </p:txBody>
+      </p:sp>
+      <p:sp>
+        <p:nvSpPr>
+          <p:cNvPr id="4" name="TextBox 3"/>
+          <p:cNvSpPr txBox="1"/>
+          <p:nvPr/>
+        </p:nvSpPr>
+        <p:spPr>
+          <a:xfrm>
+            <a:off x="731520" y="594360"/>
+            <a:ext cx="10698480" cy="640080"/>
+          </a:xfrm>
+          <a:prstGeom prst="rect">
+            <a:avLst/>
+          </a:prstGeom>
+          <a:noFill/>
+        </p:spPr>
+        <p:txBody>
+          <a:bodyPr wrap="square">
+            <a:spAutoFit/>
+          </a:bodyPr>
+          <a:lstStyle/>
+          <a:p>
+            <a:pPr>
+              <a:defRPr sz="2200" b="1">
+                <a:solidFill>
+                  <a:srgbClr val="F1F5F9"/>
+                </a:solidFill>
+              </a:defRPr>
+            </a:pPr>
+            <a:r>
+              <a:t>Slide 08 | Budget-Constrained Security Investment Optimization</a:t>
+            </a:r>
+          </a:p>
+        </p:txBody>
+      </p:sp>
+      <p:sp>
+        <p:nvSpPr>
+          <p:cNvPr id="5" name="Rounded Rectangle 4"/>
+          <p:cNvSpPr/>
+          <p:nvPr/>
+        </p:nvSpPr>
+        <p:spPr>
+          <a:xfrm>
+            <a:off x="731520" y="1371600"/>
+            <a:ext cx="5120640" cy="4937760"/>
+          </a:xfrm>
+          <a:prstGeom prst="roundRect">
+            <a:avLst/>
+          </a:prstGeom>
+          <a:solidFill>
+            <a:srgbClr val="131B2C"/>
+          </a:solidFill>
+          <a:ln>
+            <a:solidFill>
+              <a:srgbClr val="FBBF24"/>
+            </a:solidFill>
+          </a:ln>
+        </p:spPr>
+        <p:style>
+          <a:lnRef idx="1">
+            <a:schemeClr val="accent1"/>
+          </a:lnRef>
+          <a:fillRef idx="3">
+            <a:schemeClr val="accent1"/>
+          </a:fillRef>
+          <a:effectRef idx="2">
+            <a:schemeClr val="accent1"/>
+          </a:effectRef>
+          <a:fontRef idx="minor">
+            <a:schemeClr val="lt1"/>
+          </a:fontRef>
+        </p:style>
+        <p:txBody>
+          <a:bodyPr rtlCol="0" anchor="ctr" wrap="square" lIns="365760" tIns="365760"/>
+          <a:lstStyle/>
+          <a:p>
+            <a:pPr algn="ctr">
+              <a:spcAft>
+                <a:spcPts val="1000"/>
+              </a:spcAft>
+              <a:defRPr sz="1400" b="1">
+                <a:solidFill>
+                  <a:srgbClr val="FBBF24"/>
+                </a:solidFill>
+              </a:defRPr>
+            </a:pPr>
+            <a:r>
+              <a:t>KNAPSACK OPTIMIZATION LOGIC</a:t>
+            </a:r>
+          </a:p>
+          <a:p>
+            <a:pPr>
+              <a:spcAft>
+                <a:spcPts val="600"/>
+              </a:spcAft>
+              <a:defRPr sz="1000" b="1">
+                <a:solidFill>
+                  <a:srgbClr val="F1F5F9"/>
+                </a:solidFill>
+              </a:defRPr>
+            </a:pPr>
+            <a:r>
+              <a:t>1. Input Parameters:</a:t>
             </a:r>
             <a:br/>
             <a:r>
-              <a:t>   </a:t>
-            </a:r>
-            <a:r>
               <a:rPr b="0">
                 <a:solidFill>
                   <a:srgbClr val="94A3B8"/>
                 </a:solidFill>
               </a:rPr>
-              <a:t>Show Module 04 with real-time ₹ Total Loss Exposure &amp; Downtime Hours.</a:t>
+              <a:t>Monthly Budget (e.g. ₹50,000 – ₹1,00,000), Managed System Count, and Critical Data Value (₹).</a:t>
             </a:r>
           </a:p>
           <a:p>
@@ -5674,26 +9022,26 @@
               <a:spcAft>
                 <a:spcPts val="600"/>
               </a:spcAft>
-              <a:defRPr sz="1100" b="1">
-                <a:solidFill>
-                  <a:srgbClr val="F1F5F9"/>
-                </a:solidFill>
-              </a:defRPr>
-            </a:pPr>
-            <a:r>
-              <a:t>⏱ Step 2 (1:00 - 2:15): Knapsack Investment Optimizer</a:t>
+              <a:defRPr sz="1000" b="1">
+                <a:solidFill>
+                  <a:srgbClr val="F1F5F9"/>
+                </a:solidFill>
+              </a:defRPr>
+            </a:pPr>
+            <a:r>
+              <a:t>2. Candidate Defense Packages:</a:t>
             </a:r>
             <a:br/>
             <a:r>
-              <a:t>   </a:t>
-            </a:r>
-            <a:r>
               <a:rPr b="0">
                 <a:solidFill>
                   <a:srgbClr val="94A3B8"/>
                 </a:solidFill>
               </a:rPr>
-              <a:t>Enter ₹1,00,000 budget in Module 06; execute Pareto optimization.</a:t>
+              <a:t>Evaluates defined control tiers:
+- Essential (₹25,000/mo, ~15% Risk Reduction)
+- Professional (₹75,000/mo, ~35% Risk Reduction)
+- Enterprise (₹1,50,000/mo, ~60% Risk Reduction).</a:t>
             </a:r>
           </a:p>
           <a:p>
@@ -5701,26 +9049,23 @@
               <a:spcAft>
                 <a:spcPts val="600"/>
               </a:spcAft>
-              <a:defRPr sz="1100" b="1">
-                <a:solidFill>
-                  <a:srgbClr val="F1F5F9"/>
-                </a:solidFill>
-              </a:defRPr>
-            </a:pPr>
-            <a:r>
-              <a:t>⏱ Step 3 (2:15 - 3:45): Live Blockchain Tamper Attack</a:t>
+              <a:defRPr sz="1000" b="1">
+                <a:solidFill>
+                  <a:srgbClr val="F1F5F9"/>
+                </a:solidFill>
+              </a:defRPr>
+            </a:pPr>
+            <a:r>
+              <a:t>3. Budget Feasibility Filter:</a:t>
             </a:r>
             <a:br/>
             <a:r>
-              <a:t>   </a:t>
-            </a:r>
-            <a:r>
               <a:rPr b="0">
                 <a:solidFill>
                   <a:srgbClr val="94A3B8"/>
                 </a:solidFill>
               </a:rPr>
-              <a:t>Module 10: Simulate log tamper attack ➔ instant crimson alert ➔ restore consensus!</a:t>
+              <a:t>Constraint: Package_Cost ≤ Stated_Monthly_Budget.</a:t>
             </a:r>
           </a:p>
           <a:p>
@@ -5728,26 +9073,80 @@
               <a:spcAft>
                 <a:spcPts val="600"/>
               </a:spcAft>
-              <a:defRPr sz="1100" b="1">
-                <a:solidFill>
-                  <a:srgbClr val="F1F5F9"/>
-                </a:solidFill>
-              </a:defRPr>
-            </a:pPr>
-            <a:r>
-              <a:t>⏱ Step 4 (3:45 - 4:45): Zero-Trust Auto-Lock &amp; Gestures</a:t>
+              <a:defRPr sz="1000" b="1">
+                <a:solidFill>
+                  <a:srgbClr val="F1F5F9"/>
+                </a:solidFill>
+              </a:defRPr>
+            </a:pPr>
+            <a:r>
+              <a:t>4. Return on Security Investment (ROSI):</a:t>
             </a:r>
             <a:br/>
             <a:r>
-              <a:t>   </a:t>
-            </a:r>
-            <a:r>
               <a:rPr b="0">
                 <a:solidFill>
                   <a:srgbClr val="94A3B8"/>
                 </a:solidFill>
               </a:rPr>
-              <a:t>Module 09: Step away from camera (Auto-lock triggers) + ☝️ New Folder, 🤞 Delete File, 🤏 Volume Slide.</a:t>
+              <a:t>ROSI (%) = [ (Potential Savings - Package Cost) / Package Cost ] × 100.</a:t>
+            </a:r>
+          </a:p>
+        </p:txBody>
+      </p:sp>
+      <p:sp>
+        <p:nvSpPr>
+          <p:cNvPr id="6" name="Rounded Rectangle 5"/>
+          <p:cNvSpPr/>
+          <p:nvPr/>
+        </p:nvSpPr>
+        <p:spPr>
+          <a:xfrm>
+            <a:off x="6217920" y="1371600"/>
+            <a:ext cx="5212080" cy="4937760"/>
+          </a:xfrm>
+          <a:prstGeom prst="roundRect">
+            <a:avLst/>
+          </a:prstGeom>
+          <a:solidFill>
+            <a:srgbClr val="131B2C"/>
+          </a:solidFill>
+          <a:ln>
+            <a:solidFill>
+              <a:srgbClr val="34D399"/>
+            </a:solidFill>
+          </a:ln>
+        </p:spPr>
+        <p:style>
+          <a:lnRef idx="1">
+            <a:schemeClr val="accent1"/>
+          </a:lnRef>
+          <a:fillRef idx="3">
+            <a:schemeClr val="accent1"/>
+          </a:fillRef>
+          <a:effectRef idx="2">
+            <a:schemeClr val="accent1"/>
+          </a:effectRef>
+          <a:fontRef idx="minor">
+            <a:schemeClr val="lt1"/>
+          </a:fontRef>
+        </p:style>
+        <p:txBody>
+          <a:bodyPr rtlCol="0" anchor="ctr" wrap="square" lIns="365760" tIns="365760"/>
+          <a:lstStyle/>
+          <a:p>
+            <a:pPr algn="ctr">
+              <a:spcAft>
+                <a:spcPts val="1000"/>
+              </a:spcAft>
+              <a:defRPr sz="1400" b="1">
+                <a:solidFill>
+                  <a:srgbClr val="34D399"/>
+                </a:solidFill>
+              </a:defRPr>
+            </a:pPr>
+            <a:r>
+              <a:t>DECISION SUPPORT OUTPUT</a:t>
             </a:r>
           </a:p>
           <a:p>
@@ -5755,26 +9154,551 @@
               <a:spcAft>
                 <a:spcPts val="600"/>
               </a:spcAft>
-              <a:defRPr sz="1100" b="1">
-                <a:solidFill>
-                  <a:srgbClr val="F1F5F9"/>
-                </a:solidFill>
-              </a:defRPr>
-            </a:pPr>
-            <a:r>
-              <a:t>⏱ Step 5 (4:45 - 5:00): Executive PDF Audit Export</a:t>
+              <a:defRPr sz="1000" b="1">
+                <a:solidFill>
+                  <a:srgbClr val="F1F5F9"/>
+                </a:solidFill>
+              </a:defRPr>
+            </a:pPr>
+            <a:r>
+              <a:t>✔ Ranked Recommendation Score:</a:t>
             </a:r>
             <a:br/>
             <a:r>
-              <a:t>   </a:t>
-            </a:r>
-            <a:r>
               <a:rPr b="0">
                 <a:solidFill>
                   <a:srgbClr val="94A3B8"/>
                 </a:solidFill>
               </a:rPr>
-              <a:t>1-Click PDF download demonstrating board-ready CISO compliance.</a:t>
+              <a:t>Calculates composite score based on affordability (+40), positive net benefit (+30), and scaled ROI (+30).</a:t>
+            </a:r>
+          </a:p>
+          <a:p>
+            <a:pPr>
+              <a:spcAft>
+                <a:spcPts val="600"/>
+              </a:spcAft>
+              <a:defRPr sz="1000" b="1">
+                <a:solidFill>
+                  <a:srgbClr val="F1F5F9"/>
+                </a:solidFill>
+              </a:defRPr>
+            </a:pPr>
+            <a:r>
+              <a:t>✔ Automated Plan Selection:</a:t>
+            </a:r>
+            <a:br/>
+            <a:r>
+              <a:rPr b="0">
+                <a:solidFill>
+                  <a:srgbClr val="94A3B8"/>
+                </a:solidFill>
+              </a:rPr>
+              <a:t>Recommends the affordable tier delivering highest net financial savings within budget.</a:t>
+            </a:r>
+          </a:p>
+          <a:p>
+            <a:pPr>
+              <a:spcAft>
+                <a:spcPts val="600"/>
+              </a:spcAft>
+              <a:defRPr sz="1000" b="1">
+                <a:solidFill>
+                  <a:srgbClr val="F1F5F9"/>
+                </a:solidFill>
+              </a:defRPr>
+            </a:pPr>
+            <a:r>
+              <a:t>✔ Tailored Security Actions:</a:t>
+            </a:r>
+            <a:br/>
+            <a:r>
+              <a:rPr b="0">
+                <a:solidFill>
+                  <a:srgbClr val="94A3B8"/>
+                </a:solidFill>
+              </a:rPr>
+              <a:t>Generates prioritized recommendations (e.g. MFA enforcement, offline backup verification, port closure).</a:t>
+            </a:r>
+          </a:p>
+          <a:p>
+            <a:pPr>
+              <a:spcAft>
+                <a:spcPts val="600"/>
+              </a:spcAft>
+              <a:defRPr sz="1000" b="1">
+                <a:solidFill>
+                  <a:srgbClr val="F1F5F9"/>
+                </a:solidFill>
+              </a:defRPr>
+            </a:pPr>
+            <a:r>
+              <a:t>✔ Prototype Status Disclosure:</a:t>
+            </a:r>
+            <a:br/>
+            <a:r>
+              <a:rPr b="0">
+                <a:solidFill>
+                  <a:srgbClr val="94A3B8"/>
+                </a:solidFill>
+              </a:rPr>
+              <a:t>◐ PROTOTYPE — Illustrates algorithmic budget allocation; real enterprise deployment would ingest specific vendor RFP quotes.</a:t>
+            </a:r>
+          </a:p>
+        </p:txBody>
+      </p:sp>
+    </p:spTree>
+  </p:cSld>
+  <p:clrMapOvr>
+    <a:masterClrMapping/>
+  </p:clrMapOvr>
+</p:sld>
+</file>
+
+<file path=ppt/slides/slide9.xml><?xml version="1.0" encoding="utf-8"?>
+<p:sld xmlns:a="http://schemas.openxmlformats.org/drawingml/2006/main" xmlns:p="http://schemas.openxmlformats.org/presentationml/2006/main" xmlns:r="http://schemas.openxmlformats.org/officeDocument/2006/relationships">
+  <p:cSld>
+    <p:spTree>
+      <p:nvGrpSpPr>
+        <p:cNvPr id="1" name=""/>
+        <p:cNvGrpSpPr/>
+        <p:nvPr/>
+      </p:nvGrpSpPr>
+      <p:grpSpPr/>
+      <p:sp>
+        <p:nvSpPr>
+          <p:cNvPr id="2" name="Rectangle 1"/>
+          <p:cNvSpPr/>
+          <p:nvPr/>
+        </p:nvSpPr>
+        <p:spPr>
+          <a:xfrm>
+            <a:off x="0" y="0"/>
+            <a:ext cx="12191695" cy="6858000"/>
+          </a:xfrm>
+          <a:prstGeom prst="rect">
+            <a:avLst/>
+          </a:prstGeom>
+          <a:solidFill>
+            <a:srgbClr val="0B0F19"/>
+          </a:solidFill>
+          <a:ln>
+            <a:noFill/>
+          </a:ln>
+        </p:spPr>
+        <p:style>
+          <a:lnRef idx="1">
+            <a:schemeClr val="accent1"/>
+          </a:lnRef>
+          <a:fillRef idx="3">
+            <a:schemeClr val="accent1"/>
+          </a:fillRef>
+          <a:effectRef idx="2">
+            <a:schemeClr val="accent1"/>
+          </a:effectRef>
+          <a:fontRef idx="minor">
+            <a:schemeClr val="lt1"/>
+          </a:fontRef>
+        </p:style>
+        <p:txBody>
+          <a:bodyPr rtlCol="0" anchor="ctr"/>
+          <a:lstStyle/>
+          <a:p>
+            <a:pPr algn="ctr"/>
+          </a:p>
+        </p:txBody>
+      </p:sp>
+      <p:sp>
+        <p:nvSpPr>
+          <p:cNvPr id="3" name="TextBox 2"/>
+          <p:cNvSpPr txBox="1"/>
+          <p:nvPr/>
+        </p:nvSpPr>
+        <p:spPr>
+          <a:xfrm>
+            <a:off x="731520" y="320040"/>
+            <a:ext cx="10698480" cy="320040"/>
+          </a:xfrm>
+          <a:prstGeom prst="rect">
+            <a:avLst/>
+          </a:prstGeom>
+          <a:noFill/>
+        </p:spPr>
+        <p:txBody>
+          <a:bodyPr wrap="square">
+            <a:spAutoFit/>
+          </a:bodyPr>
+          <a:lstStyle/>
+          <a:p>
+            <a:pPr>
+              <a:defRPr sz="1000" b="1">
+                <a:solidFill>
+                  <a:srgbClr val="22D3EE"/>
+                </a:solidFill>
+              </a:defRPr>
+            </a:pPr>
+            <a:r>
+              <a:t>SMART INDIA HACKATHON 2026 | PS ID: SIH26105 | BYTEFORCE_1 (180219)</a:t>
+            </a:r>
+          </a:p>
+        </p:txBody>
+      </p:sp>
+      <p:sp>
+        <p:nvSpPr>
+          <p:cNvPr id="4" name="TextBox 3"/>
+          <p:cNvSpPr txBox="1"/>
+          <p:nvPr/>
+        </p:nvSpPr>
+        <p:spPr>
+          <a:xfrm>
+            <a:off x="731520" y="594360"/>
+            <a:ext cx="10698480" cy="640080"/>
+          </a:xfrm>
+          <a:prstGeom prst="rect">
+            <a:avLst/>
+          </a:prstGeom>
+          <a:noFill/>
+        </p:spPr>
+        <p:txBody>
+          <a:bodyPr wrap="square">
+            <a:spAutoFit/>
+          </a:bodyPr>
+          <a:lstStyle/>
+          <a:p>
+            <a:pPr>
+              <a:defRPr sz="2200" b="1">
+                <a:solidFill>
+                  <a:srgbClr val="F1F5F9"/>
+                </a:solidFill>
+              </a:defRPr>
+            </a:pPr>
+            <a:r>
+              <a:t>Slide 09 | Trust Layer: Tamper-Evident SHA-256 Merkle Audit Ledger</a:t>
+            </a:r>
+          </a:p>
+        </p:txBody>
+      </p:sp>
+      <p:sp>
+        <p:nvSpPr>
+          <p:cNvPr id="5" name="Rounded Rectangle 4"/>
+          <p:cNvSpPr/>
+          <p:nvPr/>
+        </p:nvSpPr>
+        <p:spPr>
+          <a:xfrm>
+            <a:off x="731520" y="1371600"/>
+            <a:ext cx="5120640" cy="4937760"/>
+          </a:xfrm>
+          <a:prstGeom prst="roundRect">
+            <a:avLst/>
+          </a:prstGeom>
+          <a:solidFill>
+            <a:srgbClr val="131B2C"/>
+          </a:solidFill>
+          <a:ln>
+            <a:solidFill>
+              <a:srgbClr val="22D3EE"/>
+            </a:solidFill>
+          </a:ln>
+        </p:spPr>
+        <p:style>
+          <a:lnRef idx="1">
+            <a:schemeClr val="accent1"/>
+          </a:lnRef>
+          <a:fillRef idx="3">
+            <a:schemeClr val="accent1"/>
+          </a:fillRef>
+          <a:effectRef idx="2">
+            <a:schemeClr val="accent1"/>
+          </a:effectRef>
+          <a:fontRef idx="minor">
+            <a:schemeClr val="lt1"/>
+          </a:fontRef>
+        </p:style>
+        <p:txBody>
+          <a:bodyPr rtlCol="0" anchor="ctr" wrap="square" lIns="365760" tIns="365760"/>
+          <a:lstStyle/>
+          <a:p>
+            <a:pPr algn="ctr">
+              <a:spcAft>
+                <a:spcPts val="1000"/>
+              </a:spcAft>
+              <a:defRPr sz="1400" b="1">
+                <a:solidFill>
+                  <a:srgbClr val="22D3EE"/>
+                </a:solidFill>
+              </a:defRPr>
+            </a:pPr>
+            <a:r>
+              <a:t>CRYPTOGRAPHIC LEDGER MECHANISM</a:t>
+            </a:r>
+          </a:p>
+          <a:p>
+            <a:pPr>
+              <a:spcAft>
+                <a:spcPts val="600"/>
+              </a:spcAft>
+              <a:defRPr sz="1000" b="1">
+                <a:solidFill>
+                  <a:srgbClr val="F1F5F9"/>
+                </a:solidFill>
+              </a:defRPr>
+            </a:pPr>
+            <a:r>
+              <a:t>• Security Event Trigger: </a:t>
+            </a:r>
+            <a:r>
+              <a:rPr b="0">
+                <a:solidFill>
+                  <a:srgbClr val="94A3B8"/>
+                </a:solidFill>
+              </a:rPr>
+              <a:t>Risk assessments, threat quarantines, and budget changes emit structured payloads.</a:t>
+            </a:r>
+          </a:p>
+          <a:p>
+            <a:pPr>
+              <a:spcAft>
+                <a:spcPts val="600"/>
+              </a:spcAft>
+              <a:defRPr sz="1000" b="1">
+                <a:solidFill>
+                  <a:srgbClr val="F1F5F9"/>
+                </a:solidFill>
+              </a:defRPr>
+            </a:pPr>
+            <a:r>
+              <a:t>• Merkle Root Calculation: </a:t>
+            </a:r>
+            <a:r>
+              <a:rPr b="0">
+                <a:solidFill>
+                  <a:srgbClr val="94A3B8"/>
+                </a:solidFill>
+              </a:rPr>
+              <a:t>Pairwise SHA-256 hashing condenses arbitrary payload keys into a single cryptographic Merkle root.</a:t>
+            </a:r>
+          </a:p>
+          <a:p>
+            <a:pPr>
+              <a:spcAft>
+                <a:spcPts val="600"/>
+              </a:spcAft>
+              <a:defRPr sz="1000" b="1">
+                <a:solidFill>
+                  <a:srgbClr val="F1F5F9"/>
+                </a:solidFill>
+              </a:defRPr>
+            </a:pPr>
+            <a:r>
+              <a:t>• Proof-of-Work Mining: </a:t>
+            </a:r>
+            <a:r>
+              <a:rPr b="0">
+                <a:solidFill>
+                  <a:srgbClr val="94A3B8"/>
+                </a:solidFill>
+              </a:rPr>
+              <a:t>Calculates candidate header hash with dynamic nonce until satisfying target difficulty prefix.</a:t>
+            </a:r>
+          </a:p>
+          <a:p>
+            <a:pPr>
+              <a:spcAft>
+                <a:spcPts val="600"/>
+              </a:spcAft>
+              <a:defRPr sz="1000" b="1">
+                <a:solidFill>
+                  <a:srgbClr val="F1F5F9"/>
+                </a:solidFill>
+              </a:defRPr>
+            </a:pPr>
+            <a:r>
+              <a:t>• Chained Block Header: </a:t>
+            </a:r>
+            <a:r>
+              <a:rPr b="0">
+                <a:solidFill>
+                  <a:srgbClr val="94A3B8"/>
+                </a:solidFill>
+              </a:rPr>
+              <a:t>Block Hash = SHA256(Index + Timestamp + Event + MerkleRoot + PrevHash + Nonce).</a:t>
+            </a:r>
+          </a:p>
+          <a:p>
+            <a:pPr>
+              <a:spcAft>
+                <a:spcPts val="600"/>
+              </a:spcAft>
+              <a:defRPr sz="1000" b="1">
+                <a:solidFill>
+                  <a:srgbClr val="F1F5F9"/>
+                </a:solidFill>
+              </a:defRPr>
+            </a:pPr>
+            <a:r>
+              <a:t>• Defensible Terminology: </a:t>
+            </a:r>
+            <a:r>
+              <a:rPr b="0">
+                <a:solidFill>
+                  <a:srgbClr val="94A3B8"/>
+                </a:solidFill>
+              </a:rPr>
+              <a:t>Described as a 'Tamper-Evident Audit Ledger' — unauthorized modifications break cryptographic chain verification.</a:t>
+            </a:r>
+          </a:p>
+        </p:txBody>
+      </p:sp>
+      <p:sp>
+        <p:nvSpPr>
+          <p:cNvPr id="6" name="Rounded Rectangle 5"/>
+          <p:cNvSpPr/>
+          <p:nvPr/>
+        </p:nvSpPr>
+        <p:spPr>
+          <a:xfrm>
+            <a:off x="6217920" y="1371600"/>
+            <a:ext cx="5212080" cy="4937760"/>
+          </a:xfrm>
+          <a:prstGeom prst="roundRect">
+            <a:avLst/>
+          </a:prstGeom>
+          <a:solidFill>
+            <a:srgbClr val="131B2C"/>
+          </a:solidFill>
+          <a:ln>
+            <a:solidFill>
+              <a:srgbClr val="FBBF24"/>
+            </a:solidFill>
+          </a:ln>
+        </p:spPr>
+        <p:style>
+          <a:lnRef idx="1">
+            <a:schemeClr val="accent1"/>
+          </a:lnRef>
+          <a:fillRef idx="3">
+            <a:schemeClr val="accent1"/>
+          </a:fillRef>
+          <a:effectRef idx="2">
+            <a:schemeClr val="accent1"/>
+          </a:effectRef>
+          <a:fontRef idx="minor">
+            <a:schemeClr val="lt1"/>
+          </a:fontRef>
+        </p:style>
+        <p:txBody>
+          <a:bodyPr rtlCol="0" anchor="ctr" wrap="square" lIns="365760" tIns="365760"/>
+          <a:lstStyle/>
+          <a:p>
+            <a:pPr algn="ctr">
+              <a:spcAft>
+                <a:spcPts val="1000"/>
+              </a:spcAft>
+              <a:defRPr sz="1400" b="1">
+                <a:solidFill>
+                  <a:srgbClr val="FBBF24"/>
+                </a:solidFill>
+              </a:defRPr>
+            </a:pPr>
+            <a:r>
+              <a:t>VERIFICATION &amp; TAMPER DEMO</a:t>
+            </a:r>
+          </a:p>
+          <a:p>
+            <a:pPr>
+              <a:spcAft>
+                <a:spcPts val="600"/>
+              </a:spcAft>
+              <a:defRPr sz="1000" b="1">
+                <a:solidFill>
+                  <a:srgbClr val="F1F5F9"/>
+                </a:solidFill>
+              </a:defRPr>
+            </a:pPr>
+            <a:r>
+              <a:t>✔ Full Chain Validation (verify_integrity):</a:t>
+            </a:r>
+            <a:br/>
+            <a:r>
+              <a:rPr b="0">
+                <a:solidFill>
+                  <a:srgbClr val="94A3B8"/>
+                </a:solidFill>
+              </a:rPr>
+              <a:t>Traverses chain from Genesis (Block 0) to tip, verifying previous_hash links, recomputed Merkle roots, and block hashes.</a:t>
+            </a:r>
+          </a:p>
+          <a:p>
+            <a:pPr>
+              <a:spcAft>
+                <a:spcPts val="600"/>
+              </a:spcAft>
+              <a:defRPr sz="1000" b="1">
+                <a:solidFill>
+                  <a:srgbClr val="F1F5F9"/>
+                </a:solidFill>
+              </a:defRPr>
+            </a:pPr>
+            <a:r>
+              <a:t>✔ Simulate Tamper Attack (DEMO):</a:t>
+            </a:r>
+            <a:br/>
+            <a:r>
+              <a:rPr b="0">
+                <a:solidFill>
+                  <a:srgbClr val="94A3B8"/>
+                </a:solidFill>
+              </a:rPr>
+              <a:t>Modifies stored data payload of Block #1 in JSON storage to simulate rogue log alteration.</a:t>
+            </a:r>
+          </a:p>
+          <a:p>
+            <a:pPr>
+              <a:spcAft>
+                <a:spcPts val="600"/>
+              </a:spcAft>
+              <a:defRPr sz="1000" b="1">
+                <a:solidFill>
+                  <a:srgbClr val="F1F5F9"/>
+                </a:solidFill>
+              </a:defRPr>
+            </a:pPr>
+            <a:r>
+              <a:t>✔ Instant Cryptographic Detection:</a:t>
+            </a:r>
+            <a:br/>
+            <a:r>
+              <a:rPr b="0">
+                <a:solidFill>
+                  <a:srgbClr val="94A3B8"/>
+                </a:solidFill>
+              </a:rPr>
+              <a:t>Next integrity audit immediately detects Merkle root mismatch and broken hash chain, flagging the exact invalid block.</a:t>
+            </a:r>
+          </a:p>
+          <a:p>
+            <a:pPr>
+              <a:spcAft>
+                <a:spcPts val="600"/>
+              </a:spcAft>
+              <a:defRPr sz="1000" b="1">
+                <a:solidFill>
+                  <a:srgbClr val="F1F5F9"/>
+                </a:solidFill>
+              </a:defRPr>
+            </a:pPr>
+            <a:r>
+              <a:t>✔ Consensus State Restoration:</a:t>
+            </a:r>
+            <a:br/>
+            <a:r>
+              <a:rPr b="0">
+                <a:solidFill>
+                  <a:srgbClr val="94A3B8"/>
+                </a:solidFill>
+              </a:rPr>
+              <a:t>Restores verified snapshot from backup memory pool, returning ledger to verified state.</a:t>
             </a:r>
           </a:p>
         </p:txBody>

--- a/Docs/AURA_SENTINEL_SIH26105.pptx
+++ b/Docs/AURA_SENTINEL_SIH26105.pptx
@@ -3193,7 +3193,7 @@
               </a:defRPr>
             </a:pPr>
             <a:r>
-              <a:t>SMART INDIA HACKATHON 2026 — OFFICIAL NOMINATION</a:t>
+              <a:t>SMART INDIA HACKATHON 2026</a:t>
             </a:r>
           </a:p>
           <a:p>
